--- a/presentations/inflation_slide_template.pptx
+++ b/presentations/inflation_slide_template.pptx
@@ -22,11 +22,9 @@
     <p:sldId id="270" r:id="rId16"/>
     <p:sldId id="271" r:id="rId17"/>
     <p:sldId id="272" r:id="rId18"/>
-    <p:sldId id="273" r:id="rId19"/>
-    <p:sldId id="274" r:id="rId20"/>
   </p:sldIdLst>
   <p:notesMasterIdLst>
-    <p:notesMasterId r:id="rId21"/>
+    <p:notesMasterId r:id="rId19"/>
   </p:notesMasterIdLst>
   <p:sldSz cx="12192000" cy="6858000"/>
   <p:notesSz cx="6858000" cy="12192000"/>
@@ -608,7 +606,7 @@
           <a:p>
             <a:r>
               <a:rPr lang="en-US" dirty="0"/>
-              <a:t/>
+              <a:t>様式4-2号の構成。数値は試しデータ。スライド額は円未満を切り捨て表示（元値 1,858,432.86）。</a:t>
             </a:r>
             <a:endParaRPr lang="en-US" dirty="0"/>
           </a:p>
@@ -1248,182 +1246,6 @@
             <a:fld id="{F7021451-1387-4CA6-816F-3879F97B5CBC}" type="slidenum">
               <a:rPr lang="en-US"/>
               <a:t>17</a:t>
-            </a:fld>
-            <a:endParaRPr lang="en-US"/>
-          </a:p>
-        </p:txBody>
-      </p:sp>
-    </p:spTree>
-    <p:extLst>
-      <p:ext uri="{BB962C8B-B14F-4D97-AF65-F5344CB8AC3E}">
-        <p14:creationId xmlns:p14="http://schemas.microsoft.com/office/powerpoint/2010/main" val="1024086991"/>
-      </p:ext>
-    </p:extLst>
-  </p:cSld>
-  <p:clrMapOvr>
-    <a:masterClrMapping/>
-  </p:clrMapOvr>
-</p:notes>
-</file>
-
-<file path=ppt/notesSlides/notesSlide18.xml><?xml version="1.0" encoding="utf-8"?>
-<p:notes xmlns:a="http://schemas.openxmlformats.org/drawingml/2006/main" xmlns:r="http://schemas.openxmlformats.org/officeDocument/2006/relationships" xmlns:p="http://schemas.openxmlformats.org/presentationml/2006/main">
-  <p:cSld>
-    <p:spTree>
-      <p:nvGrpSpPr>
-        <p:cNvPr id="1" name=""/>
-        <p:cNvGrpSpPr/>
-        <p:nvPr/>
-      </p:nvGrpSpPr>
-      <p:grpSpPr>
-        <a:xfrm>
-          <a:off x="0" y="0"/>
-          <a:ext cx="0" cy="0"/>
-          <a:chOff x="0" y="0"/>
-          <a:chExt cx="0" cy="0"/>
-        </a:xfrm>
-      </p:grpSpPr>
-      <p:sp>
-        <p:nvSpPr>
-          <p:cNvPr id="2" name="Slide Image Placeholder 1"/>
-          <p:cNvSpPr>
-            <a:spLocks noGrp="1" noRot="1" noChangeAspect="1"/>
-          </p:cNvSpPr>
-          <p:nvPr>
-            <p:ph type="sldImg"/>
-          </p:nvPr>
-        </p:nvSpPr>
-        <p:spPr/>
-      </p:sp>
-      <p:sp>
-        <p:nvSpPr>
-          <p:cNvPr id="3" name="Notes Placeholder 2"/>
-          <p:cNvSpPr>
-            <a:spLocks noGrp="1"/>
-          </p:cNvSpPr>
-          <p:nvPr>
-            <p:ph type="body" idx="1"/>
-          </p:nvPr>
-        </p:nvSpPr>
-        <p:spPr/>
-        <p:txBody>
-          <a:bodyPr/>
-          <a:lstStyle/>
-          <a:p>
-            <a:r>
-              <a:rPr lang="en-US" dirty="0"/>
-              <a:t/>
-            </a:r>
-            <a:endParaRPr lang="en-US" dirty="0"/>
-          </a:p>
-        </p:txBody>
-      </p:sp>
-      <p:sp>
-        <p:nvSpPr>
-          <p:cNvPr id="4" name="Slide Number Placeholder 3"/>
-          <p:cNvSpPr>
-            <a:spLocks noGrp="1"/>
-          </p:cNvSpPr>
-          <p:nvPr>
-            <p:ph type="sldNum" sz="quarter" idx="10"/>
-          </p:nvPr>
-        </p:nvSpPr>
-        <p:spPr/>
-        <p:txBody>
-          <a:bodyPr/>
-          <a:lstStyle/>
-          <a:p>
-            <a:fld id="{F7021451-1387-4CA6-816F-3879F97B5CBC}" type="slidenum">
-              <a:rPr lang="en-US"/>
-              <a:t>18</a:t>
-            </a:fld>
-            <a:endParaRPr lang="en-US"/>
-          </a:p>
-        </p:txBody>
-      </p:sp>
-    </p:spTree>
-    <p:extLst>
-      <p:ext uri="{BB962C8B-B14F-4D97-AF65-F5344CB8AC3E}">
-        <p14:creationId xmlns:p14="http://schemas.microsoft.com/office/powerpoint/2010/main" val="1024086991"/>
-      </p:ext>
-    </p:extLst>
-  </p:cSld>
-  <p:clrMapOvr>
-    <a:masterClrMapping/>
-  </p:clrMapOvr>
-</p:notes>
-</file>
-
-<file path=ppt/notesSlides/notesSlide19.xml><?xml version="1.0" encoding="utf-8"?>
-<p:notes xmlns:a="http://schemas.openxmlformats.org/drawingml/2006/main" xmlns:r="http://schemas.openxmlformats.org/officeDocument/2006/relationships" xmlns:p="http://schemas.openxmlformats.org/presentationml/2006/main">
-  <p:cSld>
-    <p:spTree>
-      <p:nvGrpSpPr>
-        <p:cNvPr id="1" name=""/>
-        <p:cNvGrpSpPr/>
-        <p:nvPr/>
-      </p:nvGrpSpPr>
-      <p:grpSpPr>
-        <a:xfrm>
-          <a:off x="0" y="0"/>
-          <a:ext cx="0" cy="0"/>
-          <a:chOff x="0" y="0"/>
-          <a:chExt cx="0" cy="0"/>
-        </a:xfrm>
-      </p:grpSpPr>
-      <p:sp>
-        <p:nvSpPr>
-          <p:cNvPr id="2" name="Slide Image Placeholder 1"/>
-          <p:cNvSpPr>
-            <a:spLocks noGrp="1" noRot="1" noChangeAspect="1"/>
-          </p:cNvSpPr>
-          <p:nvPr>
-            <p:ph type="sldImg"/>
-          </p:nvPr>
-        </p:nvSpPr>
-        <p:spPr/>
-      </p:sp>
-      <p:sp>
-        <p:nvSpPr>
-          <p:cNvPr id="3" name="Notes Placeholder 2"/>
-          <p:cNvSpPr>
-            <a:spLocks noGrp="1"/>
-          </p:cNvSpPr>
-          <p:nvPr>
-            <p:ph type="body" idx="1"/>
-          </p:nvPr>
-        </p:nvSpPr>
-        <p:spPr/>
-        <p:txBody>
-          <a:bodyPr/>
-          <a:lstStyle/>
-          <a:p>
-            <a:r>
-              <a:rPr lang="en-US" dirty="0"/>
-              <a:t/>
-            </a:r>
-            <a:endParaRPr lang="en-US" dirty="0"/>
-          </a:p>
-        </p:txBody>
-      </p:sp>
-      <p:sp>
-        <p:nvSpPr>
-          <p:cNvPr id="4" name="Slide Number Placeholder 3"/>
-          <p:cNvSpPr>
-            <a:spLocks noGrp="1"/>
-          </p:cNvSpPr>
-          <p:nvPr>
-            <p:ph type="sldNum" sz="quarter" idx="10"/>
-          </p:nvPr>
-        </p:nvSpPr>
-        <p:spPr/>
-        <p:txBody>
-          <a:bodyPr/>
-          <a:lstStyle/>
-          <a:p>
-            <a:fld id="{F7021451-1387-4CA6-816F-3879F97B5CBC}" type="slidenum">
-              <a:rPr lang="en-US"/>
-              <a:t>19</a:t>
             </a:fld>
             <a:endParaRPr lang="en-US"/>
           </a:p>
@@ -2459,7 +2281,7 @@
     <p:bg>
       <p:bgPr>
         <a:solidFill>
-          <a:srgbClr val="1F3A4D"/>
+          <a:srgbClr val="FFFFFF"/>
         </a:solidFill>
       </p:bgPr>
     </p:bg>
@@ -2492,11 +2314,11 @@
             <a:avLst/>
           </a:prstGeom>
           <a:solidFill>
-            <a:srgbClr val="2E5470"/>
+            <a:srgbClr val="EEF2F5"/>
           </a:solidFill>
           <a:ln w="12700">
             <a:solidFill>
-              <a:srgbClr val="2E5470"/>
+              <a:srgbClr val="EEF2F5"/>
             </a:solidFill>
             <a:prstDash val="solid"/>
           </a:ln>
@@ -2517,11 +2339,11 @@
             <a:avLst/>
           </a:prstGeom>
           <a:solidFill>
-            <a:srgbClr val="2E5470"/>
+            <a:srgbClr val="EEF2F5"/>
           </a:solidFill>
           <a:ln w="12700">
             <a:solidFill>
-              <a:srgbClr val="2E5470"/>
+              <a:srgbClr val="EEF2F5"/>
             </a:solidFill>
             <a:prstDash val="solid"/>
           </a:ln>
@@ -2542,11 +2364,11 @@
             <a:avLst/>
           </a:prstGeom>
           <a:solidFill>
-            <a:srgbClr val="2E5470"/>
+            <a:srgbClr val="EEF2F5"/>
           </a:solidFill>
           <a:ln w="12700">
             <a:solidFill>
-              <a:srgbClr val="2E5470"/>
+              <a:srgbClr val="EEF2F5"/>
             </a:solidFill>
             <a:prstDash val="solid"/>
           </a:ln>
@@ -2604,7 +2426,7 @@
             <a:r>
               <a:rPr lang="en-US" sz="3600" b="1" dirty="0">
                 <a:solidFill>
-                  <a:srgbClr val="FFFFFF"/>
+                  <a:srgbClr val="1F3A4D"/>
                 </a:solidFill>
                 <a:latin typeface="Meiryo" pitchFamily="34" charset="0"/>
                 <a:ea typeface="Meiryo" pitchFamily="34" charset="-122"/>
@@ -2621,7 +2443,7 @@
             <a:r>
               <a:rPr lang="en-US" sz="3600" b="1" dirty="0">
                 <a:solidFill>
-                  <a:srgbClr val="FFFFFF"/>
+                  <a:srgbClr val="1F3A4D"/>
                 </a:solidFill>
                 <a:latin typeface="Meiryo" pitchFamily="34" charset="0"/>
                 <a:ea typeface="Meiryo" pitchFamily="34" charset="-122"/>
@@ -2660,7 +2482,7 @@
             <a:r>
               <a:rPr lang="en-US" sz="1800" dirty="0">
                 <a:solidFill>
-                  <a:srgbClr val="B9C8D4"/>
+                  <a:srgbClr val="8A97A3"/>
                 </a:solidFill>
                 <a:latin typeface="Meiryo" pitchFamily="34" charset="0"/>
                 <a:ea typeface="Meiryo" pitchFamily="34" charset="-122"/>
@@ -2699,7 +2521,7 @@
             <a:r>
               <a:rPr lang="en-US" sz="1400" dirty="0">
                 <a:solidFill>
-                  <a:srgbClr val="B9C8D4"/>
+                  <a:srgbClr val="8A97A3"/>
                 </a:solidFill>
                 <a:latin typeface="Meiryo" pitchFamily="34" charset="0"/>
                 <a:ea typeface="Meiryo" pitchFamily="34" charset="-122"/>
@@ -2776,7 +2598,7 @@
                 <a:ea typeface="Meiryo" pitchFamily="34" charset="-122"/>
                 <a:cs typeface="Meiryo" pitchFamily="34" charset="-120"/>
               </a:rPr>
-              <a:t>計算例</a:t>
+              <a:t>計算例（スライド調書 様式4-2号）</a:t>
             </a:r>
             <a:endParaRPr lang="en-US" sz="3000" dirty="0"/>
           </a:p>
@@ -2815,7 +2637,7 @@
                 <a:ea typeface="Meiryo" pitchFamily="34" charset="-122"/>
                 <a:cs typeface="Meiryo" pitchFamily="34" charset="-120"/>
               </a:rPr>
-              <a:t>【数値はダミーです。実際の事例に置き換えてください】</a:t>
+              <a:t>【試しデータ（203_経費計算シート（試し）新工種）の値です。実際の事例に置き換えてください】</a:t>
             </a:r>
             <a:endParaRPr lang="en-US" sz="1400" dirty="0"/>
           </a:p>
@@ -2836,19 +2658,365 @@
           </p:nvPr>
         </p:nvGraphicFramePr>
         <p:xfrm>
-          <a:off x="548640" y="1645920"/>
-          <a:ext cx="7315200" cy="914400"/>
+          <a:off x="548640" y="1508760"/>
+          <a:ext cx="11064240" cy="914400"/>
         </p:xfrm>
         <a:graphic>
           <a:graphicData uri="http://schemas.openxmlformats.org/drawingml/2006/table">
             <a:tbl>
               <a:tblPr/>
               <a:tblGrid>
-                <a:gridCol w="2743200"/>
-                <a:gridCol w="2103120"/>
-                <a:gridCol w="2468880"/>
+                <a:gridCol w="2651760"/>
+                <a:gridCol w="1645920"/>
+                <a:gridCol w="1645920"/>
+                <a:gridCol w="1645920"/>
+                <a:gridCol w="1645920"/>
+                <a:gridCol w="1828800"/>
               </a:tblGrid>
-              <a:tr h="566928">
+              <a:tr h="301752">
+                <a:tc rowSpan="2">
+                  <a:txBody>
+                    <a:bodyPr/>
+                    <a:lstStyle/>
+                    <a:p>
+                      <a:pPr algn="ctr" indent="0" marL="0">
+                        <a:buNone/>
+                      </a:pPr>
+                      <a:endParaRPr lang="en-US" sz="1200" dirty="0">
+                        <a:latin typeface="Meiryo" charset="0"/>
+                        <a:ea typeface="Meiryo" charset="0"/>
+                        <a:cs typeface="Meiryo" charset="0"/>
+                      </a:endParaRPr>
+                    </a:p>
+                  </a:txBody>
+                  <a:tcPr marL="54864" marR="54864" marT="54864" marB="54864" anchor="ctr">
+                    <a:lnL w="9525" cap="flat" cmpd="sng" algn="ctr">
+                      <a:solidFill>
+                        <a:srgbClr val="C9D3DB"/>
+                      </a:solidFill>
+                      <a:prstDash val="solid"/>
+                      <a:round/>
+                      <a:headEnd type="none" w="med" len="med"/>
+                      <a:tailEnd type="none" w="med" len="med"/>
+                    </a:lnL>
+                    <a:lnR w="9525" cap="flat" cmpd="sng" algn="ctr">
+                      <a:solidFill>
+                        <a:srgbClr val="C9D3DB"/>
+                      </a:solidFill>
+                      <a:prstDash val="solid"/>
+                      <a:round/>
+                      <a:headEnd type="none" w="med" len="med"/>
+                      <a:tailEnd type="none" w="med" len="med"/>
+                    </a:lnR>
+                    <a:lnT w="9525" cap="flat" cmpd="sng" algn="ctr">
+                      <a:solidFill>
+                        <a:srgbClr val="C9D3DB"/>
+                      </a:solidFill>
+                      <a:prstDash val="solid"/>
+                      <a:round/>
+                      <a:headEnd type="none" w="med" len="med"/>
+                      <a:tailEnd type="none" w="med" len="med"/>
+                    </a:lnT>
+                    <a:lnB w="9525" cap="flat" cmpd="sng" algn="ctr">
+                      <a:solidFill>
+                        <a:srgbClr val="C9D3DB"/>
+                      </a:solidFill>
+                      <a:prstDash val="solid"/>
+                      <a:round/>
+                      <a:headEnd type="none" w="med" len="med"/>
+                      <a:tailEnd type="none" w="med" len="med"/>
+                    </a:lnB>
+                    <a:solidFill>
+                      <a:srgbClr val="1F3A4D"/>
+                    </a:solidFill>
+                  </a:tcPr>
+                </a:tc>
+                <a:tc rowSpan="2">
+                  <a:txBody>
+                    <a:bodyPr/>
+                    <a:lstStyle/>
+                    <a:p>
+                      <a:pPr algn="ctr" indent="0" marL="0">
+                        <a:buNone/>
+                      </a:pPr>
+                      <a:r>
+                        <a:rPr lang="en-US" sz="1200" b="1" dirty="0">
+                          <a:solidFill>
+                            <a:srgbClr val="FFFFFF"/>
+                          </a:solidFill>
+                          <a:latin typeface="Meiryo" pitchFamily="34" charset="0"/>
+                          <a:ea typeface="Meiryo" pitchFamily="34" charset="-122"/>
+                          <a:cs typeface="Meiryo" pitchFamily="34" charset="-120"/>
+                        </a:rPr>
+                        <a:t>元設計</a:t>
+                      </a:r>
+                      <a:endParaRPr lang="en-US" sz="1200" dirty="0">
+                        <a:latin typeface="Meiryo" charset="0"/>
+                        <a:ea typeface="Meiryo" charset="0"/>
+                        <a:cs typeface="Meiryo" charset="0"/>
+                      </a:endParaRPr>
+                    </a:p>
+                  </a:txBody>
+                  <a:tcPr marL="54864" marR="54864" marT="54864" marB="54864" anchor="ctr">
+                    <a:lnL w="9525" cap="flat" cmpd="sng" algn="ctr">
+                      <a:solidFill>
+                        <a:srgbClr val="C9D3DB"/>
+                      </a:solidFill>
+                      <a:prstDash val="solid"/>
+                      <a:round/>
+                      <a:headEnd type="none" w="med" len="med"/>
+                      <a:tailEnd type="none" w="med" len="med"/>
+                    </a:lnL>
+                    <a:lnR w="9525" cap="flat" cmpd="sng" algn="ctr">
+                      <a:solidFill>
+                        <a:srgbClr val="C9D3DB"/>
+                      </a:solidFill>
+                      <a:prstDash val="solid"/>
+                      <a:round/>
+                      <a:headEnd type="none" w="med" len="med"/>
+                      <a:tailEnd type="none" w="med" len="med"/>
+                    </a:lnR>
+                    <a:lnT w="9525" cap="flat" cmpd="sng" algn="ctr">
+                      <a:solidFill>
+                        <a:srgbClr val="C9D3DB"/>
+                      </a:solidFill>
+                      <a:prstDash val="solid"/>
+                      <a:round/>
+                      <a:headEnd type="none" w="med" len="med"/>
+                      <a:tailEnd type="none" w="med" len="med"/>
+                    </a:lnT>
+                    <a:lnB w="9525" cap="flat" cmpd="sng" algn="ctr">
+                      <a:solidFill>
+                        <a:srgbClr val="C9D3DB"/>
+                      </a:solidFill>
+                      <a:prstDash val="solid"/>
+                      <a:round/>
+                      <a:headEnd type="none" w="med" len="med"/>
+                      <a:tailEnd type="none" w="med" len="med"/>
+                    </a:lnB>
+                    <a:solidFill>
+                      <a:srgbClr val="1F3A4D"/>
+                    </a:solidFill>
+                  </a:tcPr>
+                </a:tc>
+                <a:tc rowSpan="2">
+                  <a:txBody>
+                    <a:bodyPr/>
+                    <a:lstStyle/>
+                    <a:p>
+                      <a:pPr algn="ctr" indent="0" marL="0">
+                        <a:buNone/>
+                      </a:pPr>
+                      <a:r>
+                        <a:rPr lang="en-US" sz="1200" b="1" dirty="0">
+                          <a:solidFill>
+                            <a:srgbClr val="FFFFFF"/>
+                          </a:solidFill>
+                          <a:latin typeface="Meiryo" pitchFamily="34" charset="0"/>
+                          <a:ea typeface="Meiryo" pitchFamily="34" charset="-122"/>
+                          <a:cs typeface="Meiryo" pitchFamily="34" charset="-120"/>
+                        </a:rPr>
+                        <a:t>出来高</a:t>
+                      </a:r>
+                      <a:endParaRPr lang="en-US" sz="1200" dirty="0">
+                        <a:latin typeface="Meiryo" charset="0"/>
+                        <a:ea typeface="Meiryo" charset="0"/>
+                        <a:cs typeface="Meiryo" charset="0"/>
+                      </a:endParaRPr>
+                    </a:p>
+                  </a:txBody>
+                  <a:tcPr marL="54864" marR="54864" marT="54864" marB="54864" anchor="ctr">
+                    <a:lnL w="9525" cap="flat" cmpd="sng" algn="ctr">
+                      <a:solidFill>
+                        <a:srgbClr val="C9D3DB"/>
+                      </a:solidFill>
+                      <a:prstDash val="solid"/>
+                      <a:round/>
+                      <a:headEnd type="none" w="med" len="med"/>
+                      <a:tailEnd type="none" w="med" len="med"/>
+                    </a:lnL>
+                    <a:lnR w="9525" cap="flat" cmpd="sng" algn="ctr">
+                      <a:solidFill>
+                        <a:srgbClr val="C9D3DB"/>
+                      </a:solidFill>
+                      <a:prstDash val="solid"/>
+                      <a:round/>
+                      <a:headEnd type="none" w="med" len="med"/>
+                      <a:tailEnd type="none" w="med" len="med"/>
+                    </a:lnR>
+                    <a:lnT w="9525" cap="flat" cmpd="sng" algn="ctr">
+                      <a:solidFill>
+                        <a:srgbClr val="C9D3DB"/>
+                      </a:solidFill>
+                      <a:prstDash val="solid"/>
+                      <a:round/>
+                      <a:headEnd type="none" w="med" len="med"/>
+                      <a:tailEnd type="none" w="med" len="med"/>
+                    </a:lnT>
+                    <a:lnB w="9525" cap="flat" cmpd="sng" algn="ctr">
+                      <a:solidFill>
+                        <a:srgbClr val="C9D3DB"/>
+                      </a:solidFill>
+                      <a:prstDash val="solid"/>
+                      <a:round/>
+                      <a:headEnd type="none" w="med" len="med"/>
+                      <a:tailEnd type="none" w="med" len="med"/>
+                    </a:lnB>
+                    <a:solidFill>
+                      <a:srgbClr val="1F3A4D"/>
+                    </a:solidFill>
+                  </a:tcPr>
+                </a:tc>
+                <a:tc gridSpan="2">
+                  <a:txBody>
+                    <a:bodyPr/>
+                    <a:lstStyle/>
+                    <a:p>
+                      <a:pPr algn="ctr" indent="0" marL="0">
+                        <a:buNone/>
+                      </a:pPr>
+                      <a:r>
+                        <a:rPr lang="en-US" sz="1200" b="1" dirty="0">
+                          <a:solidFill>
+                            <a:srgbClr val="FFFFFF"/>
+                          </a:solidFill>
+                          <a:latin typeface="Meiryo" pitchFamily="34" charset="0"/>
+                          <a:ea typeface="Meiryo" pitchFamily="34" charset="-122"/>
+                          <a:cs typeface="Meiryo" pitchFamily="34" charset="-120"/>
+                        </a:rPr>
+                        <a:t>残工事</a:t>
+                      </a:r>
+                      <a:endParaRPr lang="en-US" sz="1200" dirty="0">
+                        <a:latin typeface="Meiryo" charset="0"/>
+                        <a:ea typeface="Meiryo" charset="0"/>
+                        <a:cs typeface="Meiryo" charset="0"/>
+                      </a:endParaRPr>
+                    </a:p>
+                  </a:txBody>
+                  <a:tcPr marL="54864" marR="54864" marT="54864" marB="54864" anchor="ctr">
+                    <a:lnL w="9525" cap="flat" cmpd="sng" algn="ctr">
+                      <a:solidFill>
+                        <a:srgbClr val="C9D3DB"/>
+                      </a:solidFill>
+                      <a:prstDash val="solid"/>
+                      <a:round/>
+                      <a:headEnd type="none" w="med" len="med"/>
+                      <a:tailEnd type="none" w="med" len="med"/>
+                    </a:lnL>
+                    <a:lnR w="9525" cap="flat" cmpd="sng" algn="ctr">
+                      <a:solidFill>
+                        <a:srgbClr val="C9D3DB"/>
+                      </a:solidFill>
+                      <a:prstDash val="solid"/>
+                      <a:round/>
+                      <a:headEnd type="none" w="med" len="med"/>
+                      <a:tailEnd type="none" w="med" len="med"/>
+                    </a:lnR>
+                    <a:lnT w="9525" cap="flat" cmpd="sng" algn="ctr">
+                      <a:solidFill>
+                        <a:srgbClr val="C9D3DB"/>
+                      </a:solidFill>
+                      <a:prstDash val="solid"/>
+                      <a:round/>
+                      <a:headEnd type="none" w="med" len="med"/>
+                      <a:tailEnd type="none" w="med" len="med"/>
+                    </a:lnT>
+                    <a:lnB w="9525" cap="flat" cmpd="sng" algn="ctr">
+                      <a:solidFill>
+                        <a:srgbClr val="C9D3DB"/>
+                      </a:solidFill>
+                      <a:prstDash val="solid"/>
+                      <a:round/>
+                      <a:headEnd type="none" w="med" len="med"/>
+                      <a:tailEnd type="none" w="med" len="med"/>
+                    </a:lnB>
+                    <a:solidFill>
+                      <a:srgbClr val="1F3A4D"/>
+                    </a:solidFill>
+                  </a:tcPr>
+                </a:tc>
+                <a:tc hMerge="1">
+                  <a:tcPr/>
+                </a:tc>
+                <a:tc rowSpan="2">
+                  <a:txBody>
+                    <a:bodyPr/>
+                    <a:lstStyle/>
+                    <a:p>
+                      <a:pPr algn="ctr" indent="0" marL="0">
+                        <a:buNone/>
+                      </a:pPr>
+                      <a:r>
+                        <a:rPr lang="en-US" sz="1200" b="1" dirty="0">
+                          <a:solidFill>
+                            <a:srgbClr val="FFFFFF"/>
+                          </a:solidFill>
+                          <a:latin typeface="Meiryo" pitchFamily="34" charset="0"/>
+                          <a:ea typeface="Meiryo" pitchFamily="34" charset="-122"/>
+                          <a:cs typeface="Meiryo" pitchFamily="34" charset="-120"/>
+                        </a:rPr>
+                        <a:t>スライド額</a:t>
+                      </a:r>
+                      <a:endParaRPr lang="en-US" sz="1200" dirty="0">
+                        <a:latin typeface="Meiryo" charset="0"/>
+                        <a:ea typeface="Meiryo" charset="0"/>
+                        <a:cs typeface="Meiryo" charset="0"/>
+                      </a:endParaRPr>
+                    </a:p>
+                  </a:txBody>
+                  <a:tcPr marL="54864" marR="54864" marT="54864" marB="54864" anchor="ctr">
+                    <a:lnL w="9525" cap="flat" cmpd="sng" algn="ctr">
+                      <a:solidFill>
+                        <a:srgbClr val="C9D3DB"/>
+                      </a:solidFill>
+                      <a:prstDash val="solid"/>
+                      <a:round/>
+                      <a:headEnd type="none" w="med" len="med"/>
+                      <a:tailEnd type="none" w="med" len="med"/>
+                    </a:lnL>
+                    <a:lnR w="9525" cap="flat" cmpd="sng" algn="ctr">
+                      <a:solidFill>
+                        <a:srgbClr val="C9D3DB"/>
+                      </a:solidFill>
+                      <a:prstDash val="solid"/>
+                      <a:round/>
+                      <a:headEnd type="none" w="med" len="med"/>
+                      <a:tailEnd type="none" w="med" len="med"/>
+                    </a:lnR>
+                    <a:lnT w="9525" cap="flat" cmpd="sng" algn="ctr">
+                      <a:solidFill>
+                        <a:srgbClr val="C9D3DB"/>
+                      </a:solidFill>
+                      <a:prstDash val="solid"/>
+                      <a:round/>
+                      <a:headEnd type="none" w="med" len="med"/>
+                      <a:tailEnd type="none" w="med" len="med"/>
+                    </a:lnT>
+                    <a:lnB w="9525" cap="flat" cmpd="sng" algn="ctr">
+                      <a:solidFill>
+                        <a:srgbClr val="C9D3DB"/>
+                      </a:solidFill>
+                      <a:prstDash val="solid"/>
+                      <a:round/>
+                      <a:headEnd type="none" w="med" len="med"/>
+                      <a:tailEnd type="none" w="med" len="med"/>
+                    </a:lnB>
+                    <a:solidFill>
+                      <a:srgbClr val="E08E2B"/>
+                    </a:solidFill>
+                  </a:tcPr>
+                </a:tc>
+              </a:tr>
+              <a:tr h="301752">
+                <a:tc vMerge="1">
+                  <a:tcPr/>
+                </a:tc>
+                <a:tc vMerge="1">
+                  <a:tcPr/>
+                </a:tc>
+                <a:tc vMerge="1">
+                  <a:tcPr/>
+                </a:tc>
                 <a:tc>
                   <a:txBody>
                     <a:bodyPr/>
@@ -2858,7 +3026,7 @@
                         <a:buNone/>
                       </a:pPr>
                       <a:r>
-                        <a:rPr lang="en-US" sz="1400" b="1" dirty="0">
+                        <a:rPr lang="en-US" sz="1200" b="1" dirty="0">
                           <a:solidFill>
                             <a:srgbClr val="FFFFFF"/>
                           </a:solidFill>
@@ -2866,16 +3034,16 @@
                           <a:ea typeface="Meiryo" pitchFamily="34" charset="-122"/>
                           <a:cs typeface="Meiryo" pitchFamily="34" charset="-120"/>
                         </a:rPr>
-                        <a:t>項目</a:t>
+                        <a:t>変動前</a:t>
                       </a:r>
-                      <a:endParaRPr lang="en-US" sz="1400" dirty="0">
+                      <a:endParaRPr lang="en-US" sz="1200" dirty="0">
                         <a:latin typeface="Meiryo" charset="0"/>
                         <a:ea typeface="Meiryo" charset="0"/>
                         <a:cs typeface="Meiryo" charset="0"/>
                       </a:endParaRPr>
                     </a:p>
                   </a:txBody>
-                  <a:tcPr marL="91440" marR="91440" marT="45720" marB="45720" anchor="ctr">
+                  <a:tcPr marL="54864" marR="54864" marT="54864" marB="54864" anchor="ctr">
                     <a:lnL w="9525" cap="flat" cmpd="sng" algn="ctr">
                       <a:solidFill>
                         <a:srgbClr val="C9D3DB"/>
@@ -2926,7 +3094,7 @@
                         <a:buNone/>
                       </a:pPr>
                       <a:r>
-                        <a:rPr lang="en-US" sz="1400" b="1" dirty="0">
+                        <a:rPr lang="en-US" sz="1200" b="1" dirty="0">
                           <a:solidFill>
                             <a:srgbClr val="FFFFFF"/>
                           </a:solidFill>
@@ -2934,16 +3102,16 @@
                           <a:ea typeface="Meiryo" pitchFamily="34" charset="-122"/>
                           <a:cs typeface="Meiryo" pitchFamily="34" charset="-120"/>
                         </a:rPr>
-                        <a:t>金額（円）</a:t>
+                        <a:t>変動後</a:t>
                       </a:r>
-                      <a:endParaRPr lang="en-US" sz="1400" dirty="0">
+                      <a:endParaRPr lang="en-US" sz="1200" dirty="0">
                         <a:latin typeface="Meiryo" charset="0"/>
                         <a:ea typeface="Meiryo" charset="0"/>
                         <a:cs typeface="Meiryo" charset="0"/>
                       </a:endParaRPr>
                     </a:p>
                   </a:txBody>
-                  <a:tcPr marL="91440" marR="91440" marT="45720" marB="45720" anchor="ctr">
+                  <a:tcPr marL="54864" marR="54864" marT="54864" marB="54864" anchor="ctr">
                     <a:lnL w="9525" cap="flat" cmpd="sng" algn="ctr">
                       <a:solidFill>
                         <a:srgbClr val="C9D3DB"/>
@@ -2982,6 +3150,68 @@
                     </a:lnB>
                     <a:solidFill>
                       <a:srgbClr val="1F3A4D"/>
+                    </a:solidFill>
+                  </a:tcPr>
+                </a:tc>
+                <a:tc vMerge="1">
+                  <a:tcPr/>
+                </a:tc>
+              </a:tr>
+              <a:tr h="246888">
+                <a:tc>
+                  <a:txBody>
+                    <a:bodyPr/>
+                    <a:lstStyle/>
+                    <a:p>
+                      <a:pPr indent="0" marL="0">
+                        <a:buNone/>
+                      </a:pPr>
+                      <a:endParaRPr lang="en-US" sz="1200" dirty="0">
+                        <a:latin typeface="Meiryo" charset="0"/>
+                        <a:ea typeface="Meiryo" charset="0"/>
+                        <a:cs typeface="Meiryo" charset="0"/>
+                      </a:endParaRPr>
+                    </a:p>
+                  </a:txBody>
+                  <a:tcPr marL="54864" marR="54864" marT="54864" marB="54864" anchor="ctr">
+                    <a:lnL w="9525" cap="flat" cmpd="sng" algn="ctr">
+                      <a:solidFill>
+                        <a:srgbClr val="C9D3DB"/>
+                      </a:solidFill>
+                      <a:prstDash val="solid"/>
+                      <a:round/>
+                      <a:headEnd type="none" w="med" len="med"/>
+                      <a:tailEnd type="none" w="med" len="med"/>
+                    </a:lnL>
+                    <a:lnR w="9525" cap="flat" cmpd="sng" algn="ctr">
+                      <a:solidFill>
+                        <a:srgbClr val="C9D3DB"/>
+                      </a:solidFill>
+                      <a:prstDash val="solid"/>
+                      <a:round/>
+                      <a:headEnd type="none" w="med" len="med"/>
+                      <a:tailEnd type="none" w="med" len="med"/>
+                    </a:lnR>
+                    <a:lnT w="9525" cap="flat" cmpd="sng" algn="ctr">
+                      <a:solidFill>
+                        <a:srgbClr val="C9D3DB"/>
+                      </a:solidFill>
+                      <a:prstDash val="solid"/>
+                      <a:round/>
+                      <a:headEnd type="none" w="med" len="med"/>
+                      <a:tailEnd type="none" w="med" len="med"/>
+                    </a:lnT>
+                    <a:lnB w="9525" cap="flat" cmpd="sng" algn="ctr">
+                      <a:solidFill>
+                        <a:srgbClr val="C9D3DB"/>
+                      </a:solidFill>
+                      <a:prstDash val="solid"/>
+                      <a:round/>
+                      <a:headEnd type="none" w="med" len="med"/>
+                      <a:tailEnd type="none" w="med" len="med"/>
+                    </a:lnB>
+                    <a:solidFill>
+                      <a:srgbClr val="F7F9FA"/>
                     </a:solidFill>
                   </a:tcPr>
                 </a:tc>
@@ -2994,24 +3224,24 @@
                         <a:buNone/>
                       </a:pPr>
                       <a:r>
-                        <a:rPr lang="en-US" sz="1400" b="1" dirty="0">
+                        <a:rPr lang="en-US" sz="1100" dirty="0">
                           <a:solidFill>
-                            <a:srgbClr val="FFFFFF"/>
+                            <a:srgbClr val="2E5470"/>
                           </a:solidFill>
                           <a:latin typeface="Meiryo" pitchFamily="34" charset="0"/>
                           <a:ea typeface="Meiryo" pitchFamily="34" charset="-122"/>
                           <a:cs typeface="Meiryo" pitchFamily="34" charset="-120"/>
                         </a:rPr>
-                        <a:t>備考</a:t>
+                        <a:t>①</a:t>
                       </a:r>
-                      <a:endParaRPr lang="en-US" sz="1400" dirty="0">
+                      <a:endParaRPr lang="en-US" sz="1100" dirty="0">
                         <a:latin typeface="Meiryo" charset="0"/>
                         <a:ea typeface="Meiryo" charset="0"/>
                         <a:cs typeface="Meiryo" charset="0"/>
                       </a:endParaRPr>
                     </a:p>
                   </a:txBody>
-                  <a:tcPr marL="91440" marR="91440" marT="45720" marB="45720" anchor="ctr">
+                  <a:tcPr marL="54864" marR="54864" marT="54864" marB="54864" anchor="ctr">
                     <a:lnL w="9525" cap="flat" cmpd="sng" algn="ctr">
                       <a:solidFill>
                         <a:srgbClr val="C9D3DB"/>
@@ -3049,12 +3279,240 @@
                       <a:tailEnd type="none" w="med" len="med"/>
                     </a:lnB>
                     <a:solidFill>
-                      <a:srgbClr val="1F3A4D"/>
+                      <a:srgbClr val="F7F9FA"/>
+                    </a:solidFill>
+                  </a:tcPr>
+                </a:tc>
+                <a:tc>
+                  <a:txBody>
+                    <a:bodyPr/>
+                    <a:lstStyle/>
+                    <a:p>
+                      <a:pPr indent="0" marL="0">
+                        <a:buNone/>
+                      </a:pPr>
+                      <a:endParaRPr lang="en-US" sz="1200" dirty="0">
+                        <a:latin typeface="Meiryo" charset="0"/>
+                        <a:ea typeface="Meiryo" charset="0"/>
+                        <a:cs typeface="Meiryo" charset="0"/>
+                      </a:endParaRPr>
+                    </a:p>
+                  </a:txBody>
+                  <a:tcPr marL="54864" marR="54864" marT="54864" marB="54864" anchor="ctr">
+                    <a:lnL w="9525" cap="flat" cmpd="sng" algn="ctr">
+                      <a:solidFill>
+                        <a:srgbClr val="C9D3DB"/>
+                      </a:solidFill>
+                      <a:prstDash val="solid"/>
+                      <a:round/>
+                      <a:headEnd type="none" w="med" len="med"/>
+                      <a:tailEnd type="none" w="med" len="med"/>
+                    </a:lnL>
+                    <a:lnR w="9525" cap="flat" cmpd="sng" algn="ctr">
+                      <a:solidFill>
+                        <a:srgbClr val="C9D3DB"/>
+                      </a:solidFill>
+                      <a:prstDash val="solid"/>
+                      <a:round/>
+                      <a:headEnd type="none" w="med" len="med"/>
+                      <a:tailEnd type="none" w="med" len="med"/>
+                    </a:lnR>
+                    <a:lnT w="9525" cap="flat" cmpd="sng" algn="ctr">
+                      <a:solidFill>
+                        <a:srgbClr val="C9D3DB"/>
+                      </a:solidFill>
+                      <a:prstDash val="solid"/>
+                      <a:round/>
+                      <a:headEnd type="none" w="med" len="med"/>
+                      <a:tailEnd type="none" w="med" len="med"/>
+                    </a:lnT>
+                    <a:lnB w="9525" cap="flat" cmpd="sng" algn="ctr">
+                      <a:solidFill>
+                        <a:srgbClr val="C9D3DB"/>
+                      </a:solidFill>
+                      <a:prstDash val="solid"/>
+                      <a:round/>
+                      <a:headEnd type="none" w="med" len="med"/>
+                      <a:tailEnd type="none" w="med" len="med"/>
+                    </a:lnB>
+                    <a:solidFill>
+                      <a:srgbClr val="F7F9FA"/>
+                    </a:solidFill>
+                  </a:tcPr>
+                </a:tc>
+                <a:tc>
+                  <a:txBody>
+                    <a:bodyPr/>
+                    <a:lstStyle/>
+                    <a:p>
+                      <a:pPr indent="0" marL="0">
+                        <a:buNone/>
+                      </a:pPr>
+                      <a:endParaRPr lang="en-US" sz="1200" dirty="0">
+                        <a:latin typeface="Meiryo" charset="0"/>
+                        <a:ea typeface="Meiryo" charset="0"/>
+                        <a:cs typeface="Meiryo" charset="0"/>
+                      </a:endParaRPr>
+                    </a:p>
+                  </a:txBody>
+                  <a:tcPr marL="54864" marR="54864" marT="54864" marB="54864" anchor="ctr">
+                    <a:lnL w="9525" cap="flat" cmpd="sng" algn="ctr">
+                      <a:solidFill>
+                        <a:srgbClr val="C9D3DB"/>
+                      </a:solidFill>
+                      <a:prstDash val="solid"/>
+                      <a:round/>
+                      <a:headEnd type="none" w="med" len="med"/>
+                      <a:tailEnd type="none" w="med" len="med"/>
+                    </a:lnL>
+                    <a:lnR w="9525" cap="flat" cmpd="sng" algn="ctr">
+                      <a:solidFill>
+                        <a:srgbClr val="C9D3DB"/>
+                      </a:solidFill>
+                      <a:prstDash val="solid"/>
+                      <a:round/>
+                      <a:headEnd type="none" w="med" len="med"/>
+                      <a:tailEnd type="none" w="med" len="med"/>
+                    </a:lnR>
+                    <a:lnT w="9525" cap="flat" cmpd="sng" algn="ctr">
+                      <a:solidFill>
+                        <a:srgbClr val="C9D3DB"/>
+                      </a:solidFill>
+                      <a:prstDash val="solid"/>
+                      <a:round/>
+                      <a:headEnd type="none" w="med" len="med"/>
+                      <a:tailEnd type="none" w="med" len="med"/>
+                    </a:lnT>
+                    <a:lnB w="9525" cap="flat" cmpd="sng" algn="ctr">
+                      <a:solidFill>
+                        <a:srgbClr val="C9D3DB"/>
+                      </a:solidFill>
+                      <a:prstDash val="solid"/>
+                      <a:round/>
+                      <a:headEnd type="none" w="med" len="med"/>
+                      <a:tailEnd type="none" w="med" len="med"/>
+                    </a:lnB>
+                    <a:solidFill>
+                      <a:srgbClr val="F7F9FA"/>
+                    </a:solidFill>
+                  </a:tcPr>
+                </a:tc>
+                <a:tc>
+                  <a:txBody>
+                    <a:bodyPr/>
+                    <a:lstStyle/>
+                    <a:p>
+                      <a:pPr indent="0" marL="0">
+                        <a:buNone/>
+                      </a:pPr>
+                      <a:endParaRPr lang="en-US" sz="1200" dirty="0">
+                        <a:latin typeface="Meiryo" charset="0"/>
+                        <a:ea typeface="Meiryo" charset="0"/>
+                        <a:cs typeface="Meiryo" charset="0"/>
+                      </a:endParaRPr>
+                    </a:p>
+                  </a:txBody>
+                  <a:tcPr marL="54864" marR="54864" marT="54864" marB="54864" anchor="ctr">
+                    <a:lnL w="9525" cap="flat" cmpd="sng" algn="ctr">
+                      <a:solidFill>
+                        <a:srgbClr val="C9D3DB"/>
+                      </a:solidFill>
+                      <a:prstDash val="solid"/>
+                      <a:round/>
+                      <a:headEnd type="none" w="med" len="med"/>
+                      <a:tailEnd type="none" w="med" len="med"/>
+                    </a:lnL>
+                    <a:lnR w="9525" cap="flat" cmpd="sng" algn="ctr">
+                      <a:solidFill>
+                        <a:srgbClr val="C9D3DB"/>
+                      </a:solidFill>
+                      <a:prstDash val="solid"/>
+                      <a:round/>
+                      <a:headEnd type="none" w="med" len="med"/>
+                      <a:tailEnd type="none" w="med" len="med"/>
+                    </a:lnR>
+                    <a:lnT w="9525" cap="flat" cmpd="sng" algn="ctr">
+                      <a:solidFill>
+                        <a:srgbClr val="C9D3DB"/>
+                      </a:solidFill>
+                      <a:prstDash val="solid"/>
+                      <a:round/>
+                      <a:headEnd type="none" w="med" len="med"/>
+                      <a:tailEnd type="none" w="med" len="med"/>
+                    </a:lnT>
+                    <a:lnB w="9525" cap="flat" cmpd="sng" algn="ctr">
+                      <a:solidFill>
+                        <a:srgbClr val="C9D3DB"/>
+                      </a:solidFill>
+                      <a:prstDash val="solid"/>
+                      <a:round/>
+                      <a:headEnd type="none" w="med" len="med"/>
+                      <a:tailEnd type="none" w="med" len="med"/>
+                    </a:lnB>
+                    <a:solidFill>
+                      <a:srgbClr val="F7F9FA"/>
+                    </a:solidFill>
+                  </a:tcPr>
+                </a:tc>
+                <a:tc>
+                  <a:txBody>
+                    <a:bodyPr/>
+                    <a:lstStyle/>
+                    <a:p>
+                      <a:pPr indent="0" marL="0">
+                        <a:buNone/>
+                      </a:pPr>
+                      <a:endParaRPr lang="en-US" sz="1200" dirty="0">
+                        <a:latin typeface="Meiryo" charset="0"/>
+                        <a:ea typeface="Meiryo" charset="0"/>
+                        <a:cs typeface="Meiryo" charset="0"/>
+                      </a:endParaRPr>
+                    </a:p>
+                  </a:txBody>
+                  <a:tcPr marL="54864" marR="54864" marT="54864" marB="54864" anchor="ctr">
+                    <a:lnL w="9525" cap="flat" cmpd="sng" algn="ctr">
+                      <a:solidFill>
+                        <a:srgbClr val="C9D3DB"/>
+                      </a:solidFill>
+                      <a:prstDash val="solid"/>
+                      <a:round/>
+                      <a:headEnd type="none" w="med" len="med"/>
+                      <a:tailEnd type="none" w="med" len="med"/>
+                    </a:lnL>
+                    <a:lnR w="9525" cap="flat" cmpd="sng" algn="ctr">
+                      <a:solidFill>
+                        <a:srgbClr val="C9D3DB"/>
+                      </a:solidFill>
+                      <a:prstDash val="solid"/>
+                      <a:round/>
+                      <a:headEnd type="none" w="med" len="med"/>
+                      <a:tailEnd type="none" w="med" len="med"/>
+                    </a:lnR>
+                    <a:lnT w="9525" cap="flat" cmpd="sng" algn="ctr">
+                      <a:solidFill>
+                        <a:srgbClr val="C9D3DB"/>
+                      </a:solidFill>
+                      <a:prstDash val="solid"/>
+                      <a:round/>
+                      <a:headEnd type="none" w="med" len="med"/>
+                      <a:tailEnd type="none" w="med" len="med"/>
+                    </a:lnT>
+                    <a:lnB w="9525" cap="flat" cmpd="sng" algn="ctr">
+                      <a:solidFill>
+                        <a:srgbClr val="C9D3DB"/>
+                      </a:solidFill>
+                      <a:prstDash val="solid"/>
+                      <a:round/>
+                      <a:headEnd type="none" w="med" len="med"/>
+                      <a:tailEnd type="none" w="med" len="med"/>
+                    </a:lnB>
+                    <a:solidFill>
+                      <a:srgbClr val="F7F9FA"/>
                     </a:solidFill>
                   </a:tcPr>
                 </a:tc>
               </a:tr>
-              <a:tr h="566928">
+              <a:tr h="301752">
                 <a:tc>
                   <a:txBody>
                     <a:bodyPr/>
@@ -3064,7 +3522,7 @@
                         <a:buNone/>
                       </a:pPr>
                       <a:r>
-                        <a:rPr lang="en-US" sz="1400" b="1" dirty="0">
+                        <a:rPr lang="en-US" sz="1200" b="1" dirty="0">
                           <a:solidFill>
                             <a:srgbClr val="1F3A4D"/>
                           </a:solidFill>
@@ -3072,16 +3530,16 @@
                           <a:ea typeface="Meiryo" pitchFamily="34" charset="-122"/>
                           <a:cs typeface="Meiryo" pitchFamily="34" charset="-120"/>
                         </a:rPr>
-                        <a:t>変動前残工事代金額 P1</a:t>
+                        <a:t>設計額（税込）</a:t>
                       </a:r>
-                      <a:endParaRPr lang="en-US" sz="1400" dirty="0">
+                      <a:endParaRPr lang="en-US" sz="1200" dirty="0">
                         <a:latin typeface="Meiryo" charset="0"/>
                         <a:ea typeface="Meiryo" charset="0"/>
                         <a:cs typeface="Meiryo" charset="0"/>
                       </a:endParaRPr>
                     </a:p>
                   </a:txBody>
-                  <a:tcPr marL="91440" marR="91440" marT="45720" marB="45720" anchor="ctr">
+                  <a:tcPr marL="54864" marR="54864" marT="54864" marB="54864" anchor="ctr">
                     <a:lnL w="9525" cap="flat" cmpd="sng" algn="ctr">
                       <a:solidFill>
                         <a:srgbClr val="C9D3DB"/>
@@ -3132,7 +3590,72 @@
                         <a:buNone/>
                       </a:pPr>
                       <a:r>
-                        <a:rPr lang="en-US" sz="1400" dirty="0">
+                        <a:rPr lang="en-US" sz="1200" dirty="0">
+                          <a:solidFill>
+                            <a:srgbClr val="2B2B2B"/>
+                          </a:solidFill>
+                          <a:latin typeface="Meiryo" pitchFamily="34" charset="0"/>
+                          <a:ea typeface="Meiryo" pitchFamily="34" charset="-122"/>
+                          <a:cs typeface="Meiryo" pitchFamily="34" charset="-120"/>
+                        </a:rPr>
+                        <a:t>285,583,100</a:t>
+                      </a:r>
+                      <a:endParaRPr lang="en-US" sz="1200" dirty="0">
+                        <a:latin typeface="Meiryo" charset="0"/>
+                        <a:ea typeface="Meiryo" charset="0"/>
+                        <a:cs typeface="Meiryo" charset="0"/>
+                      </a:endParaRPr>
+                    </a:p>
+                  </a:txBody>
+                  <a:tcPr marL="54864" marR="54864" marT="54864" marB="54864" anchor="ctr">
+                    <a:lnL w="9525" cap="flat" cmpd="sng" algn="ctr">
+                      <a:solidFill>
+                        <a:srgbClr val="C9D3DB"/>
+                      </a:solidFill>
+                      <a:prstDash val="solid"/>
+                      <a:round/>
+                      <a:headEnd type="none" w="med" len="med"/>
+                      <a:tailEnd type="none" w="med" len="med"/>
+                    </a:lnL>
+                    <a:lnR w="9525" cap="flat" cmpd="sng" algn="ctr">
+                      <a:solidFill>
+                        <a:srgbClr val="C9D3DB"/>
+                      </a:solidFill>
+                      <a:prstDash val="solid"/>
+                      <a:round/>
+                      <a:headEnd type="none" w="med" len="med"/>
+                      <a:tailEnd type="none" w="med" len="med"/>
+                    </a:lnR>
+                    <a:lnT w="9525" cap="flat" cmpd="sng" algn="ctr">
+                      <a:solidFill>
+                        <a:srgbClr val="C9D3DB"/>
+                      </a:solidFill>
+                      <a:prstDash val="solid"/>
+                      <a:round/>
+                      <a:headEnd type="none" w="med" len="med"/>
+                      <a:tailEnd type="none" w="med" len="med"/>
+                    </a:lnT>
+                    <a:lnB w="9525" cap="flat" cmpd="sng" algn="ctr">
+                      <a:solidFill>
+                        <a:srgbClr val="C9D3DB"/>
+                      </a:solidFill>
+                      <a:prstDash val="solid"/>
+                      <a:round/>
+                      <a:headEnd type="none" w="med" len="med"/>
+                      <a:tailEnd type="none" w="med" len="med"/>
+                    </a:lnB>
+                  </a:tcPr>
+                </a:tc>
+                <a:tc>
+                  <a:txBody>
+                    <a:bodyPr/>
+                    <a:lstStyle/>
+                    <a:p>
+                      <a:pPr algn="ctr" indent="0" marL="0">
+                        <a:buNone/>
+                      </a:pPr>
+                      <a:r>
+                        <a:rPr lang="en-US" sz="1200" dirty="0">
                           <a:solidFill>
                             <a:srgbClr val="8A97A3"/>
                           </a:solidFill>
@@ -3140,16 +3663,16 @@
                           <a:ea typeface="Meiryo" pitchFamily="34" charset="-122"/>
                           <a:cs typeface="Meiryo" pitchFamily="34" charset="-120"/>
                         </a:rPr>
-                        <a:t>【XXX,XXX,XXX】</a:t>
+                        <a:t>-</a:t>
                       </a:r>
-                      <a:endParaRPr lang="en-US" sz="1400" dirty="0">
+                      <a:endParaRPr lang="en-US" sz="1200" dirty="0">
                         <a:latin typeface="Meiryo" charset="0"/>
                         <a:ea typeface="Meiryo" charset="0"/>
                         <a:cs typeface="Meiryo" charset="0"/>
                       </a:endParaRPr>
                     </a:p>
                   </a:txBody>
-                  <a:tcPr marL="91440" marR="91440" marT="45720" marB="45720" anchor="ctr">
+                  <a:tcPr marL="54864" marR="54864" marT="54864" marB="54864" anchor="ctr">
                     <a:lnL w="9525" cap="flat" cmpd="sng" algn="ctr">
                       <a:solidFill>
                         <a:srgbClr val="C9D3DB"/>
@@ -3186,6 +3709,532 @@
                       <a:headEnd type="none" w="med" len="med"/>
                       <a:tailEnd type="none" w="med" len="med"/>
                     </a:lnB>
+                  </a:tcPr>
+                </a:tc>
+                <a:tc>
+                  <a:txBody>
+                    <a:bodyPr/>
+                    <a:lstStyle/>
+                    <a:p>
+                      <a:pPr algn="ctr" indent="0" marL="0">
+                        <a:buNone/>
+                      </a:pPr>
+                      <a:r>
+                        <a:rPr lang="en-US" sz="1200" dirty="0">
+                          <a:solidFill>
+                            <a:srgbClr val="8A97A3"/>
+                          </a:solidFill>
+                          <a:latin typeface="Meiryo" pitchFamily="34" charset="0"/>
+                          <a:ea typeface="Meiryo" pitchFamily="34" charset="-122"/>
+                          <a:cs typeface="Meiryo" pitchFamily="34" charset="-120"/>
+                        </a:rPr>
+                        <a:t>-</a:t>
+                      </a:r>
+                      <a:endParaRPr lang="en-US" sz="1200" dirty="0">
+                        <a:latin typeface="Meiryo" charset="0"/>
+                        <a:ea typeface="Meiryo" charset="0"/>
+                        <a:cs typeface="Meiryo" charset="0"/>
+                      </a:endParaRPr>
+                    </a:p>
+                  </a:txBody>
+                  <a:tcPr marL="54864" marR="54864" marT="54864" marB="54864" anchor="ctr">
+                    <a:lnL w="9525" cap="flat" cmpd="sng" algn="ctr">
+                      <a:solidFill>
+                        <a:srgbClr val="C9D3DB"/>
+                      </a:solidFill>
+                      <a:prstDash val="solid"/>
+                      <a:round/>
+                      <a:headEnd type="none" w="med" len="med"/>
+                      <a:tailEnd type="none" w="med" len="med"/>
+                    </a:lnL>
+                    <a:lnR w="9525" cap="flat" cmpd="sng" algn="ctr">
+                      <a:solidFill>
+                        <a:srgbClr val="C9D3DB"/>
+                      </a:solidFill>
+                      <a:prstDash val="solid"/>
+                      <a:round/>
+                      <a:headEnd type="none" w="med" len="med"/>
+                      <a:tailEnd type="none" w="med" len="med"/>
+                    </a:lnR>
+                    <a:lnT w="9525" cap="flat" cmpd="sng" algn="ctr">
+                      <a:solidFill>
+                        <a:srgbClr val="C9D3DB"/>
+                      </a:solidFill>
+                      <a:prstDash val="solid"/>
+                      <a:round/>
+                      <a:headEnd type="none" w="med" len="med"/>
+                      <a:tailEnd type="none" w="med" len="med"/>
+                    </a:lnT>
+                    <a:lnB w="9525" cap="flat" cmpd="sng" algn="ctr">
+                      <a:solidFill>
+                        <a:srgbClr val="C9D3DB"/>
+                      </a:solidFill>
+                      <a:prstDash val="solid"/>
+                      <a:round/>
+                      <a:headEnd type="none" w="med" len="med"/>
+                      <a:tailEnd type="none" w="med" len="med"/>
+                    </a:lnB>
+                  </a:tcPr>
+                </a:tc>
+                <a:tc>
+                  <a:txBody>
+                    <a:bodyPr/>
+                    <a:lstStyle/>
+                    <a:p>
+                      <a:pPr algn="ctr" indent="0" marL="0">
+                        <a:buNone/>
+                      </a:pPr>
+                      <a:r>
+                        <a:rPr lang="en-US" sz="1200" dirty="0">
+                          <a:solidFill>
+                            <a:srgbClr val="8A97A3"/>
+                          </a:solidFill>
+                          <a:latin typeface="Meiryo" pitchFamily="34" charset="0"/>
+                          <a:ea typeface="Meiryo" pitchFamily="34" charset="-122"/>
+                          <a:cs typeface="Meiryo" pitchFamily="34" charset="-120"/>
+                        </a:rPr>
+                        <a:t>-</a:t>
+                      </a:r>
+                      <a:endParaRPr lang="en-US" sz="1200" dirty="0">
+                        <a:latin typeface="Meiryo" charset="0"/>
+                        <a:ea typeface="Meiryo" charset="0"/>
+                        <a:cs typeface="Meiryo" charset="0"/>
+                      </a:endParaRPr>
+                    </a:p>
+                  </a:txBody>
+                  <a:tcPr marL="54864" marR="54864" marT="54864" marB="54864" anchor="ctr">
+                    <a:lnL w="9525" cap="flat" cmpd="sng" algn="ctr">
+                      <a:solidFill>
+                        <a:srgbClr val="C9D3DB"/>
+                      </a:solidFill>
+                      <a:prstDash val="solid"/>
+                      <a:round/>
+                      <a:headEnd type="none" w="med" len="med"/>
+                      <a:tailEnd type="none" w="med" len="med"/>
+                    </a:lnL>
+                    <a:lnR w="9525" cap="flat" cmpd="sng" algn="ctr">
+                      <a:solidFill>
+                        <a:srgbClr val="C9D3DB"/>
+                      </a:solidFill>
+                      <a:prstDash val="solid"/>
+                      <a:round/>
+                      <a:headEnd type="none" w="med" len="med"/>
+                      <a:tailEnd type="none" w="med" len="med"/>
+                    </a:lnR>
+                    <a:lnT w="9525" cap="flat" cmpd="sng" algn="ctr">
+                      <a:solidFill>
+                        <a:srgbClr val="C9D3DB"/>
+                      </a:solidFill>
+                      <a:prstDash val="solid"/>
+                      <a:round/>
+                      <a:headEnd type="none" w="med" len="med"/>
+                      <a:tailEnd type="none" w="med" len="med"/>
+                    </a:lnT>
+                    <a:lnB w="9525" cap="flat" cmpd="sng" algn="ctr">
+                      <a:solidFill>
+                        <a:srgbClr val="C9D3DB"/>
+                      </a:solidFill>
+                      <a:prstDash val="solid"/>
+                      <a:round/>
+                      <a:headEnd type="none" w="med" len="med"/>
+                      <a:tailEnd type="none" w="med" len="med"/>
+                    </a:lnB>
+                  </a:tcPr>
+                </a:tc>
+                <a:tc>
+                  <a:txBody>
+                    <a:bodyPr/>
+                    <a:lstStyle/>
+                    <a:p>
+                      <a:pPr algn="ctr" indent="0" marL="0">
+                        <a:buNone/>
+                      </a:pPr>
+                      <a:r>
+                        <a:rPr lang="en-US" sz="1200" dirty="0">
+                          <a:solidFill>
+                            <a:srgbClr val="8A97A3"/>
+                          </a:solidFill>
+                          <a:latin typeface="Meiryo" pitchFamily="34" charset="0"/>
+                          <a:ea typeface="Meiryo" pitchFamily="34" charset="-122"/>
+                          <a:cs typeface="Meiryo" pitchFamily="34" charset="-120"/>
+                        </a:rPr>
+                        <a:t>-</a:t>
+                      </a:r>
+                      <a:endParaRPr lang="en-US" sz="1200" dirty="0">
+                        <a:latin typeface="Meiryo" charset="0"/>
+                        <a:ea typeface="Meiryo" charset="0"/>
+                        <a:cs typeface="Meiryo" charset="0"/>
+                      </a:endParaRPr>
+                    </a:p>
+                  </a:txBody>
+                  <a:tcPr marL="54864" marR="54864" marT="54864" marB="54864" anchor="ctr">
+                    <a:lnL w="9525" cap="flat" cmpd="sng" algn="ctr">
+                      <a:solidFill>
+                        <a:srgbClr val="C9D3DB"/>
+                      </a:solidFill>
+                      <a:prstDash val="solid"/>
+                      <a:round/>
+                      <a:headEnd type="none" w="med" len="med"/>
+                      <a:tailEnd type="none" w="med" len="med"/>
+                    </a:lnL>
+                    <a:lnR w="9525" cap="flat" cmpd="sng" algn="ctr">
+                      <a:solidFill>
+                        <a:srgbClr val="C9D3DB"/>
+                      </a:solidFill>
+                      <a:prstDash val="solid"/>
+                      <a:round/>
+                      <a:headEnd type="none" w="med" len="med"/>
+                      <a:tailEnd type="none" w="med" len="med"/>
+                    </a:lnR>
+                    <a:lnT w="9525" cap="flat" cmpd="sng" algn="ctr">
+                      <a:solidFill>
+                        <a:srgbClr val="C9D3DB"/>
+                      </a:solidFill>
+                      <a:prstDash val="solid"/>
+                      <a:round/>
+                      <a:headEnd type="none" w="med" len="med"/>
+                      <a:tailEnd type="none" w="med" len="med"/>
+                    </a:lnT>
+                    <a:lnB w="9525" cap="flat" cmpd="sng" algn="ctr">
+                      <a:solidFill>
+                        <a:srgbClr val="C9D3DB"/>
+                      </a:solidFill>
+                      <a:prstDash val="solid"/>
+                      <a:round/>
+                      <a:headEnd type="none" w="med" len="med"/>
+                      <a:tailEnd type="none" w="med" len="med"/>
+                    </a:lnB>
+                  </a:tcPr>
+                </a:tc>
+              </a:tr>
+              <a:tr h="246888">
+                <a:tc>
+                  <a:txBody>
+                    <a:bodyPr/>
+                    <a:lstStyle/>
+                    <a:p>
+                      <a:pPr indent="0" marL="0">
+                        <a:buNone/>
+                      </a:pPr>
+                      <a:endParaRPr lang="en-US" sz="1200" dirty="0">
+                        <a:latin typeface="Meiryo" charset="0"/>
+                        <a:ea typeface="Meiryo" charset="0"/>
+                        <a:cs typeface="Meiryo" charset="0"/>
+                      </a:endParaRPr>
+                    </a:p>
+                  </a:txBody>
+                  <a:tcPr marL="54864" marR="54864" marT="54864" marB="54864" anchor="ctr">
+                    <a:lnL w="9525" cap="flat" cmpd="sng" algn="ctr">
+                      <a:solidFill>
+                        <a:srgbClr val="C9D3DB"/>
+                      </a:solidFill>
+                      <a:prstDash val="solid"/>
+                      <a:round/>
+                      <a:headEnd type="none" w="med" len="med"/>
+                      <a:tailEnd type="none" w="med" len="med"/>
+                    </a:lnL>
+                    <a:lnR w="9525" cap="flat" cmpd="sng" algn="ctr">
+                      <a:solidFill>
+                        <a:srgbClr val="C9D3DB"/>
+                      </a:solidFill>
+                      <a:prstDash val="solid"/>
+                      <a:round/>
+                      <a:headEnd type="none" w="med" len="med"/>
+                      <a:tailEnd type="none" w="med" len="med"/>
+                    </a:lnR>
+                    <a:lnT w="9525" cap="flat" cmpd="sng" algn="ctr">
+                      <a:solidFill>
+                        <a:srgbClr val="C9D3DB"/>
+                      </a:solidFill>
+                      <a:prstDash val="solid"/>
+                      <a:round/>
+                      <a:headEnd type="none" w="med" len="med"/>
+                      <a:tailEnd type="none" w="med" len="med"/>
+                    </a:lnT>
+                    <a:lnB w="9525" cap="flat" cmpd="sng" algn="ctr">
+                      <a:solidFill>
+                        <a:srgbClr val="C9D3DB"/>
+                      </a:solidFill>
+                      <a:prstDash val="solid"/>
+                      <a:round/>
+                      <a:headEnd type="none" w="med" len="med"/>
+                      <a:tailEnd type="none" w="med" len="med"/>
+                    </a:lnB>
+                    <a:solidFill>
+                      <a:srgbClr val="F7F9FA"/>
+                    </a:solidFill>
+                  </a:tcPr>
+                </a:tc>
+                <a:tc>
+                  <a:txBody>
+                    <a:bodyPr/>
+                    <a:lstStyle/>
+                    <a:p>
+                      <a:pPr algn="ctr" indent="0" marL="0">
+                        <a:buNone/>
+                      </a:pPr>
+                      <a:r>
+                        <a:rPr lang="en-US" sz="1100" dirty="0">
+                          <a:solidFill>
+                            <a:srgbClr val="2E5470"/>
+                          </a:solidFill>
+                          <a:latin typeface="Meiryo" pitchFamily="34" charset="0"/>
+                          <a:ea typeface="Meiryo" pitchFamily="34" charset="-122"/>
+                          <a:cs typeface="Meiryo" pitchFamily="34" charset="-120"/>
+                        </a:rPr>
+                        <a:t>②</a:t>
+                      </a:r>
+                      <a:endParaRPr lang="en-US" sz="1100" dirty="0">
+                        <a:latin typeface="Meiryo" charset="0"/>
+                        <a:ea typeface="Meiryo" charset="0"/>
+                        <a:cs typeface="Meiryo" charset="0"/>
+                      </a:endParaRPr>
+                    </a:p>
+                  </a:txBody>
+                  <a:tcPr marL="54864" marR="54864" marT="54864" marB="54864" anchor="ctr">
+                    <a:lnL w="9525" cap="flat" cmpd="sng" algn="ctr">
+                      <a:solidFill>
+                        <a:srgbClr val="C9D3DB"/>
+                      </a:solidFill>
+                      <a:prstDash val="solid"/>
+                      <a:round/>
+                      <a:headEnd type="none" w="med" len="med"/>
+                      <a:tailEnd type="none" w="med" len="med"/>
+                    </a:lnL>
+                    <a:lnR w="9525" cap="flat" cmpd="sng" algn="ctr">
+                      <a:solidFill>
+                        <a:srgbClr val="C9D3DB"/>
+                      </a:solidFill>
+                      <a:prstDash val="solid"/>
+                      <a:round/>
+                      <a:headEnd type="none" w="med" len="med"/>
+                      <a:tailEnd type="none" w="med" len="med"/>
+                    </a:lnR>
+                    <a:lnT w="9525" cap="flat" cmpd="sng" algn="ctr">
+                      <a:solidFill>
+                        <a:srgbClr val="C9D3DB"/>
+                      </a:solidFill>
+                      <a:prstDash val="solid"/>
+                      <a:round/>
+                      <a:headEnd type="none" w="med" len="med"/>
+                      <a:tailEnd type="none" w="med" len="med"/>
+                    </a:lnT>
+                    <a:lnB w="9525" cap="flat" cmpd="sng" algn="ctr">
+                      <a:solidFill>
+                        <a:srgbClr val="C9D3DB"/>
+                      </a:solidFill>
+                      <a:prstDash val="solid"/>
+                      <a:round/>
+                      <a:headEnd type="none" w="med" len="med"/>
+                      <a:tailEnd type="none" w="med" len="med"/>
+                    </a:lnB>
+                    <a:solidFill>
+                      <a:srgbClr val="F7F9FA"/>
+                    </a:solidFill>
+                  </a:tcPr>
+                </a:tc>
+                <a:tc>
+                  <a:txBody>
+                    <a:bodyPr/>
+                    <a:lstStyle/>
+                    <a:p>
+                      <a:pPr algn="ctr" indent="0" marL="0">
+                        <a:buNone/>
+                      </a:pPr>
+                      <a:r>
+                        <a:rPr lang="en-US" sz="1100" dirty="0">
+                          <a:solidFill>
+                            <a:srgbClr val="2E5470"/>
+                          </a:solidFill>
+                          <a:latin typeface="Meiryo" pitchFamily="34" charset="0"/>
+                          <a:ea typeface="Meiryo" pitchFamily="34" charset="-122"/>
+                          <a:cs typeface="Meiryo" pitchFamily="34" charset="-120"/>
+                        </a:rPr>
+                        <a:t>⑤</a:t>
+                      </a:r>
+                      <a:endParaRPr lang="en-US" sz="1100" dirty="0">
+                        <a:latin typeface="Meiryo" charset="0"/>
+                        <a:ea typeface="Meiryo" charset="0"/>
+                        <a:cs typeface="Meiryo" charset="0"/>
+                      </a:endParaRPr>
+                    </a:p>
+                  </a:txBody>
+                  <a:tcPr marL="54864" marR="54864" marT="54864" marB="54864" anchor="ctr">
+                    <a:lnL w="9525" cap="flat" cmpd="sng" algn="ctr">
+                      <a:solidFill>
+                        <a:srgbClr val="C9D3DB"/>
+                      </a:solidFill>
+                      <a:prstDash val="solid"/>
+                      <a:round/>
+                      <a:headEnd type="none" w="med" len="med"/>
+                      <a:tailEnd type="none" w="med" len="med"/>
+                    </a:lnL>
+                    <a:lnR w="9525" cap="flat" cmpd="sng" algn="ctr">
+                      <a:solidFill>
+                        <a:srgbClr val="C9D3DB"/>
+                      </a:solidFill>
+                      <a:prstDash val="solid"/>
+                      <a:round/>
+                      <a:headEnd type="none" w="med" len="med"/>
+                      <a:tailEnd type="none" w="med" len="med"/>
+                    </a:lnR>
+                    <a:lnT w="9525" cap="flat" cmpd="sng" algn="ctr">
+                      <a:solidFill>
+                        <a:srgbClr val="C9D3DB"/>
+                      </a:solidFill>
+                      <a:prstDash val="solid"/>
+                      <a:round/>
+                      <a:headEnd type="none" w="med" len="med"/>
+                      <a:tailEnd type="none" w="med" len="med"/>
+                    </a:lnT>
+                    <a:lnB w="9525" cap="flat" cmpd="sng" algn="ctr">
+                      <a:solidFill>
+                        <a:srgbClr val="C9D3DB"/>
+                      </a:solidFill>
+                      <a:prstDash val="solid"/>
+                      <a:round/>
+                      <a:headEnd type="none" w="med" len="med"/>
+                      <a:tailEnd type="none" w="med" len="med"/>
+                    </a:lnB>
+                    <a:solidFill>
+                      <a:srgbClr val="F7F9FA"/>
+                    </a:solidFill>
+                  </a:tcPr>
+                </a:tc>
+                <a:tc>
+                  <a:txBody>
+                    <a:bodyPr/>
+                    <a:lstStyle/>
+                    <a:p>
+                      <a:pPr algn="ctr" indent="0" marL="0">
+                        <a:buNone/>
+                      </a:pPr>
+                      <a:r>
+                        <a:rPr lang="en-US" sz="1100" dirty="0">
+                          <a:solidFill>
+                            <a:srgbClr val="2E5470"/>
+                          </a:solidFill>
+                          <a:latin typeface="Meiryo" pitchFamily="34" charset="0"/>
+                          <a:ea typeface="Meiryo" pitchFamily="34" charset="-122"/>
+                          <a:cs typeface="Meiryo" pitchFamily="34" charset="-120"/>
+                        </a:rPr>
+                        <a:t>⑦=②-⑤</a:t>
+                      </a:r>
+                      <a:endParaRPr lang="en-US" sz="1100" dirty="0">
+                        <a:latin typeface="Meiryo" charset="0"/>
+                        <a:ea typeface="Meiryo" charset="0"/>
+                        <a:cs typeface="Meiryo" charset="0"/>
+                      </a:endParaRPr>
+                    </a:p>
+                  </a:txBody>
+                  <a:tcPr marL="54864" marR="54864" marT="54864" marB="54864" anchor="ctr">
+                    <a:lnL w="9525" cap="flat" cmpd="sng" algn="ctr">
+                      <a:solidFill>
+                        <a:srgbClr val="C9D3DB"/>
+                      </a:solidFill>
+                      <a:prstDash val="solid"/>
+                      <a:round/>
+                      <a:headEnd type="none" w="med" len="med"/>
+                      <a:tailEnd type="none" w="med" len="med"/>
+                    </a:lnL>
+                    <a:lnR w="9525" cap="flat" cmpd="sng" algn="ctr">
+                      <a:solidFill>
+                        <a:srgbClr val="C9D3DB"/>
+                      </a:solidFill>
+                      <a:prstDash val="solid"/>
+                      <a:round/>
+                      <a:headEnd type="none" w="med" len="med"/>
+                      <a:tailEnd type="none" w="med" len="med"/>
+                    </a:lnR>
+                    <a:lnT w="9525" cap="flat" cmpd="sng" algn="ctr">
+                      <a:solidFill>
+                        <a:srgbClr val="C9D3DB"/>
+                      </a:solidFill>
+                      <a:prstDash val="solid"/>
+                      <a:round/>
+                      <a:headEnd type="none" w="med" len="med"/>
+                      <a:tailEnd type="none" w="med" len="med"/>
+                    </a:lnT>
+                    <a:lnB w="9525" cap="flat" cmpd="sng" algn="ctr">
+                      <a:solidFill>
+                        <a:srgbClr val="C9D3DB"/>
+                      </a:solidFill>
+                      <a:prstDash val="solid"/>
+                      <a:round/>
+                      <a:headEnd type="none" w="med" len="med"/>
+                      <a:tailEnd type="none" w="med" len="med"/>
+                    </a:lnB>
+                    <a:solidFill>
+                      <a:srgbClr val="F7F9FA"/>
+                    </a:solidFill>
+                  </a:tcPr>
+                </a:tc>
+                <a:tc>
+                  <a:txBody>
+                    <a:bodyPr/>
+                    <a:lstStyle/>
+                    <a:p>
+                      <a:pPr algn="ctr" indent="0" marL="0">
+                        <a:buNone/>
+                      </a:pPr>
+                      <a:r>
+                        <a:rPr lang="en-US" sz="1100" dirty="0">
+                          <a:solidFill>
+                            <a:srgbClr val="2E5470"/>
+                          </a:solidFill>
+                          <a:latin typeface="Meiryo" pitchFamily="34" charset="0"/>
+                          <a:ea typeface="Meiryo" pitchFamily="34" charset="-122"/>
+                          <a:cs typeface="Meiryo" pitchFamily="34" charset="-120"/>
+                        </a:rPr>
+                        <a:t>⑧</a:t>
+                      </a:r>
+                      <a:endParaRPr lang="en-US" sz="1100" dirty="0">
+                        <a:latin typeface="Meiryo" charset="0"/>
+                        <a:ea typeface="Meiryo" charset="0"/>
+                        <a:cs typeface="Meiryo" charset="0"/>
+                      </a:endParaRPr>
+                    </a:p>
+                  </a:txBody>
+                  <a:tcPr marL="54864" marR="54864" marT="54864" marB="54864" anchor="ctr">
+                    <a:lnL w="9525" cap="flat" cmpd="sng" algn="ctr">
+                      <a:solidFill>
+                        <a:srgbClr val="C9D3DB"/>
+                      </a:solidFill>
+                      <a:prstDash val="solid"/>
+                      <a:round/>
+                      <a:headEnd type="none" w="med" len="med"/>
+                      <a:tailEnd type="none" w="med" len="med"/>
+                    </a:lnL>
+                    <a:lnR w="9525" cap="flat" cmpd="sng" algn="ctr">
+                      <a:solidFill>
+                        <a:srgbClr val="C9D3DB"/>
+                      </a:solidFill>
+                      <a:prstDash val="solid"/>
+                      <a:round/>
+                      <a:headEnd type="none" w="med" len="med"/>
+                      <a:tailEnd type="none" w="med" len="med"/>
+                    </a:lnR>
+                    <a:lnT w="9525" cap="flat" cmpd="sng" algn="ctr">
+                      <a:solidFill>
+                        <a:srgbClr val="C9D3DB"/>
+                      </a:solidFill>
+                      <a:prstDash val="solid"/>
+                      <a:round/>
+                      <a:headEnd type="none" w="med" len="med"/>
+                      <a:tailEnd type="none" w="med" len="med"/>
+                    </a:lnT>
+                    <a:lnB w="9525" cap="flat" cmpd="sng" algn="ctr">
+                      <a:solidFill>
+                        <a:srgbClr val="C9D3DB"/>
+                      </a:solidFill>
+                      <a:prstDash val="solid"/>
+                      <a:round/>
+                      <a:headEnd type="none" w="med" len="med"/>
+                      <a:tailEnd type="none" w="med" len="med"/>
+                    </a:lnB>
+                    <a:solidFill>
+                      <a:srgbClr val="F7F9FA"/>
+                    </a:solidFill>
                   </a:tcPr>
                 </a:tc>
                 <a:tc>
@@ -3196,25 +4245,14 @@
                       <a:pPr indent="0" marL="0">
                         <a:buNone/>
                       </a:pPr>
-                      <a:r>
-                        <a:rPr lang="en-US" sz="1400" dirty="0">
-                          <a:solidFill>
-                            <a:srgbClr val="8A97A3"/>
-                          </a:solidFill>
-                          <a:latin typeface="Meiryo" pitchFamily="34" charset="0"/>
-                          <a:ea typeface="Meiryo" pitchFamily="34" charset="-122"/>
-                          <a:cs typeface="Meiryo" pitchFamily="34" charset="-120"/>
-                        </a:rPr>
-                        <a:t>【算定根拠】</a:t>
-                      </a:r>
-                      <a:endParaRPr lang="en-US" sz="1400" dirty="0">
+                      <a:endParaRPr lang="en-US" sz="1200" dirty="0">
                         <a:latin typeface="Meiryo" charset="0"/>
                         <a:ea typeface="Meiryo" charset="0"/>
                         <a:cs typeface="Meiryo" charset="0"/>
                       </a:endParaRPr>
                     </a:p>
                   </a:txBody>
-                  <a:tcPr marL="91440" marR="91440" marT="45720" marB="45720" anchor="ctr">
+                  <a:tcPr marL="54864" marR="54864" marT="54864" marB="54864" anchor="ctr">
                     <a:lnL w="9525" cap="flat" cmpd="sng" algn="ctr">
                       <a:solidFill>
                         <a:srgbClr val="C9D3DB"/>
@@ -3251,10 +4289,13 @@
                       <a:headEnd type="none" w="med" len="med"/>
                       <a:tailEnd type="none" w="med" len="med"/>
                     </a:lnB>
+                    <a:solidFill>
+                      <a:srgbClr val="F7F9FA"/>
+                    </a:solidFill>
                   </a:tcPr>
                 </a:tc>
               </a:tr>
-              <a:tr h="566928">
+              <a:tr h="301752">
                 <a:tc>
                   <a:txBody>
                     <a:bodyPr/>
@@ -3264,7 +4305,7 @@
                         <a:buNone/>
                       </a:pPr>
                       <a:r>
-                        <a:rPr lang="en-US" sz="1400" b="1" dirty="0">
+                        <a:rPr lang="en-US" sz="1200" b="1" dirty="0">
                           <a:solidFill>
                             <a:srgbClr val="1F3A4D"/>
                           </a:solidFill>
@@ -3272,16 +4313,16 @@
                           <a:ea typeface="Meiryo" pitchFamily="34" charset="-122"/>
                           <a:cs typeface="Meiryo" pitchFamily="34" charset="-120"/>
                         </a:rPr>
-                        <a:t>変動後残工事代金額 P2</a:t>
+                        <a:t>工事価格（税抜）</a:t>
                       </a:r>
-                      <a:endParaRPr lang="en-US" sz="1400" dirty="0">
+                      <a:endParaRPr lang="en-US" sz="1200" dirty="0">
                         <a:latin typeface="Meiryo" charset="0"/>
                         <a:ea typeface="Meiryo" charset="0"/>
                         <a:cs typeface="Meiryo" charset="0"/>
                       </a:endParaRPr>
                     </a:p>
                   </a:txBody>
-                  <a:tcPr marL="91440" marR="91440" marT="45720" marB="45720" anchor="ctr">
+                  <a:tcPr marL="54864" marR="54864" marT="54864" marB="54864" anchor="ctr">
                     <a:lnL w="9525" cap="flat" cmpd="sng" algn="ctr">
                       <a:solidFill>
                         <a:srgbClr val="C9D3DB"/>
@@ -3332,7 +4373,267 @@
                         <a:buNone/>
                       </a:pPr>
                       <a:r>
-                        <a:rPr lang="en-US" sz="1400" dirty="0">
+                        <a:rPr lang="en-US" sz="1200" dirty="0">
+                          <a:solidFill>
+                            <a:srgbClr val="2B2B2B"/>
+                          </a:solidFill>
+                          <a:latin typeface="Meiryo" pitchFamily="34" charset="0"/>
+                          <a:ea typeface="Meiryo" pitchFamily="34" charset="-122"/>
+                          <a:cs typeface="Meiryo" pitchFamily="34" charset="-120"/>
+                        </a:rPr>
+                        <a:t>259,621,000</a:t>
+                      </a:r>
+                      <a:endParaRPr lang="en-US" sz="1200" dirty="0">
+                        <a:latin typeface="Meiryo" charset="0"/>
+                        <a:ea typeface="Meiryo" charset="0"/>
+                        <a:cs typeface="Meiryo" charset="0"/>
+                      </a:endParaRPr>
+                    </a:p>
+                  </a:txBody>
+                  <a:tcPr marL="54864" marR="54864" marT="54864" marB="54864" anchor="ctr">
+                    <a:lnL w="9525" cap="flat" cmpd="sng" algn="ctr">
+                      <a:solidFill>
+                        <a:srgbClr val="C9D3DB"/>
+                      </a:solidFill>
+                      <a:prstDash val="solid"/>
+                      <a:round/>
+                      <a:headEnd type="none" w="med" len="med"/>
+                      <a:tailEnd type="none" w="med" len="med"/>
+                    </a:lnL>
+                    <a:lnR w="9525" cap="flat" cmpd="sng" algn="ctr">
+                      <a:solidFill>
+                        <a:srgbClr val="C9D3DB"/>
+                      </a:solidFill>
+                      <a:prstDash val="solid"/>
+                      <a:round/>
+                      <a:headEnd type="none" w="med" len="med"/>
+                      <a:tailEnd type="none" w="med" len="med"/>
+                    </a:lnR>
+                    <a:lnT w="9525" cap="flat" cmpd="sng" algn="ctr">
+                      <a:solidFill>
+                        <a:srgbClr val="C9D3DB"/>
+                      </a:solidFill>
+                      <a:prstDash val="solid"/>
+                      <a:round/>
+                      <a:headEnd type="none" w="med" len="med"/>
+                      <a:tailEnd type="none" w="med" len="med"/>
+                    </a:lnT>
+                    <a:lnB w="9525" cap="flat" cmpd="sng" algn="ctr">
+                      <a:solidFill>
+                        <a:srgbClr val="C9D3DB"/>
+                      </a:solidFill>
+                      <a:prstDash val="solid"/>
+                      <a:round/>
+                      <a:headEnd type="none" w="med" len="med"/>
+                      <a:tailEnd type="none" w="med" len="med"/>
+                    </a:lnB>
+                  </a:tcPr>
+                </a:tc>
+                <a:tc>
+                  <a:txBody>
+                    <a:bodyPr/>
+                    <a:lstStyle/>
+                    <a:p>
+                      <a:pPr algn="r" indent="0" marL="0">
+                        <a:buNone/>
+                      </a:pPr>
+                      <a:r>
+                        <a:rPr lang="en-US" sz="1200" dirty="0">
+                          <a:solidFill>
+                            <a:srgbClr val="2B2B2B"/>
+                          </a:solidFill>
+                          <a:latin typeface="Meiryo" pitchFamily="34" charset="0"/>
+                          <a:ea typeface="Meiryo" pitchFamily="34" charset="-122"/>
+                          <a:cs typeface="Meiryo" pitchFamily="34" charset="-120"/>
+                        </a:rPr>
+                        <a:t>93,076,000</a:t>
+                      </a:r>
+                      <a:endParaRPr lang="en-US" sz="1200" dirty="0">
+                        <a:latin typeface="Meiryo" charset="0"/>
+                        <a:ea typeface="Meiryo" charset="0"/>
+                        <a:cs typeface="Meiryo" charset="0"/>
+                      </a:endParaRPr>
+                    </a:p>
+                  </a:txBody>
+                  <a:tcPr marL="54864" marR="54864" marT="54864" marB="54864" anchor="ctr">
+                    <a:lnL w="9525" cap="flat" cmpd="sng" algn="ctr">
+                      <a:solidFill>
+                        <a:srgbClr val="C9D3DB"/>
+                      </a:solidFill>
+                      <a:prstDash val="solid"/>
+                      <a:round/>
+                      <a:headEnd type="none" w="med" len="med"/>
+                      <a:tailEnd type="none" w="med" len="med"/>
+                    </a:lnL>
+                    <a:lnR w="9525" cap="flat" cmpd="sng" algn="ctr">
+                      <a:solidFill>
+                        <a:srgbClr val="C9D3DB"/>
+                      </a:solidFill>
+                      <a:prstDash val="solid"/>
+                      <a:round/>
+                      <a:headEnd type="none" w="med" len="med"/>
+                      <a:tailEnd type="none" w="med" len="med"/>
+                    </a:lnR>
+                    <a:lnT w="9525" cap="flat" cmpd="sng" algn="ctr">
+                      <a:solidFill>
+                        <a:srgbClr val="C9D3DB"/>
+                      </a:solidFill>
+                      <a:prstDash val="solid"/>
+                      <a:round/>
+                      <a:headEnd type="none" w="med" len="med"/>
+                      <a:tailEnd type="none" w="med" len="med"/>
+                    </a:lnT>
+                    <a:lnB w="9525" cap="flat" cmpd="sng" algn="ctr">
+                      <a:solidFill>
+                        <a:srgbClr val="C9D3DB"/>
+                      </a:solidFill>
+                      <a:prstDash val="solid"/>
+                      <a:round/>
+                      <a:headEnd type="none" w="med" len="med"/>
+                      <a:tailEnd type="none" w="med" len="med"/>
+                    </a:lnB>
+                  </a:tcPr>
+                </a:tc>
+                <a:tc>
+                  <a:txBody>
+                    <a:bodyPr/>
+                    <a:lstStyle/>
+                    <a:p>
+                      <a:pPr algn="r" indent="0" marL="0">
+                        <a:buNone/>
+                      </a:pPr>
+                      <a:r>
+                        <a:rPr lang="en-US" sz="1200" dirty="0">
+                          <a:solidFill>
+                            <a:srgbClr val="2B2B2B"/>
+                          </a:solidFill>
+                          <a:latin typeface="Meiryo" pitchFamily="34" charset="0"/>
+                          <a:ea typeface="Meiryo" pitchFamily="34" charset="-122"/>
+                          <a:cs typeface="Meiryo" pitchFamily="34" charset="-120"/>
+                        </a:rPr>
+                        <a:t>166,545,000</a:t>
+                      </a:r>
+                      <a:endParaRPr lang="en-US" sz="1200" dirty="0">
+                        <a:latin typeface="Meiryo" charset="0"/>
+                        <a:ea typeface="Meiryo" charset="0"/>
+                        <a:cs typeface="Meiryo" charset="0"/>
+                      </a:endParaRPr>
+                    </a:p>
+                  </a:txBody>
+                  <a:tcPr marL="54864" marR="54864" marT="54864" marB="54864" anchor="ctr">
+                    <a:lnL w="9525" cap="flat" cmpd="sng" algn="ctr">
+                      <a:solidFill>
+                        <a:srgbClr val="C9D3DB"/>
+                      </a:solidFill>
+                      <a:prstDash val="solid"/>
+                      <a:round/>
+                      <a:headEnd type="none" w="med" len="med"/>
+                      <a:tailEnd type="none" w="med" len="med"/>
+                    </a:lnL>
+                    <a:lnR w="9525" cap="flat" cmpd="sng" algn="ctr">
+                      <a:solidFill>
+                        <a:srgbClr val="C9D3DB"/>
+                      </a:solidFill>
+                      <a:prstDash val="solid"/>
+                      <a:round/>
+                      <a:headEnd type="none" w="med" len="med"/>
+                      <a:tailEnd type="none" w="med" len="med"/>
+                    </a:lnR>
+                    <a:lnT w="9525" cap="flat" cmpd="sng" algn="ctr">
+                      <a:solidFill>
+                        <a:srgbClr val="C9D3DB"/>
+                      </a:solidFill>
+                      <a:prstDash val="solid"/>
+                      <a:round/>
+                      <a:headEnd type="none" w="med" len="med"/>
+                      <a:tailEnd type="none" w="med" len="med"/>
+                    </a:lnT>
+                    <a:lnB w="9525" cap="flat" cmpd="sng" algn="ctr">
+                      <a:solidFill>
+                        <a:srgbClr val="C9D3DB"/>
+                      </a:solidFill>
+                      <a:prstDash val="solid"/>
+                      <a:round/>
+                      <a:headEnd type="none" w="med" len="med"/>
+                      <a:tailEnd type="none" w="med" len="med"/>
+                    </a:lnB>
+                  </a:tcPr>
+                </a:tc>
+                <a:tc>
+                  <a:txBody>
+                    <a:bodyPr/>
+                    <a:lstStyle/>
+                    <a:p>
+                      <a:pPr algn="r" indent="0" marL="0">
+                        <a:buNone/>
+                      </a:pPr>
+                      <a:r>
+                        <a:rPr lang="en-US" sz="1200" dirty="0">
+                          <a:solidFill>
+                            <a:srgbClr val="2B2B2B"/>
+                          </a:solidFill>
+                          <a:latin typeface="Meiryo" pitchFamily="34" charset="0"/>
+                          <a:ea typeface="Meiryo" pitchFamily="34" charset="-122"/>
+                          <a:cs typeface="Meiryo" pitchFamily="34" charset="-120"/>
+                        </a:rPr>
+                        <a:t>170,224,000</a:t>
+                      </a:r>
+                      <a:endParaRPr lang="en-US" sz="1200" dirty="0">
+                        <a:latin typeface="Meiryo" charset="0"/>
+                        <a:ea typeface="Meiryo" charset="0"/>
+                        <a:cs typeface="Meiryo" charset="0"/>
+                      </a:endParaRPr>
+                    </a:p>
+                  </a:txBody>
+                  <a:tcPr marL="54864" marR="54864" marT="54864" marB="54864" anchor="ctr">
+                    <a:lnL w="9525" cap="flat" cmpd="sng" algn="ctr">
+                      <a:solidFill>
+                        <a:srgbClr val="C9D3DB"/>
+                      </a:solidFill>
+                      <a:prstDash val="solid"/>
+                      <a:round/>
+                      <a:headEnd type="none" w="med" len="med"/>
+                      <a:tailEnd type="none" w="med" len="med"/>
+                    </a:lnL>
+                    <a:lnR w="9525" cap="flat" cmpd="sng" algn="ctr">
+                      <a:solidFill>
+                        <a:srgbClr val="C9D3DB"/>
+                      </a:solidFill>
+                      <a:prstDash val="solid"/>
+                      <a:round/>
+                      <a:headEnd type="none" w="med" len="med"/>
+                      <a:tailEnd type="none" w="med" len="med"/>
+                    </a:lnR>
+                    <a:lnT w="9525" cap="flat" cmpd="sng" algn="ctr">
+                      <a:solidFill>
+                        <a:srgbClr val="C9D3DB"/>
+                      </a:solidFill>
+                      <a:prstDash val="solid"/>
+                      <a:round/>
+                      <a:headEnd type="none" w="med" len="med"/>
+                      <a:tailEnd type="none" w="med" len="med"/>
+                    </a:lnT>
+                    <a:lnB w="9525" cap="flat" cmpd="sng" algn="ctr">
+                      <a:solidFill>
+                        <a:srgbClr val="C9D3DB"/>
+                      </a:solidFill>
+                      <a:prstDash val="solid"/>
+                      <a:round/>
+                      <a:headEnd type="none" w="med" len="med"/>
+                      <a:tailEnd type="none" w="med" len="med"/>
+                    </a:lnB>
+                  </a:tcPr>
+                </a:tc>
+                <a:tc>
+                  <a:txBody>
+                    <a:bodyPr/>
+                    <a:lstStyle/>
+                    <a:p>
+                      <a:pPr algn="ctr" indent="0" marL="0">
+                        <a:buNone/>
+                      </a:pPr>
+                      <a:r>
+                        <a:rPr lang="en-US" sz="1200" dirty="0">
                           <a:solidFill>
                             <a:srgbClr val="8A97A3"/>
                           </a:solidFill>
@@ -3340,16 +4641,16 @@
                           <a:ea typeface="Meiryo" pitchFamily="34" charset="-122"/>
                           <a:cs typeface="Meiryo" pitchFamily="34" charset="-120"/>
                         </a:rPr>
-                        <a:t>【XXX,XXX,XXX】</a:t>
+                        <a:t>-</a:t>
                       </a:r>
-                      <a:endParaRPr lang="en-US" sz="1400" dirty="0">
+                      <a:endParaRPr lang="en-US" sz="1200" dirty="0">
                         <a:latin typeface="Meiryo" charset="0"/>
                         <a:ea typeface="Meiryo" charset="0"/>
                         <a:cs typeface="Meiryo" charset="0"/>
                       </a:endParaRPr>
                     </a:p>
                   </a:txBody>
-                  <a:tcPr marL="91440" marR="91440" marT="45720" marB="45720" anchor="ctr">
+                  <a:tcPr marL="54864" marR="54864" marT="54864" marB="54864" anchor="ctr">
                     <a:lnL w="9525" cap="flat" cmpd="sng" algn="ctr">
                       <a:solidFill>
                         <a:srgbClr val="C9D3DB"/>
@@ -3388,6 +4689,8 @@
                     </a:lnB>
                   </a:tcPr>
                 </a:tc>
+              </a:tr>
+              <a:tr h="301752">
                 <a:tc>
                   <a:txBody>
                     <a:bodyPr/>
@@ -3397,74 +4700,7 @@
                         <a:buNone/>
                       </a:pPr>
                       <a:r>
-                        <a:rPr lang="en-US" sz="1400" dirty="0">
-                          <a:solidFill>
-                            <a:srgbClr val="8A97A3"/>
-                          </a:solidFill>
-                          <a:latin typeface="Meiryo" pitchFamily="34" charset="0"/>
-                          <a:ea typeface="Meiryo" pitchFamily="34" charset="-122"/>
-                          <a:cs typeface="Meiryo" pitchFamily="34" charset="-120"/>
-                        </a:rPr>
-                        <a:t>【算定根拠】</a:t>
-                      </a:r>
-                      <a:endParaRPr lang="en-US" sz="1400" dirty="0">
-                        <a:latin typeface="Meiryo" charset="0"/>
-                        <a:ea typeface="Meiryo" charset="0"/>
-                        <a:cs typeface="Meiryo" charset="0"/>
-                      </a:endParaRPr>
-                    </a:p>
-                  </a:txBody>
-                  <a:tcPr marL="91440" marR="91440" marT="45720" marB="45720" anchor="ctr">
-                    <a:lnL w="9525" cap="flat" cmpd="sng" algn="ctr">
-                      <a:solidFill>
-                        <a:srgbClr val="C9D3DB"/>
-                      </a:solidFill>
-                      <a:prstDash val="solid"/>
-                      <a:round/>
-                      <a:headEnd type="none" w="med" len="med"/>
-                      <a:tailEnd type="none" w="med" len="med"/>
-                    </a:lnL>
-                    <a:lnR w="9525" cap="flat" cmpd="sng" algn="ctr">
-                      <a:solidFill>
-                        <a:srgbClr val="C9D3DB"/>
-                      </a:solidFill>
-                      <a:prstDash val="solid"/>
-                      <a:round/>
-                      <a:headEnd type="none" w="med" len="med"/>
-                      <a:tailEnd type="none" w="med" len="med"/>
-                    </a:lnR>
-                    <a:lnT w="9525" cap="flat" cmpd="sng" algn="ctr">
-                      <a:solidFill>
-                        <a:srgbClr val="C9D3DB"/>
-                      </a:solidFill>
-                      <a:prstDash val="solid"/>
-                      <a:round/>
-                      <a:headEnd type="none" w="med" len="med"/>
-                      <a:tailEnd type="none" w="med" len="med"/>
-                    </a:lnT>
-                    <a:lnB w="9525" cap="flat" cmpd="sng" algn="ctr">
-                      <a:solidFill>
-                        <a:srgbClr val="C9D3DB"/>
-                      </a:solidFill>
-                      <a:prstDash val="solid"/>
-                      <a:round/>
-                      <a:headEnd type="none" w="med" len="med"/>
-                      <a:tailEnd type="none" w="med" len="med"/>
-                    </a:lnB>
-                  </a:tcPr>
-                </a:tc>
-              </a:tr>
-              <a:tr h="566928">
-                <a:tc>
-                  <a:txBody>
-                    <a:bodyPr/>
-                    <a:lstStyle/>
-                    <a:p>
-                      <a:pPr indent="0" marL="0">
-                        <a:buNone/>
-                      </a:pPr>
-                      <a:r>
-                        <a:rPr lang="en-US" sz="1400" b="1" dirty="0">
+                        <a:rPr lang="en-US" sz="1200" b="1" dirty="0">
                           <a:solidFill>
                             <a:srgbClr val="1F3A4D"/>
                           </a:solidFill>
@@ -3472,16 +4708,16 @@
                           <a:ea typeface="Meiryo" pitchFamily="34" charset="-122"/>
                           <a:cs typeface="Meiryo" pitchFamily="34" charset="-120"/>
                         </a:rPr>
-                        <a:t>変動額 P2 − P1</a:t>
+                        <a:t>消費税相当額</a:t>
                       </a:r>
-                      <a:endParaRPr lang="en-US" sz="1400" dirty="0">
+                      <a:endParaRPr lang="en-US" sz="1200" dirty="0">
                         <a:latin typeface="Meiryo" charset="0"/>
                         <a:ea typeface="Meiryo" charset="0"/>
                         <a:cs typeface="Meiryo" charset="0"/>
                       </a:endParaRPr>
                     </a:p>
                   </a:txBody>
-                  <a:tcPr marL="91440" marR="91440" marT="45720" marB="45720" anchor="ctr">
+                  <a:tcPr marL="54864" marR="54864" marT="54864" marB="54864" anchor="ctr">
                     <a:lnL w="9525" cap="flat" cmpd="sng" algn="ctr">
                       <a:solidFill>
                         <a:srgbClr val="C9D3DB"/>
@@ -3532,7 +4768,72 @@
                         <a:buNone/>
                       </a:pPr>
                       <a:r>
-                        <a:rPr lang="en-US" sz="1400" dirty="0">
+                        <a:rPr lang="en-US" sz="1200" dirty="0">
+                          <a:solidFill>
+                            <a:srgbClr val="2B2B2B"/>
+                          </a:solidFill>
+                          <a:latin typeface="Meiryo" pitchFamily="34" charset="0"/>
+                          <a:ea typeface="Meiryo" pitchFamily="34" charset="-122"/>
+                          <a:cs typeface="Meiryo" pitchFamily="34" charset="-120"/>
+                        </a:rPr>
+                        <a:t>25,962,100</a:t>
+                      </a:r>
+                      <a:endParaRPr lang="en-US" sz="1200" dirty="0">
+                        <a:latin typeface="Meiryo" charset="0"/>
+                        <a:ea typeface="Meiryo" charset="0"/>
+                        <a:cs typeface="Meiryo" charset="0"/>
+                      </a:endParaRPr>
+                    </a:p>
+                  </a:txBody>
+                  <a:tcPr marL="54864" marR="54864" marT="54864" marB="54864" anchor="ctr">
+                    <a:lnL w="9525" cap="flat" cmpd="sng" algn="ctr">
+                      <a:solidFill>
+                        <a:srgbClr val="C9D3DB"/>
+                      </a:solidFill>
+                      <a:prstDash val="solid"/>
+                      <a:round/>
+                      <a:headEnd type="none" w="med" len="med"/>
+                      <a:tailEnd type="none" w="med" len="med"/>
+                    </a:lnL>
+                    <a:lnR w="9525" cap="flat" cmpd="sng" algn="ctr">
+                      <a:solidFill>
+                        <a:srgbClr val="C9D3DB"/>
+                      </a:solidFill>
+                      <a:prstDash val="solid"/>
+                      <a:round/>
+                      <a:headEnd type="none" w="med" len="med"/>
+                      <a:tailEnd type="none" w="med" len="med"/>
+                    </a:lnR>
+                    <a:lnT w="9525" cap="flat" cmpd="sng" algn="ctr">
+                      <a:solidFill>
+                        <a:srgbClr val="C9D3DB"/>
+                      </a:solidFill>
+                      <a:prstDash val="solid"/>
+                      <a:round/>
+                      <a:headEnd type="none" w="med" len="med"/>
+                      <a:tailEnd type="none" w="med" len="med"/>
+                    </a:lnT>
+                    <a:lnB w="9525" cap="flat" cmpd="sng" algn="ctr">
+                      <a:solidFill>
+                        <a:srgbClr val="C9D3DB"/>
+                      </a:solidFill>
+                      <a:prstDash val="solid"/>
+                      <a:round/>
+                      <a:headEnd type="none" w="med" len="med"/>
+                      <a:tailEnd type="none" w="med" len="med"/>
+                    </a:lnB>
+                  </a:tcPr>
+                </a:tc>
+                <a:tc>
+                  <a:txBody>
+                    <a:bodyPr/>
+                    <a:lstStyle/>
+                    <a:p>
+                      <a:pPr algn="ctr" indent="0" marL="0">
+                        <a:buNone/>
+                      </a:pPr>
+                      <a:r>
+                        <a:rPr lang="en-US" sz="1200" dirty="0">
                           <a:solidFill>
                             <a:srgbClr val="8A97A3"/>
                           </a:solidFill>
@@ -3540,16 +4841,16 @@
                           <a:ea typeface="Meiryo" pitchFamily="34" charset="-122"/>
                           <a:cs typeface="Meiryo" pitchFamily="34" charset="-120"/>
                         </a:rPr>
-                        <a:t>【XX,XXX,XXX】</a:t>
+                        <a:t>-</a:t>
                       </a:r>
-                      <a:endParaRPr lang="en-US" sz="1400" dirty="0">
+                      <a:endParaRPr lang="en-US" sz="1200" dirty="0">
                         <a:latin typeface="Meiryo" charset="0"/>
                         <a:ea typeface="Meiryo" charset="0"/>
                         <a:cs typeface="Meiryo" charset="0"/>
                       </a:endParaRPr>
                     </a:p>
                   </a:txBody>
-                  <a:tcPr marL="91440" marR="91440" marT="45720" marB="45720" anchor="ctr">
+                  <a:tcPr marL="54864" marR="54864" marT="54864" marB="54864" anchor="ctr">
                     <a:lnL w="9525" cap="flat" cmpd="sng" algn="ctr">
                       <a:solidFill>
                         <a:srgbClr val="C9D3DB"/>
@@ -3586,6 +4887,328 @@
                       <a:headEnd type="none" w="med" len="med"/>
                       <a:tailEnd type="none" w="med" len="med"/>
                     </a:lnB>
+                  </a:tcPr>
+                </a:tc>
+                <a:tc>
+                  <a:txBody>
+                    <a:bodyPr/>
+                    <a:lstStyle/>
+                    <a:p>
+                      <a:pPr algn="ctr" indent="0" marL="0">
+                        <a:buNone/>
+                      </a:pPr>
+                      <a:r>
+                        <a:rPr lang="en-US" sz="1200" dirty="0">
+                          <a:solidFill>
+                            <a:srgbClr val="8A97A3"/>
+                          </a:solidFill>
+                          <a:latin typeface="Meiryo" pitchFamily="34" charset="0"/>
+                          <a:ea typeface="Meiryo" pitchFamily="34" charset="-122"/>
+                          <a:cs typeface="Meiryo" pitchFamily="34" charset="-120"/>
+                        </a:rPr>
+                        <a:t>-</a:t>
+                      </a:r>
+                      <a:endParaRPr lang="en-US" sz="1200" dirty="0">
+                        <a:latin typeface="Meiryo" charset="0"/>
+                        <a:ea typeface="Meiryo" charset="0"/>
+                        <a:cs typeface="Meiryo" charset="0"/>
+                      </a:endParaRPr>
+                    </a:p>
+                  </a:txBody>
+                  <a:tcPr marL="54864" marR="54864" marT="54864" marB="54864" anchor="ctr">
+                    <a:lnL w="9525" cap="flat" cmpd="sng" algn="ctr">
+                      <a:solidFill>
+                        <a:srgbClr val="C9D3DB"/>
+                      </a:solidFill>
+                      <a:prstDash val="solid"/>
+                      <a:round/>
+                      <a:headEnd type="none" w="med" len="med"/>
+                      <a:tailEnd type="none" w="med" len="med"/>
+                    </a:lnL>
+                    <a:lnR w="9525" cap="flat" cmpd="sng" algn="ctr">
+                      <a:solidFill>
+                        <a:srgbClr val="C9D3DB"/>
+                      </a:solidFill>
+                      <a:prstDash val="solid"/>
+                      <a:round/>
+                      <a:headEnd type="none" w="med" len="med"/>
+                      <a:tailEnd type="none" w="med" len="med"/>
+                    </a:lnR>
+                    <a:lnT w="9525" cap="flat" cmpd="sng" algn="ctr">
+                      <a:solidFill>
+                        <a:srgbClr val="C9D3DB"/>
+                      </a:solidFill>
+                      <a:prstDash val="solid"/>
+                      <a:round/>
+                      <a:headEnd type="none" w="med" len="med"/>
+                      <a:tailEnd type="none" w="med" len="med"/>
+                    </a:lnT>
+                    <a:lnB w="9525" cap="flat" cmpd="sng" algn="ctr">
+                      <a:solidFill>
+                        <a:srgbClr val="C9D3DB"/>
+                      </a:solidFill>
+                      <a:prstDash val="solid"/>
+                      <a:round/>
+                      <a:headEnd type="none" w="med" len="med"/>
+                      <a:tailEnd type="none" w="med" len="med"/>
+                    </a:lnB>
+                  </a:tcPr>
+                </a:tc>
+                <a:tc>
+                  <a:txBody>
+                    <a:bodyPr/>
+                    <a:lstStyle/>
+                    <a:p>
+                      <a:pPr algn="ctr" indent="0" marL="0">
+                        <a:buNone/>
+                      </a:pPr>
+                      <a:r>
+                        <a:rPr lang="en-US" sz="1200" dirty="0">
+                          <a:solidFill>
+                            <a:srgbClr val="8A97A3"/>
+                          </a:solidFill>
+                          <a:latin typeface="Meiryo" pitchFamily="34" charset="0"/>
+                          <a:ea typeface="Meiryo" pitchFamily="34" charset="-122"/>
+                          <a:cs typeface="Meiryo" pitchFamily="34" charset="-120"/>
+                        </a:rPr>
+                        <a:t>-</a:t>
+                      </a:r>
+                      <a:endParaRPr lang="en-US" sz="1200" dirty="0">
+                        <a:latin typeface="Meiryo" charset="0"/>
+                        <a:ea typeface="Meiryo" charset="0"/>
+                        <a:cs typeface="Meiryo" charset="0"/>
+                      </a:endParaRPr>
+                    </a:p>
+                  </a:txBody>
+                  <a:tcPr marL="54864" marR="54864" marT="54864" marB="54864" anchor="ctr">
+                    <a:lnL w="9525" cap="flat" cmpd="sng" algn="ctr">
+                      <a:solidFill>
+                        <a:srgbClr val="C9D3DB"/>
+                      </a:solidFill>
+                      <a:prstDash val="solid"/>
+                      <a:round/>
+                      <a:headEnd type="none" w="med" len="med"/>
+                      <a:tailEnd type="none" w="med" len="med"/>
+                    </a:lnL>
+                    <a:lnR w="9525" cap="flat" cmpd="sng" algn="ctr">
+                      <a:solidFill>
+                        <a:srgbClr val="C9D3DB"/>
+                      </a:solidFill>
+                      <a:prstDash val="solid"/>
+                      <a:round/>
+                      <a:headEnd type="none" w="med" len="med"/>
+                      <a:tailEnd type="none" w="med" len="med"/>
+                    </a:lnR>
+                    <a:lnT w="9525" cap="flat" cmpd="sng" algn="ctr">
+                      <a:solidFill>
+                        <a:srgbClr val="C9D3DB"/>
+                      </a:solidFill>
+                      <a:prstDash val="solid"/>
+                      <a:round/>
+                      <a:headEnd type="none" w="med" len="med"/>
+                      <a:tailEnd type="none" w="med" len="med"/>
+                    </a:lnT>
+                    <a:lnB w="9525" cap="flat" cmpd="sng" algn="ctr">
+                      <a:solidFill>
+                        <a:srgbClr val="C9D3DB"/>
+                      </a:solidFill>
+                      <a:prstDash val="solid"/>
+                      <a:round/>
+                      <a:headEnd type="none" w="med" len="med"/>
+                      <a:tailEnd type="none" w="med" len="med"/>
+                    </a:lnB>
+                  </a:tcPr>
+                </a:tc>
+                <a:tc>
+                  <a:txBody>
+                    <a:bodyPr/>
+                    <a:lstStyle/>
+                    <a:p>
+                      <a:pPr algn="ctr" indent="0" marL="0">
+                        <a:buNone/>
+                      </a:pPr>
+                      <a:r>
+                        <a:rPr lang="en-US" sz="1200" dirty="0">
+                          <a:solidFill>
+                            <a:srgbClr val="8A97A3"/>
+                          </a:solidFill>
+                          <a:latin typeface="Meiryo" pitchFamily="34" charset="0"/>
+                          <a:ea typeface="Meiryo" pitchFamily="34" charset="-122"/>
+                          <a:cs typeface="Meiryo" pitchFamily="34" charset="-120"/>
+                        </a:rPr>
+                        <a:t>-</a:t>
+                      </a:r>
+                      <a:endParaRPr lang="en-US" sz="1200" dirty="0">
+                        <a:latin typeface="Meiryo" charset="0"/>
+                        <a:ea typeface="Meiryo" charset="0"/>
+                        <a:cs typeface="Meiryo" charset="0"/>
+                      </a:endParaRPr>
+                    </a:p>
+                  </a:txBody>
+                  <a:tcPr marL="54864" marR="54864" marT="54864" marB="54864" anchor="ctr">
+                    <a:lnL w="9525" cap="flat" cmpd="sng" algn="ctr">
+                      <a:solidFill>
+                        <a:srgbClr val="C9D3DB"/>
+                      </a:solidFill>
+                      <a:prstDash val="solid"/>
+                      <a:round/>
+                      <a:headEnd type="none" w="med" len="med"/>
+                      <a:tailEnd type="none" w="med" len="med"/>
+                    </a:lnL>
+                    <a:lnR w="9525" cap="flat" cmpd="sng" algn="ctr">
+                      <a:solidFill>
+                        <a:srgbClr val="C9D3DB"/>
+                      </a:solidFill>
+                      <a:prstDash val="solid"/>
+                      <a:round/>
+                      <a:headEnd type="none" w="med" len="med"/>
+                      <a:tailEnd type="none" w="med" len="med"/>
+                    </a:lnR>
+                    <a:lnT w="9525" cap="flat" cmpd="sng" algn="ctr">
+                      <a:solidFill>
+                        <a:srgbClr val="C9D3DB"/>
+                      </a:solidFill>
+                      <a:prstDash val="solid"/>
+                      <a:round/>
+                      <a:headEnd type="none" w="med" len="med"/>
+                      <a:tailEnd type="none" w="med" len="med"/>
+                    </a:lnT>
+                    <a:lnB w="9525" cap="flat" cmpd="sng" algn="ctr">
+                      <a:solidFill>
+                        <a:srgbClr val="C9D3DB"/>
+                      </a:solidFill>
+                      <a:prstDash val="solid"/>
+                      <a:round/>
+                      <a:headEnd type="none" w="med" len="med"/>
+                      <a:tailEnd type="none" w="med" len="med"/>
+                    </a:lnB>
+                  </a:tcPr>
+                </a:tc>
+              </a:tr>
+              <a:tr h="246888">
+                <a:tc>
+                  <a:txBody>
+                    <a:bodyPr/>
+                    <a:lstStyle/>
+                    <a:p>
+                      <a:pPr indent="0" marL="0">
+                        <a:buNone/>
+                      </a:pPr>
+                      <a:endParaRPr lang="en-US" sz="1200" dirty="0">
+                        <a:latin typeface="Meiryo" charset="0"/>
+                        <a:ea typeface="Meiryo" charset="0"/>
+                        <a:cs typeface="Meiryo" charset="0"/>
+                      </a:endParaRPr>
+                    </a:p>
+                  </a:txBody>
+                  <a:tcPr marL="54864" marR="54864" marT="54864" marB="54864" anchor="ctr">
+                    <a:lnL w="9525" cap="flat" cmpd="sng" algn="ctr">
+                      <a:solidFill>
+                        <a:srgbClr val="C9D3DB"/>
+                      </a:solidFill>
+                      <a:prstDash val="solid"/>
+                      <a:round/>
+                      <a:headEnd type="none" w="med" len="med"/>
+                      <a:tailEnd type="none" w="med" len="med"/>
+                    </a:lnL>
+                    <a:lnR w="9525" cap="flat" cmpd="sng" algn="ctr">
+                      <a:solidFill>
+                        <a:srgbClr val="C9D3DB"/>
+                      </a:solidFill>
+                      <a:prstDash val="solid"/>
+                      <a:round/>
+                      <a:headEnd type="none" w="med" len="med"/>
+                      <a:tailEnd type="none" w="med" len="med"/>
+                    </a:lnR>
+                    <a:lnT w="9525" cap="flat" cmpd="sng" algn="ctr">
+                      <a:solidFill>
+                        <a:srgbClr val="C9D3DB"/>
+                      </a:solidFill>
+                      <a:prstDash val="solid"/>
+                      <a:round/>
+                      <a:headEnd type="none" w="med" len="med"/>
+                      <a:tailEnd type="none" w="med" len="med"/>
+                    </a:lnT>
+                    <a:lnB w="9525" cap="flat" cmpd="sng" algn="ctr">
+                      <a:solidFill>
+                        <a:srgbClr val="C9D3DB"/>
+                      </a:solidFill>
+                      <a:prstDash val="solid"/>
+                      <a:round/>
+                      <a:headEnd type="none" w="med" len="med"/>
+                      <a:tailEnd type="none" w="med" len="med"/>
+                    </a:lnB>
+                    <a:solidFill>
+                      <a:srgbClr val="F7F9FA"/>
+                    </a:solidFill>
+                  </a:tcPr>
+                </a:tc>
+                <a:tc>
+                  <a:txBody>
+                    <a:bodyPr/>
+                    <a:lstStyle/>
+                    <a:p>
+                      <a:pPr algn="ctr" indent="0" marL="0">
+                        <a:buNone/>
+                      </a:pPr>
+                      <a:r>
+                        <a:rPr lang="en-US" sz="1100" dirty="0">
+                          <a:solidFill>
+                            <a:srgbClr val="2E5470"/>
+                          </a:solidFill>
+                          <a:latin typeface="Meiryo" pitchFamily="34" charset="0"/>
+                          <a:ea typeface="Meiryo" pitchFamily="34" charset="-122"/>
+                          <a:cs typeface="Meiryo" pitchFamily="34" charset="-120"/>
+                        </a:rPr>
+                        <a:t>③</a:t>
+                      </a:r>
+                      <a:endParaRPr lang="en-US" sz="1100" dirty="0">
+                        <a:latin typeface="Meiryo" charset="0"/>
+                        <a:ea typeface="Meiryo" charset="0"/>
+                        <a:cs typeface="Meiryo" charset="0"/>
+                      </a:endParaRPr>
+                    </a:p>
+                  </a:txBody>
+                  <a:tcPr marL="54864" marR="54864" marT="54864" marB="54864" anchor="ctr">
+                    <a:lnL w="9525" cap="flat" cmpd="sng" algn="ctr">
+                      <a:solidFill>
+                        <a:srgbClr val="C9D3DB"/>
+                      </a:solidFill>
+                      <a:prstDash val="solid"/>
+                      <a:round/>
+                      <a:headEnd type="none" w="med" len="med"/>
+                      <a:tailEnd type="none" w="med" len="med"/>
+                    </a:lnL>
+                    <a:lnR w="9525" cap="flat" cmpd="sng" algn="ctr">
+                      <a:solidFill>
+                        <a:srgbClr val="C9D3DB"/>
+                      </a:solidFill>
+                      <a:prstDash val="solid"/>
+                      <a:round/>
+                      <a:headEnd type="none" w="med" len="med"/>
+                      <a:tailEnd type="none" w="med" len="med"/>
+                    </a:lnR>
+                    <a:lnT w="9525" cap="flat" cmpd="sng" algn="ctr">
+                      <a:solidFill>
+                        <a:srgbClr val="C9D3DB"/>
+                      </a:solidFill>
+                      <a:prstDash val="solid"/>
+                      <a:round/>
+                      <a:headEnd type="none" w="med" len="med"/>
+                      <a:tailEnd type="none" w="med" len="med"/>
+                    </a:lnT>
+                    <a:lnB w="9525" cap="flat" cmpd="sng" algn="ctr">
+                      <a:solidFill>
+                        <a:srgbClr val="C9D3DB"/>
+                      </a:solidFill>
+                      <a:prstDash val="solid"/>
+                      <a:round/>
+                      <a:headEnd type="none" w="med" len="med"/>
+                      <a:tailEnd type="none" w="med" len="med"/>
+                    </a:lnB>
+                    <a:solidFill>
+                      <a:srgbClr val="F7F9FA"/>
+                    </a:solidFill>
                   </a:tcPr>
                 </a:tc>
                 <a:tc>
@@ -3596,14 +5219,14 @@
                       <a:pPr indent="0" marL="0">
                         <a:buNone/>
                       </a:pPr>
-                      <a:endParaRPr lang="en-US" sz="1400" dirty="0">
+                      <a:endParaRPr lang="en-US" sz="1200" dirty="0">
                         <a:latin typeface="Meiryo" charset="0"/>
                         <a:ea typeface="Meiryo" charset="0"/>
                         <a:cs typeface="Meiryo" charset="0"/>
                       </a:endParaRPr>
                     </a:p>
                   </a:txBody>
-                  <a:tcPr marL="91440" marR="91440" marT="45720" marB="45720" anchor="ctr">
+                  <a:tcPr marL="54864" marR="54864" marT="54864" marB="54864" anchor="ctr">
                     <a:lnL w="9525" cap="flat" cmpd="sng" algn="ctr">
                       <a:solidFill>
                         <a:srgbClr val="C9D3DB"/>
@@ -3640,10 +5263,184 @@
                       <a:headEnd type="none" w="med" len="med"/>
                       <a:tailEnd type="none" w="med" len="med"/>
                     </a:lnB>
+                    <a:solidFill>
+                      <a:srgbClr val="F7F9FA"/>
+                    </a:solidFill>
+                  </a:tcPr>
+                </a:tc>
+                <a:tc>
+                  <a:txBody>
+                    <a:bodyPr/>
+                    <a:lstStyle/>
+                    <a:p>
+                      <a:pPr indent="0" marL="0">
+                        <a:buNone/>
+                      </a:pPr>
+                      <a:endParaRPr lang="en-US" sz="1200" dirty="0">
+                        <a:latin typeface="Meiryo" charset="0"/>
+                        <a:ea typeface="Meiryo" charset="0"/>
+                        <a:cs typeface="Meiryo" charset="0"/>
+                      </a:endParaRPr>
+                    </a:p>
+                  </a:txBody>
+                  <a:tcPr marL="54864" marR="54864" marT="54864" marB="54864" anchor="ctr">
+                    <a:lnL w="9525" cap="flat" cmpd="sng" algn="ctr">
+                      <a:solidFill>
+                        <a:srgbClr val="C9D3DB"/>
+                      </a:solidFill>
+                      <a:prstDash val="solid"/>
+                      <a:round/>
+                      <a:headEnd type="none" w="med" len="med"/>
+                      <a:tailEnd type="none" w="med" len="med"/>
+                    </a:lnL>
+                    <a:lnR w="9525" cap="flat" cmpd="sng" algn="ctr">
+                      <a:solidFill>
+                        <a:srgbClr val="C9D3DB"/>
+                      </a:solidFill>
+                      <a:prstDash val="solid"/>
+                      <a:round/>
+                      <a:headEnd type="none" w="med" len="med"/>
+                      <a:tailEnd type="none" w="med" len="med"/>
+                    </a:lnR>
+                    <a:lnT w="9525" cap="flat" cmpd="sng" algn="ctr">
+                      <a:solidFill>
+                        <a:srgbClr val="C9D3DB"/>
+                      </a:solidFill>
+                      <a:prstDash val="solid"/>
+                      <a:round/>
+                      <a:headEnd type="none" w="med" len="med"/>
+                      <a:tailEnd type="none" w="med" len="med"/>
+                    </a:lnT>
+                    <a:lnB w="9525" cap="flat" cmpd="sng" algn="ctr">
+                      <a:solidFill>
+                        <a:srgbClr val="C9D3DB"/>
+                      </a:solidFill>
+                      <a:prstDash val="solid"/>
+                      <a:round/>
+                      <a:headEnd type="none" w="med" len="med"/>
+                      <a:tailEnd type="none" w="med" len="med"/>
+                    </a:lnB>
+                    <a:solidFill>
+                      <a:srgbClr val="F7F9FA"/>
+                    </a:solidFill>
+                  </a:tcPr>
+                </a:tc>
+                <a:tc>
+                  <a:txBody>
+                    <a:bodyPr/>
+                    <a:lstStyle/>
+                    <a:p>
+                      <a:pPr indent="0" marL="0">
+                        <a:buNone/>
+                      </a:pPr>
+                      <a:endParaRPr lang="en-US" sz="1200" dirty="0">
+                        <a:latin typeface="Meiryo" charset="0"/>
+                        <a:ea typeface="Meiryo" charset="0"/>
+                        <a:cs typeface="Meiryo" charset="0"/>
+                      </a:endParaRPr>
+                    </a:p>
+                  </a:txBody>
+                  <a:tcPr marL="54864" marR="54864" marT="54864" marB="54864" anchor="ctr">
+                    <a:lnL w="9525" cap="flat" cmpd="sng" algn="ctr">
+                      <a:solidFill>
+                        <a:srgbClr val="C9D3DB"/>
+                      </a:solidFill>
+                      <a:prstDash val="solid"/>
+                      <a:round/>
+                      <a:headEnd type="none" w="med" len="med"/>
+                      <a:tailEnd type="none" w="med" len="med"/>
+                    </a:lnL>
+                    <a:lnR w="9525" cap="flat" cmpd="sng" algn="ctr">
+                      <a:solidFill>
+                        <a:srgbClr val="C9D3DB"/>
+                      </a:solidFill>
+                      <a:prstDash val="solid"/>
+                      <a:round/>
+                      <a:headEnd type="none" w="med" len="med"/>
+                      <a:tailEnd type="none" w="med" len="med"/>
+                    </a:lnR>
+                    <a:lnT w="9525" cap="flat" cmpd="sng" algn="ctr">
+                      <a:solidFill>
+                        <a:srgbClr val="C9D3DB"/>
+                      </a:solidFill>
+                      <a:prstDash val="solid"/>
+                      <a:round/>
+                      <a:headEnd type="none" w="med" len="med"/>
+                      <a:tailEnd type="none" w="med" len="med"/>
+                    </a:lnT>
+                    <a:lnB w="9525" cap="flat" cmpd="sng" algn="ctr">
+                      <a:solidFill>
+                        <a:srgbClr val="C9D3DB"/>
+                      </a:solidFill>
+                      <a:prstDash val="solid"/>
+                      <a:round/>
+                      <a:headEnd type="none" w="med" len="med"/>
+                      <a:tailEnd type="none" w="med" len="med"/>
+                    </a:lnB>
+                    <a:solidFill>
+                      <a:srgbClr val="F7F9FA"/>
+                    </a:solidFill>
+                  </a:tcPr>
+                </a:tc>
+                <a:tc>
+                  <a:txBody>
+                    <a:bodyPr/>
+                    <a:lstStyle/>
+                    <a:p>
+                      <a:pPr indent="0" marL="0">
+                        <a:buNone/>
+                      </a:pPr>
+                      <a:endParaRPr lang="en-US" sz="1200" dirty="0">
+                        <a:latin typeface="Meiryo" charset="0"/>
+                        <a:ea typeface="Meiryo" charset="0"/>
+                        <a:cs typeface="Meiryo" charset="0"/>
+                      </a:endParaRPr>
+                    </a:p>
+                  </a:txBody>
+                  <a:tcPr marL="54864" marR="54864" marT="54864" marB="54864" anchor="ctr">
+                    <a:lnL w="9525" cap="flat" cmpd="sng" algn="ctr">
+                      <a:solidFill>
+                        <a:srgbClr val="C9D3DB"/>
+                      </a:solidFill>
+                      <a:prstDash val="solid"/>
+                      <a:round/>
+                      <a:headEnd type="none" w="med" len="med"/>
+                      <a:tailEnd type="none" w="med" len="med"/>
+                    </a:lnL>
+                    <a:lnR w="9525" cap="flat" cmpd="sng" algn="ctr">
+                      <a:solidFill>
+                        <a:srgbClr val="C9D3DB"/>
+                      </a:solidFill>
+                      <a:prstDash val="solid"/>
+                      <a:round/>
+                      <a:headEnd type="none" w="med" len="med"/>
+                      <a:tailEnd type="none" w="med" len="med"/>
+                    </a:lnR>
+                    <a:lnT w="9525" cap="flat" cmpd="sng" algn="ctr">
+                      <a:solidFill>
+                        <a:srgbClr val="C9D3DB"/>
+                      </a:solidFill>
+                      <a:prstDash val="solid"/>
+                      <a:round/>
+                      <a:headEnd type="none" w="med" len="med"/>
+                      <a:tailEnd type="none" w="med" len="med"/>
+                    </a:lnT>
+                    <a:lnB w="9525" cap="flat" cmpd="sng" algn="ctr">
+                      <a:solidFill>
+                        <a:srgbClr val="C9D3DB"/>
+                      </a:solidFill>
+                      <a:prstDash val="solid"/>
+                      <a:round/>
+                      <a:headEnd type="none" w="med" len="med"/>
+                      <a:tailEnd type="none" w="med" len="med"/>
+                    </a:lnB>
+                    <a:solidFill>
+                      <a:srgbClr val="F7F9FA"/>
+                    </a:solidFill>
                   </a:tcPr>
                 </a:tc>
               </a:tr>
-              <a:tr h="566928">
+              <a:tr h="301752">
                 <a:tc>
                   <a:txBody>
                     <a:bodyPr/>
@@ -3653,7 +5450,7 @@
                         <a:buNone/>
                       </a:pPr>
                       <a:r>
-                        <a:rPr lang="en-US" sz="1400" b="1" dirty="0">
+                        <a:rPr lang="en-US" sz="1200" b="1" dirty="0">
                           <a:solidFill>
                             <a:srgbClr val="1F3A4D"/>
                           </a:solidFill>
@@ -3661,16 +5458,16 @@
                           <a:ea typeface="Meiryo" pitchFamily="34" charset="-122"/>
                           <a:cs typeface="Meiryo" pitchFamily="34" charset="-120"/>
                         </a:rPr>
-                        <a:t>受注者負担 P1 × 1%</a:t>
+                        <a:t>請負代金額（税込）</a:t>
                       </a:r>
-                      <a:endParaRPr lang="en-US" sz="1400" dirty="0">
+                      <a:endParaRPr lang="en-US" sz="1200" dirty="0">
                         <a:latin typeface="Meiryo" charset="0"/>
                         <a:ea typeface="Meiryo" charset="0"/>
                         <a:cs typeface="Meiryo" charset="0"/>
                       </a:endParaRPr>
                     </a:p>
                   </a:txBody>
-                  <a:tcPr marL="91440" marR="91440" marT="45720" marB="45720" anchor="ctr">
+                  <a:tcPr marL="54864" marR="54864" marT="54864" marB="54864" anchor="ctr">
                     <a:lnL w="9525" cap="flat" cmpd="sng" algn="ctr">
                       <a:solidFill>
                         <a:srgbClr val="C9D3DB"/>
@@ -3721,24 +5518,24 @@
                         <a:buNone/>
                       </a:pPr>
                       <a:r>
-                        <a:rPr lang="en-US" sz="1400" dirty="0">
+                        <a:rPr lang="en-US" sz="1200" dirty="0">
                           <a:solidFill>
-                            <a:srgbClr val="8A97A3"/>
+                            <a:srgbClr val="2B2B2B"/>
                           </a:solidFill>
                           <a:latin typeface="Meiryo" pitchFamily="34" charset="0"/>
                           <a:ea typeface="Meiryo" pitchFamily="34" charset="-122"/>
                           <a:cs typeface="Meiryo" pitchFamily="34" charset="-120"/>
                         </a:rPr>
-                        <a:t>【X,XXX,XXX】</a:t>
+                        <a:t>250,130,627</a:t>
                       </a:r>
-                      <a:endParaRPr lang="en-US" sz="1400" dirty="0">
+                      <a:endParaRPr lang="en-US" sz="1200" dirty="0">
                         <a:latin typeface="Meiryo" charset="0"/>
                         <a:ea typeface="Meiryo" charset="0"/>
                         <a:cs typeface="Meiryo" charset="0"/>
                       </a:endParaRPr>
                     </a:p>
                   </a:txBody>
-                  <a:tcPr marL="91440" marR="91440" marT="45720" marB="45720" anchor="ctr">
+                  <a:tcPr marL="54864" marR="54864" marT="54864" marB="54864" anchor="ctr">
                     <a:lnL w="9525" cap="flat" cmpd="sng" algn="ctr">
                       <a:solidFill>
                         <a:srgbClr val="C9D3DB"/>
@@ -3782,17 +5579,223 @@
                     <a:bodyPr/>
                     <a:lstStyle/>
                     <a:p>
-                      <a:pPr indent="0" marL="0">
+                      <a:pPr algn="ctr" indent="0" marL="0">
                         <a:buNone/>
                       </a:pPr>
-                      <a:endParaRPr lang="en-US" sz="1400" dirty="0">
+                      <a:r>
+                        <a:rPr lang="en-US" sz="1200" dirty="0">
+                          <a:solidFill>
+                            <a:srgbClr val="8A97A3"/>
+                          </a:solidFill>
+                          <a:latin typeface="Meiryo" pitchFamily="34" charset="0"/>
+                          <a:ea typeface="Meiryo" pitchFamily="34" charset="-122"/>
+                          <a:cs typeface="Meiryo" pitchFamily="34" charset="-120"/>
+                        </a:rPr>
+                        <a:t>-</a:t>
+                      </a:r>
+                      <a:endParaRPr lang="en-US" sz="1200" dirty="0">
                         <a:latin typeface="Meiryo" charset="0"/>
                         <a:ea typeface="Meiryo" charset="0"/>
                         <a:cs typeface="Meiryo" charset="0"/>
                       </a:endParaRPr>
                     </a:p>
                   </a:txBody>
-                  <a:tcPr marL="91440" marR="91440" marT="45720" marB="45720" anchor="ctr">
+                  <a:tcPr marL="54864" marR="54864" marT="54864" marB="54864" anchor="ctr">
+                    <a:lnL w="9525" cap="flat" cmpd="sng" algn="ctr">
+                      <a:solidFill>
+                        <a:srgbClr val="C9D3DB"/>
+                      </a:solidFill>
+                      <a:prstDash val="solid"/>
+                      <a:round/>
+                      <a:headEnd type="none" w="med" len="med"/>
+                      <a:tailEnd type="none" w="med" len="med"/>
+                    </a:lnL>
+                    <a:lnR w="9525" cap="flat" cmpd="sng" algn="ctr">
+                      <a:solidFill>
+                        <a:srgbClr val="C9D3DB"/>
+                      </a:solidFill>
+                      <a:prstDash val="solid"/>
+                      <a:round/>
+                      <a:headEnd type="none" w="med" len="med"/>
+                      <a:tailEnd type="none" w="med" len="med"/>
+                    </a:lnR>
+                    <a:lnT w="9525" cap="flat" cmpd="sng" algn="ctr">
+                      <a:solidFill>
+                        <a:srgbClr val="C9D3DB"/>
+                      </a:solidFill>
+                      <a:prstDash val="solid"/>
+                      <a:round/>
+                      <a:headEnd type="none" w="med" len="med"/>
+                      <a:tailEnd type="none" w="med" len="med"/>
+                    </a:lnT>
+                    <a:lnB w="9525" cap="flat" cmpd="sng" algn="ctr">
+                      <a:solidFill>
+                        <a:srgbClr val="C9D3DB"/>
+                      </a:solidFill>
+                      <a:prstDash val="solid"/>
+                      <a:round/>
+                      <a:headEnd type="none" w="med" len="med"/>
+                      <a:tailEnd type="none" w="med" len="med"/>
+                    </a:lnB>
+                  </a:tcPr>
+                </a:tc>
+                <a:tc>
+                  <a:txBody>
+                    <a:bodyPr/>
+                    <a:lstStyle/>
+                    <a:p>
+                      <a:pPr algn="ctr" indent="0" marL="0">
+                        <a:buNone/>
+                      </a:pPr>
+                      <a:r>
+                        <a:rPr lang="en-US" sz="1200" dirty="0">
+                          <a:solidFill>
+                            <a:srgbClr val="8A97A3"/>
+                          </a:solidFill>
+                          <a:latin typeface="Meiryo" pitchFamily="34" charset="0"/>
+                          <a:ea typeface="Meiryo" pitchFamily="34" charset="-122"/>
+                          <a:cs typeface="Meiryo" pitchFamily="34" charset="-120"/>
+                        </a:rPr>
+                        <a:t>-</a:t>
+                      </a:r>
+                      <a:endParaRPr lang="en-US" sz="1200" dirty="0">
+                        <a:latin typeface="Meiryo" charset="0"/>
+                        <a:ea typeface="Meiryo" charset="0"/>
+                        <a:cs typeface="Meiryo" charset="0"/>
+                      </a:endParaRPr>
+                    </a:p>
+                  </a:txBody>
+                  <a:tcPr marL="54864" marR="54864" marT="54864" marB="54864" anchor="ctr">
+                    <a:lnL w="9525" cap="flat" cmpd="sng" algn="ctr">
+                      <a:solidFill>
+                        <a:srgbClr val="C9D3DB"/>
+                      </a:solidFill>
+                      <a:prstDash val="solid"/>
+                      <a:round/>
+                      <a:headEnd type="none" w="med" len="med"/>
+                      <a:tailEnd type="none" w="med" len="med"/>
+                    </a:lnL>
+                    <a:lnR w="9525" cap="flat" cmpd="sng" algn="ctr">
+                      <a:solidFill>
+                        <a:srgbClr val="C9D3DB"/>
+                      </a:solidFill>
+                      <a:prstDash val="solid"/>
+                      <a:round/>
+                      <a:headEnd type="none" w="med" len="med"/>
+                      <a:tailEnd type="none" w="med" len="med"/>
+                    </a:lnR>
+                    <a:lnT w="9525" cap="flat" cmpd="sng" algn="ctr">
+                      <a:solidFill>
+                        <a:srgbClr val="C9D3DB"/>
+                      </a:solidFill>
+                      <a:prstDash val="solid"/>
+                      <a:round/>
+                      <a:headEnd type="none" w="med" len="med"/>
+                      <a:tailEnd type="none" w="med" len="med"/>
+                    </a:lnT>
+                    <a:lnB w="9525" cap="flat" cmpd="sng" algn="ctr">
+                      <a:solidFill>
+                        <a:srgbClr val="C9D3DB"/>
+                      </a:solidFill>
+                      <a:prstDash val="solid"/>
+                      <a:round/>
+                      <a:headEnd type="none" w="med" len="med"/>
+                      <a:tailEnd type="none" w="med" len="med"/>
+                    </a:lnB>
+                  </a:tcPr>
+                </a:tc>
+                <a:tc>
+                  <a:txBody>
+                    <a:bodyPr/>
+                    <a:lstStyle/>
+                    <a:p>
+                      <a:pPr algn="ctr" indent="0" marL="0">
+                        <a:buNone/>
+                      </a:pPr>
+                      <a:r>
+                        <a:rPr lang="en-US" sz="1200" dirty="0">
+                          <a:solidFill>
+                            <a:srgbClr val="8A97A3"/>
+                          </a:solidFill>
+                          <a:latin typeface="Meiryo" pitchFamily="34" charset="0"/>
+                          <a:ea typeface="Meiryo" pitchFamily="34" charset="-122"/>
+                          <a:cs typeface="Meiryo" pitchFamily="34" charset="-120"/>
+                        </a:rPr>
+                        <a:t>-</a:t>
+                      </a:r>
+                      <a:endParaRPr lang="en-US" sz="1200" dirty="0">
+                        <a:latin typeface="Meiryo" charset="0"/>
+                        <a:ea typeface="Meiryo" charset="0"/>
+                        <a:cs typeface="Meiryo" charset="0"/>
+                      </a:endParaRPr>
+                    </a:p>
+                  </a:txBody>
+                  <a:tcPr marL="54864" marR="54864" marT="54864" marB="54864" anchor="ctr">
+                    <a:lnL w="9525" cap="flat" cmpd="sng" algn="ctr">
+                      <a:solidFill>
+                        <a:srgbClr val="C9D3DB"/>
+                      </a:solidFill>
+                      <a:prstDash val="solid"/>
+                      <a:round/>
+                      <a:headEnd type="none" w="med" len="med"/>
+                      <a:tailEnd type="none" w="med" len="med"/>
+                    </a:lnL>
+                    <a:lnR w="9525" cap="flat" cmpd="sng" algn="ctr">
+                      <a:solidFill>
+                        <a:srgbClr val="C9D3DB"/>
+                      </a:solidFill>
+                      <a:prstDash val="solid"/>
+                      <a:round/>
+                      <a:headEnd type="none" w="med" len="med"/>
+                      <a:tailEnd type="none" w="med" len="med"/>
+                    </a:lnR>
+                    <a:lnT w="9525" cap="flat" cmpd="sng" algn="ctr">
+                      <a:solidFill>
+                        <a:srgbClr val="C9D3DB"/>
+                      </a:solidFill>
+                      <a:prstDash val="solid"/>
+                      <a:round/>
+                      <a:headEnd type="none" w="med" len="med"/>
+                      <a:tailEnd type="none" w="med" len="med"/>
+                    </a:lnT>
+                    <a:lnB w="9525" cap="flat" cmpd="sng" algn="ctr">
+                      <a:solidFill>
+                        <a:srgbClr val="C9D3DB"/>
+                      </a:solidFill>
+                      <a:prstDash val="solid"/>
+                      <a:round/>
+                      <a:headEnd type="none" w="med" len="med"/>
+                      <a:tailEnd type="none" w="med" len="med"/>
+                    </a:lnB>
+                  </a:tcPr>
+                </a:tc>
+                <a:tc>
+                  <a:txBody>
+                    <a:bodyPr/>
+                    <a:lstStyle/>
+                    <a:p>
+                      <a:pPr algn="ctr" indent="0" marL="0">
+                        <a:buNone/>
+                      </a:pPr>
+                      <a:r>
+                        <a:rPr lang="en-US" sz="1200" dirty="0">
+                          <a:solidFill>
+                            <a:srgbClr val="8A97A3"/>
+                          </a:solidFill>
+                          <a:latin typeface="Meiryo" pitchFamily="34" charset="0"/>
+                          <a:ea typeface="Meiryo" pitchFamily="34" charset="-122"/>
+                          <a:cs typeface="Meiryo" pitchFamily="34" charset="-120"/>
+                        </a:rPr>
+                        <a:t>-</a:t>
+                      </a:r>
+                      <a:endParaRPr lang="en-US" sz="1200" dirty="0">
+                        <a:latin typeface="Meiryo" charset="0"/>
+                        <a:ea typeface="Meiryo" charset="0"/>
+                        <a:cs typeface="Meiryo" charset="0"/>
+                      </a:endParaRPr>
+                    </a:p>
+                  </a:txBody>
+                  <a:tcPr marL="54864" marR="54864" marT="54864" marB="54864" anchor="ctr">
                     <a:lnL w="9525" cap="flat" cmpd="sng" algn="ctr">
                       <a:solidFill>
                         <a:srgbClr val="C9D3DB"/>
@@ -3832,7 +5835,406 @@
                   </a:tcPr>
                 </a:tc>
               </a:tr>
-              <a:tr h="566928">
+              <a:tr h="246888">
+                <a:tc>
+                  <a:txBody>
+                    <a:bodyPr/>
+                    <a:lstStyle/>
+                    <a:p>
+                      <a:pPr indent="0" marL="0">
+                        <a:buNone/>
+                      </a:pPr>
+                      <a:endParaRPr lang="en-US" sz="1200" dirty="0">
+                        <a:latin typeface="Meiryo" charset="0"/>
+                        <a:ea typeface="Meiryo" charset="0"/>
+                        <a:cs typeface="Meiryo" charset="0"/>
+                      </a:endParaRPr>
+                    </a:p>
+                  </a:txBody>
+                  <a:tcPr marL="54864" marR="54864" marT="54864" marB="54864" anchor="ctr">
+                    <a:lnL w="9525" cap="flat" cmpd="sng" algn="ctr">
+                      <a:solidFill>
+                        <a:srgbClr val="C9D3DB"/>
+                      </a:solidFill>
+                      <a:prstDash val="solid"/>
+                      <a:round/>
+                      <a:headEnd type="none" w="med" len="med"/>
+                      <a:tailEnd type="none" w="med" len="med"/>
+                    </a:lnL>
+                    <a:lnR w="9525" cap="flat" cmpd="sng" algn="ctr">
+                      <a:solidFill>
+                        <a:srgbClr val="C9D3DB"/>
+                      </a:solidFill>
+                      <a:prstDash val="solid"/>
+                      <a:round/>
+                      <a:headEnd type="none" w="med" len="med"/>
+                      <a:tailEnd type="none" w="med" len="med"/>
+                    </a:lnR>
+                    <a:lnT w="9525" cap="flat" cmpd="sng" algn="ctr">
+                      <a:solidFill>
+                        <a:srgbClr val="C9D3DB"/>
+                      </a:solidFill>
+                      <a:prstDash val="solid"/>
+                      <a:round/>
+                      <a:headEnd type="none" w="med" len="med"/>
+                      <a:tailEnd type="none" w="med" len="med"/>
+                    </a:lnT>
+                    <a:lnB w="9525" cap="flat" cmpd="sng" algn="ctr">
+                      <a:solidFill>
+                        <a:srgbClr val="C9D3DB"/>
+                      </a:solidFill>
+                      <a:prstDash val="solid"/>
+                      <a:round/>
+                      <a:headEnd type="none" w="med" len="med"/>
+                      <a:tailEnd type="none" w="med" len="med"/>
+                    </a:lnB>
+                    <a:solidFill>
+                      <a:srgbClr val="F7F9FA"/>
+                    </a:solidFill>
+                  </a:tcPr>
+                </a:tc>
+                <a:tc>
+                  <a:txBody>
+                    <a:bodyPr/>
+                    <a:lstStyle/>
+                    <a:p>
+                      <a:pPr algn="ctr" indent="0" marL="0">
+                        <a:buNone/>
+                      </a:pPr>
+                      <a:r>
+                        <a:rPr lang="en-US" sz="1100" dirty="0">
+                          <a:solidFill>
+                            <a:srgbClr val="2E5470"/>
+                          </a:solidFill>
+                          <a:latin typeface="Meiryo" pitchFamily="34" charset="0"/>
+                          <a:ea typeface="Meiryo" pitchFamily="34" charset="-122"/>
+                          <a:cs typeface="Meiryo" pitchFamily="34" charset="-120"/>
+                        </a:rPr>
+                        <a:t>④</a:t>
+                      </a:r>
+                      <a:endParaRPr lang="en-US" sz="1100" dirty="0">
+                        <a:latin typeface="Meiryo" charset="0"/>
+                        <a:ea typeface="Meiryo" charset="0"/>
+                        <a:cs typeface="Meiryo" charset="0"/>
+                      </a:endParaRPr>
+                    </a:p>
+                  </a:txBody>
+                  <a:tcPr marL="54864" marR="54864" marT="54864" marB="54864" anchor="ctr">
+                    <a:lnL w="9525" cap="flat" cmpd="sng" algn="ctr">
+                      <a:solidFill>
+                        <a:srgbClr val="C9D3DB"/>
+                      </a:solidFill>
+                      <a:prstDash val="solid"/>
+                      <a:round/>
+                      <a:headEnd type="none" w="med" len="med"/>
+                      <a:tailEnd type="none" w="med" len="med"/>
+                    </a:lnL>
+                    <a:lnR w="9525" cap="flat" cmpd="sng" algn="ctr">
+                      <a:solidFill>
+                        <a:srgbClr val="C9D3DB"/>
+                      </a:solidFill>
+                      <a:prstDash val="solid"/>
+                      <a:round/>
+                      <a:headEnd type="none" w="med" len="med"/>
+                      <a:tailEnd type="none" w="med" len="med"/>
+                    </a:lnR>
+                    <a:lnT w="9525" cap="flat" cmpd="sng" algn="ctr">
+                      <a:solidFill>
+                        <a:srgbClr val="C9D3DB"/>
+                      </a:solidFill>
+                      <a:prstDash val="solid"/>
+                      <a:round/>
+                      <a:headEnd type="none" w="med" len="med"/>
+                      <a:tailEnd type="none" w="med" len="med"/>
+                    </a:lnT>
+                    <a:lnB w="9525" cap="flat" cmpd="sng" algn="ctr">
+                      <a:solidFill>
+                        <a:srgbClr val="C9D3DB"/>
+                      </a:solidFill>
+                      <a:prstDash val="solid"/>
+                      <a:round/>
+                      <a:headEnd type="none" w="med" len="med"/>
+                      <a:tailEnd type="none" w="med" len="med"/>
+                    </a:lnB>
+                    <a:solidFill>
+                      <a:srgbClr val="F7F9FA"/>
+                    </a:solidFill>
+                  </a:tcPr>
+                </a:tc>
+                <a:tc>
+                  <a:txBody>
+                    <a:bodyPr/>
+                    <a:lstStyle/>
+                    <a:p>
+                      <a:pPr algn="ctr" indent="0" marL="0">
+                        <a:buNone/>
+                      </a:pPr>
+                      <a:r>
+                        <a:rPr lang="en-US" sz="1100" dirty="0">
+                          <a:solidFill>
+                            <a:srgbClr val="2E5470"/>
+                          </a:solidFill>
+                          <a:latin typeface="Meiryo" pitchFamily="34" charset="0"/>
+                          <a:ea typeface="Meiryo" pitchFamily="34" charset="-122"/>
+                          <a:cs typeface="Meiryo" pitchFamily="34" charset="-120"/>
+                        </a:rPr>
+                        <a:t>⑥=⑤×(③/①)</a:t>
+                      </a:r>
+                      <a:endParaRPr lang="en-US" sz="1100" dirty="0">
+                        <a:latin typeface="Meiryo" charset="0"/>
+                        <a:ea typeface="Meiryo" charset="0"/>
+                        <a:cs typeface="Meiryo" charset="0"/>
+                      </a:endParaRPr>
+                    </a:p>
+                  </a:txBody>
+                  <a:tcPr marL="54864" marR="54864" marT="54864" marB="54864" anchor="ctr">
+                    <a:lnL w="9525" cap="flat" cmpd="sng" algn="ctr">
+                      <a:solidFill>
+                        <a:srgbClr val="C9D3DB"/>
+                      </a:solidFill>
+                      <a:prstDash val="solid"/>
+                      <a:round/>
+                      <a:headEnd type="none" w="med" len="med"/>
+                      <a:tailEnd type="none" w="med" len="med"/>
+                    </a:lnL>
+                    <a:lnR w="9525" cap="flat" cmpd="sng" algn="ctr">
+                      <a:solidFill>
+                        <a:srgbClr val="C9D3DB"/>
+                      </a:solidFill>
+                      <a:prstDash val="solid"/>
+                      <a:round/>
+                      <a:headEnd type="none" w="med" len="med"/>
+                      <a:tailEnd type="none" w="med" len="med"/>
+                    </a:lnR>
+                    <a:lnT w="9525" cap="flat" cmpd="sng" algn="ctr">
+                      <a:solidFill>
+                        <a:srgbClr val="C9D3DB"/>
+                      </a:solidFill>
+                      <a:prstDash val="solid"/>
+                      <a:round/>
+                      <a:headEnd type="none" w="med" len="med"/>
+                      <a:tailEnd type="none" w="med" len="med"/>
+                    </a:lnT>
+                    <a:lnB w="9525" cap="flat" cmpd="sng" algn="ctr">
+                      <a:solidFill>
+                        <a:srgbClr val="C9D3DB"/>
+                      </a:solidFill>
+                      <a:prstDash val="solid"/>
+                      <a:round/>
+                      <a:headEnd type="none" w="med" len="med"/>
+                      <a:tailEnd type="none" w="med" len="med"/>
+                    </a:lnB>
+                    <a:solidFill>
+                      <a:srgbClr val="F7F9FA"/>
+                    </a:solidFill>
+                  </a:tcPr>
+                </a:tc>
+                <a:tc>
+                  <a:txBody>
+                    <a:bodyPr/>
+                    <a:lstStyle/>
+                    <a:p>
+                      <a:pPr algn="ctr" indent="0" marL="0">
+                        <a:buNone/>
+                      </a:pPr>
+                      <a:r>
+                        <a:rPr lang="en-US" sz="1100" dirty="0">
+                          <a:solidFill>
+                            <a:srgbClr val="2E5470"/>
+                          </a:solidFill>
+                          <a:latin typeface="Meiryo" pitchFamily="34" charset="0"/>
+                          <a:ea typeface="Meiryo" pitchFamily="34" charset="-122"/>
+                          <a:cs typeface="Meiryo" pitchFamily="34" charset="-120"/>
+                        </a:rPr>
+                        <a:t>P1'=④-⑥</a:t>
+                      </a:r>
+                      <a:endParaRPr lang="en-US" sz="1100" dirty="0">
+                        <a:latin typeface="Meiryo" charset="0"/>
+                        <a:ea typeface="Meiryo" charset="0"/>
+                        <a:cs typeface="Meiryo" charset="0"/>
+                      </a:endParaRPr>
+                    </a:p>
+                  </a:txBody>
+                  <a:tcPr marL="54864" marR="54864" marT="54864" marB="54864" anchor="ctr">
+                    <a:lnL w="9525" cap="flat" cmpd="sng" algn="ctr">
+                      <a:solidFill>
+                        <a:srgbClr val="C9D3DB"/>
+                      </a:solidFill>
+                      <a:prstDash val="solid"/>
+                      <a:round/>
+                      <a:headEnd type="none" w="med" len="med"/>
+                      <a:tailEnd type="none" w="med" len="med"/>
+                    </a:lnL>
+                    <a:lnR w="9525" cap="flat" cmpd="sng" algn="ctr">
+                      <a:solidFill>
+                        <a:srgbClr val="C9D3DB"/>
+                      </a:solidFill>
+                      <a:prstDash val="solid"/>
+                      <a:round/>
+                      <a:headEnd type="none" w="med" len="med"/>
+                      <a:tailEnd type="none" w="med" len="med"/>
+                    </a:lnR>
+                    <a:lnT w="9525" cap="flat" cmpd="sng" algn="ctr">
+                      <a:solidFill>
+                        <a:srgbClr val="C9D3DB"/>
+                      </a:solidFill>
+                      <a:prstDash val="solid"/>
+                      <a:round/>
+                      <a:headEnd type="none" w="med" len="med"/>
+                      <a:tailEnd type="none" w="med" len="med"/>
+                    </a:lnT>
+                    <a:lnB w="9525" cap="flat" cmpd="sng" algn="ctr">
+                      <a:solidFill>
+                        <a:srgbClr val="C9D3DB"/>
+                      </a:solidFill>
+                      <a:prstDash val="solid"/>
+                      <a:round/>
+                      <a:headEnd type="none" w="med" len="med"/>
+                      <a:tailEnd type="none" w="med" len="med"/>
+                    </a:lnB>
+                    <a:solidFill>
+                      <a:srgbClr val="F7F9FA"/>
+                    </a:solidFill>
+                  </a:tcPr>
+                </a:tc>
+                <a:tc>
+                  <a:txBody>
+                    <a:bodyPr/>
+                    <a:lstStyle/>
+                    <a:p>
+                      <a:pPr algn="ctr" indent="0" marL="0">
+                        <a:buNone/>
+                      </a:pPr>
+                      <a:r>
+                        <a:rPr lang="en-US" sz="1100" dirty="0">
+                          <a:solidFill>
+                            <a:srgbClr val="2E5470"/>
+                          </a:solidFill>
+                          <a:latin typeface="Meiryo" pitchFamily="34" charset="0"/>
+                          <a:ea typeface="Meiryo" pitchFamily="34" charset="-122"/>
+                          <a:cs typeface="Meiryo" pitchFamily="34" charset="-120"/>
+                        </a:rPr>
+                        <a:t>P2'=⑧×(③/①)</a:t>
+                      </a:r>
+                      <a:endParaRPr lang="en-US" sz="1100" dirty="0">
+                        <a:latin typeface="Meiryo" charset="0"/>
+                        <a:ea typeface="Meiryo" charset="0"/>
+                        <a:cs typeface="Meiryo" charset="0"/>
+                      </a:endParaRPr>
+                    </a:p>
+                  </a:txBody>
+                  <a:tcPr marL="54864" marR="54864" marT="54864" marB="54864" anchor="ctr">
+                    <a:lnL w="9525" cap="flat" cmpd="sng" algn="ctr">
+                      <a:solidFill>
+                        <a:srgbClr val="C9D3DB"/>
+                      </a:solidFill>
+                      <a:prstDash val="solid"/>
+                      <a:round/>
+                      <a:headEnd type="none" w="med" len="med"/>
+                      <a:tailEnd type="none" w="med" len="med"/>
+                    </a:lnL>
+                    <a:lnR w="9525" cap="flat" cmpd="sng" algn="ctr">
+                      <a:solidFill>
+                        <a:srgbClr val="C9D3DB"/>
+                      </a:solidFill>
+                      <a:prstDash val="solid"/>
+                      <a:round/>
+                      <a:headEnd type="none" w="med" len="med"/>
+                      <a:tailEnd type="none" w="med" len="med"/>
+                    </a:lnR>
+                    <a:lnT w="9525" cap="flat" cmpd="sng" algn="ctr">
+                      <a:solidFill>
+                        <a:srgbClr val="C9D3DB"/>
+                      </a:solidFill>
+                      <a:prstDash val="solid"/>
+                      <a:round/>
+                      <a:headEnd type="none" w="med" len="med"/>
+                      <a:tailEnd type="none" w="med" len="med"/>
+                    </a:lnT>
+                    <a:lnB w="9525" cap="flat" cmpd="sng" algn="ctr">
+                      <a:solidFill>
+                        <a:srgbClr val="C9D3DB"/>
+                      </a:solidFill>
+                      <a:prstDash val="solid"/>
+                      <a:round/>
+                      <a:headEnd type="none" w="med" len="med"/>
+                      <a:tailEnd type="none" w="med" len="med"/>
+                    </a:lnB>
+                    <a:solidFill>
+                      <a:srgbClr val="F7F9FA"/>
+                    </a:solidFill>
+                  </a:tcPr>
+                </a:tc>
+                <a:tc>
+                  <a:txBody>
+                    <a:bodyPr/>
+                    <a:lstStyle/>
+                    <a:p>
+                      <a:pPr algn="ctr" indent="0" marL="0">
+                        <a:buNone/>
+                      </a:pPr>
+                      <a:r>
+                        <a:rPr lang="en-US" sz="1100" dirty="0">
+                          <a:solidFill>
+                            <a:srgbClr val="2E5470"/>
+                          </a:solidFill>
+                          <a:latin typeface="Meiryo" pitchFamily="34" charset="0"/>
+                          <a:ea typeface="Meiryo" pitchFamily="34" charset="-122"/>
+                          <a:cs typeface="Meiryo" pitchFamily="34" charset="-120"/>
+                        </a:rPr>
+                        <a:t>S'=P2'-P1'-(P1''×1/100)</a:t>
+                      </a:r>
+                      <a:endParaRPr lang="en-US" sz="1100" dirty="0">
+                        <a:latin typeface="Meiryo" charset="0"/>
+                        <a:ea typeface="Meiryo" charset="0"/>
+                        <a:cs typeface="Meiryo" charset="0"/>
+                      </a:endParaRPr>
+                    </a:p>
+                  </a:txBody>
+                  <a:tcPr marL="54864" marR="54864" marT="54864" marB="54864" anchor="ctr">
+                    <a:lnL w="9525" cap="flat" cmpd="sng" algn="ctr">
+                      <a:solidFill>
+                        <a:srgbClr val="C9D3DB"/>
+                      </a:solidFill>
+                      <a:prstDash val="solid"/>
+                      <a:round/>
+                      <a:headEnd type="none" w="med" len="med"/>
+                      <a:tailEnd type="none" w="med" len="med"/>
+                    </a:lnL>
+                    <a:lnR w="9525" cap="flat" cmpd="sng" algn="ctr">
+                      <a:solidFill>
+                        <a:srgbClr val="C9D3DB"/>
+                      </a:solidFill>
+                      <a:prstDash val="solid"/>
+                      <a:round/>
+                      <a:headEnd type="none" w="med" len="med"/>
+                      <a:tailEnd type="none" w="med" len="med"/>
+                    </a:lnR>
+                    <a:lnT w="9525" cap="flat" cmpd="sng" algn="ctr">
+                      <a:solidFill>
+                        <a:srgbClr val="C9D3DB"/>
+                      </a:solidFill>
+                      <a:prstDash val="solid"/>
+                      <a:round/>
+                      <a:headEnd type="none" w="med" len="med"/>
+                      <a:tailEnd type="none" w="med" len="med"/>
+                    </a:lnT>
+                    <a:lnB w="9525" cap="flat" cmpd="sng" algn="ctr">
+                      <a:solidFill>
+                        <a:srgbClr val="C9D3DB"/>
+                      </a:solidFill>
+                      <a:prstDash val="solid"/>
+                      <a:round/>
+                      <a:headEnd type="none" w="med" len="med"/>
+                      <a:tailEnd type="none" w="med" len="med"/>
+                    </a:lnB>
+                    <a:solidFill>
+                      <a:srgbClr val="F7F9FA"/>
+                    </a:solidFill>
+                  </a:tcPr>
+                </a:tc>
+              </a:tr>
+              <a:tr h="301752">
                 <a:tc>
                   <a:txBody>
                     <a:bodyPr/>
@@ -3842,24 +6244,24 @@
                         <a:buNone/>
                       </a:pPr>
                       <a:r>
-                        <a:rPr lang="en-US" sz="1400" b="1" dirty="0">
+                        <a:rPr lang="en-US" sz="1200" b="1" dirty="0">
                           <a:solidFill>
-                            <a:srgbClr val="FFFFFF"/>
+                            <a:srgbClr val="1F3A4D"/>
                           </a:solidFill>
                           <a:latin typeface="Meiryo" pitchFamily="34" charset="0"/>
                           <a:ea typeface="Meiryo" pitchFamily="34" charset="-122"/>
                           <a:cs typeface="Meiryo" pitchFamily="34" charset="-120"/>
                         </a:rPr>
-                        <a:t>スライド額 S</a:t>
+                        <a:t>請負工事価格（税抜）</a:t>
                       </a:r>
-                      <a:endParaRPr lang="en-US" sz="1400" dirty="0">
+                      <a:endParaRPr lang="en-US" sz="1200" dirty="0">
                         <a:latin typeface="Meiryo" charset="0"/>
                         <a:ea typeface="Meiryo" charset="0"/>
                         <a:cs typeface="Meiryo" charset="0"/>
                       </a:endParaRPr>
                     </a:p>
                   </a:txBody>
-                  <a:tcPr marL="91440" marR="91440" marT="45720" marB="45720" anchor="ctr">
+                  <a:tcPr marL="54864" marR="54864" marT="54864" marB="54864" anchor="ctr">
                     <a:lnL w="9525" cap="flat" cmpd="sng" algn="ctr">
                       <a:solidFill>
                         <a:srgbClr val="C9D3DB"/>
@@ -3897,7 +6299,7 @@
                       <a:tailEnd type="none" w="med" len="med"/>
                     </a:lnB>
                     <a:solidFill>
-                      <a:srgbClr val="E08E2B"/>
+                      <a:srgbClr val="EEF2F5"/>
                     </a:solidFill>
                   </a:tcPr>
                 </a:tc>
@@ -3910,7 +6312,7 @@
                         <a:buNone/>
                       </a:pPr>
                       <a:r>
-                        <a:rPr lang="en-US" sz="1400" b="1" dirty="0">
+                        <a:rPr lang="en-US" sz="1200" dirty="0">
                           <a:solidFill>
                             <a:srgbClr val="2B2B2B"/>
                           </a:solidFill>
@@ -3918,16 +6320,276 @@
                           <a:ea typeface="Meiryo" pitchFamily="34" charset="-122"/>
                           <a:cs typeface="Meiryo" pitchFamily="34" charset="-120"/>
                         </a:rPr>
-                        <a:t>【XX,XXX,XXX】</a:t>
+                        <a:t>227,391,479</a:t>
                       </a:r>
-                      <a:endParaRPr lang="en-US" sz="1400" dirty="0">
+                      <a:endParaRPr lang="en-US" sz="1200" dirty="0">
                         <a:latin typeface="Meiryo" charset="0"/>
                         <a:ea typeface="Meiryo" charset="0"/>
                         <a:cs typeface="Meiryo" charset="0"/>
                       </a:endParaRPr>
                     </a:p>
                   </a:txBody>
-                  <a:tcPr marL="91440" marR="91440" marT="45720" marB="45720" anchor="ctr">
+                  <a:tcPr marL="54864" marR="54864" marT="54864" marB="54864" anchor="ctr">
+                    <a:lnL w="9525" cap="flat" cmpd="sng" algn="ctr">
+                      <a:solidFill>
+                        <a:srgbClr val="C9D3DB"/>
+                      </a:solidFill>
+                      <a:prstDash val="solid"/>
+                      <a:round/>
+                      <a:headEnd type="none" w="med" len="med"/>
+                      <a:tailEnd type="none" w="med" len="med"/>
+                    </a:lnL>
+                    <a:lnR w="9525" cap="flat" cmpd="sng" algn="ctr">
+                      <a:solidFill>
+                        <a:srgbClr val="C9D3DB"/>
+                      </a:solidFill>
+                      <a:prstDash val="solid"/>
+                      <a:round/>
+                      <a:headEnd type="none" w="med" len="med"/>
+                      <a:tailEnd type="none" w="med" len="med"/>
+                    </a:lnR>
+                    <a:lnT w="9525" cap="flat" cmpd="sng" algn="ctr">
+                      <a:solidFill>
+                        <a:srgbClr val="C9D3DB"/>
+                      </a:solidFill>
+                      <a:prstDash val="solid"/>
+                      <a:round/>
+                      <a:headEnd type="none" w="med" len="med"/>
+                      <a:tailEnd type="none" w="med" len="med"/>
+                    </a:lnT>
+                    <a:lnB w="9525" cap="flat" cmpd="sng" algn="ctr">
+                      <a:solidFill>
+                        <a:srgbClr val="C9D3DB"/>
+                      </a:solidFill>
+                      <a:prstDash val="solid"/>
+                      <a:round/>
+                      <a:headEnd type="none" w="med" len="med"/>
+                      <a:tailEnd type="none" w="med" len="med"/>
+                    </a:lnB>
+                  </a:tcPr>
+                </a:tc>
+                <a:tc>
+                  <a:txBody>
+                    <a:bodyPr/>
+                    <a:lstStyle/>
+                    <a:p>
+                      <a:pPr algn="r" indent="0" marL="0">
+                        <a:buNone/>
+                      </a:pPr>
+                      <a:r>
+                        <a:rPr lang="en-US" sz="1200" dirty="0">
+                          <a:solidFill>
+                            <a:srgbClr val="2B2B2B"/>
+                          </a:solidFill>
+                          <a:latin typeface="Meiryo" pitchFamily="34" charset="0"/>
+                          <a:ea typeface="Meiryo" pitchFamily="34" charset="-122"/>
+                          <a:cs typeface="Meiryo" pitchFamily="34" charset="-120"/>
+                        </a:rPr>
+                        <a:t>81,521,484</a:t>
+                      </a:r>
+                      <a:endParaRPr lang="en-US" sz="1200" dirty="0">
+                        <a:latin typeface="Meiryo" charset="0"/>
+                        <a:ea typeface="Meiryo" charset="0"/>
+                        <a:cs typeface="Meiryo" charset="0"/>
+                      </a:endParaRPr>
+                    </a:p>
+                  </a:txBody>
+                  <a:tcPr marL="54864" marR="54864" marT="54864" marB="54864" anchor="ctr">
+                    <a:lnL w="9525" cap="flat" cmpd="sng" algn="ctr">
+                      <a:solidFill>
+                        <a:srgbClr val="C9D3DB"/>
+                      </a:solidFill>
+                      <a:prstDash val="solid"/>
+                      <a:round/>
+                      <a:headEnd type="none" w="med" len="med"/>
+                      <a:tailEnd type="none" w="med" len="med"/>
+                    </a:lnL>
+                    <a:lnR w="9525" cap="flat" cmpd="sng" algn="ctr">
+                      <a:solidFill>
+                        <a:srgbClr val="C9D3DB"/>
+                      </a:solidFill>
+                      <a:prstDash val="solid"/>
+                      <a:round/>
+                      <a:headEnd type="none" w="med" len="med"/>
+                      <a:tailEnd type="none" w="med" len="med"/>
+                    </a:lnR>
+                    <a:lnT w="9525" cap="flat" cmpd="sng" algn="ctr">
+                      <a:solidFill>
+                        <a:srgbClr val="C9D3DB"/>
+                      </a:solidFill>
+                      <a:prstDash val="solid"/>
+                      <a:round/>
+                      <a:headEnd type="none" w="med" len="med"/>
+                      <a:tailEnd type="none" w="med" len="med"/>
+                    </a:lnT>
+                    <a:lnB w="9525" cap="flat" cmpd="sng" algn="ctr">
+                      <a:solidFill>
+                        <a:srgbClr val="C9D3DB"/>
+                      </a:solidFill>
+                      <a:prstDash val="solid"/>
+                      <a:round/>
+                      <a:headEnd type="none" w="med" len="med"/>
+                      <a:tailEnd type="none" w="med" len="med"/>
+                    </a:lnB>
+                  </a:tcPr>
+                </a:tc>
+                <a:tc>
+                  <a:txBody>
+                    <a:bodyPr/>
+                    <a:lstStyle/>
+                    <a:p>
+                      <a:pPr algn="r" indent="0" marL="0">
+                        <a:buNone/>
+                      </a:pPr>
+                      <a:r>
+                        <a:rPr lang="en-US" sz="1200" dirty="0">
+                          <a:solidFill>
+                            <a:srgbClr val="2B2B2B"/>
+                          </a:solidFill>
+                          <a:latin typeface="Meiryo" pitchFamily="34" charset="0"/>
+                          <a:ea typeface="Meiryo" pitchFamily="34" charset="-122"/>
+                          <a:cs typeface="Meiryo" pitchFamily="34" charset="-120"/>
+                        </a:rPr>
+                        <a:t>145,869,995</a:t>
+                      </a:r>
+                      <a:endParaRPr lang="en-US" sz="1200" dirty="0">
+                        <a:latin typeface="Meiryo" charset="0"/>
+                        <a:ea typeface="Meiryo" charset="0"/>
+                        <a:cs typeface="Meiryo" charset="0"/>
+                      </a:endParaRPr>
+                    </a:p>
+                  </a:txBody>
+                  <a:tcPr marL="54864" marR="54864" marT="54864" marB="54864" anchor="ctr">
+                    <a:lnL w="9525" cap="flat" cmpd="sng" algn="ctr">
+                      <a:solidFill>
+                        <a:srgbClr val="C9D3DB"/>
+                      </a:solidFill>
+                      <a:prstDash val="solid"/>
+                      <a:round/>
+                      <a:headEnd type="none" w="med" len="med"/>
+                      <a:tailEnd type="none" w="med" len="med"/>
+                    </a:lnL>
+                    <a:lnR w="9525" cap="flat" cmpd="sng" algn="ctr">
+                      <a:solidFill>
+                        <a:srgbClr val="C9D3DB"/>
+                      </a:solidFill>
+                      <a:prstDash val="solid"/>
+                      <a:round/>
+                      <a:headEnd type="none" w="med" len="med"/>
+                      <a:tailEnd type="none" w="med" len="med"/>
+                    </a:lnR>
+                    <a:lnT w="9525" cap="flat" cmpd="sng" algn="ctr">
+                      <a:solidFill>
+                        <a:srgbClr val="C9D3DB"/>
+                      </a:solidFill>
+                      <a:prstDash val="solid"/>
+                      <a:round/>
+                      <a:headEnd type="none" w="med" len="med"/>
+                      <a:tailEnd type="none" w="med" len="med"/>
+                    </a:lnT>
+                    <a:lnB w="9525" cap="flat" cmpd="sng" algn="ctr">
+                      <a:solidFill>
+                        <a:srgbClr val="C9D3DB"/>
+                      </a:solidFill>
+                      <a:prstDash val="solid"/>
+                      <a:round/>
+                      <a:headEnd type="none" w="med" len="med"/>
+                      <a:tailEnd type="none" w="med" len="med"/>
+                    </a:lnB>
+                  </a:tcPr>
+                </a:tc>
+                <a:tc>
+                  <a:txBody>
+                    <a:bodyPr/>
+                    <a:lstStyle/>
+                    <a:p>
+                      <a:pPr algn="r" indent="0" marL="0">
+                        <a:buNone/>
+                      </a:pPr>
+                      <a:r>
+                        <a:rPr lang="en-US" sz="1200" dirty="0">
+                          <a:solidFill>
+                            <a:srgbClr val="2B2B2B"/>
+                          </a:solidFill>
+                          <a:latin typeface="Meiryo" pitchFamily="34" charset="0"/>
+                          <a:ea typeface="Meiryo" pitchFamily="34" charset="-122"/>
+                          <a:cs typeface="Meiryo" pitchFamily="34" charset="-120"/>
+                        </a:rPr>
+                        <a:t>149,092,281</a:t>
+                      </a:r>
+                      <a:endParaRPr lang="en-US" sz="1200" dirty="0">
+                        <a:latin typeface="Meiryo" charset="0"/>
+                        <a:ea typeface="Meiryo" charset="0"/>
+                        <a:cs typeface="Meiryo" charset="0"/>
+                      </a:endParaRPr>
+                    </a:p>
+                  </a:txBody>
+                  <a:tcPr marL="54864" marR="54864" marT="54864" marB="54864" anchor="ctr">
+                    <a:lnL w="9525" cap="flat" cmpd="sng" algn="ctr">
+                      <a:solidFill>
+                        <a:srgbClr val="C9D3DB"/>
+                      </a:solidFill>
+                      <a:prstDash val="solid"/>
+                      <a:round/>
+                      <a:headEnd type="none" w="med" len="med"/>
+                      <a:tailEnd type="none" w="med" len="med"/>
+                    </a:lnL>
+                    <a:lnR w="9525" cap="flat" cmpd="sng" algn="ctr">
+                      <a:solidFill>
+                        <a:srgbClr val="C9D3DB"/>
+                      </a:solidFill>
+                      <a:prstDash val="solid"/>
+                      <a:round/>
+                      <a:headEnd type="none" w="med" len="med"/>
+                      <a:tailEnd type="none" w="med" len="med"/>
+                    </a:lnR>
+                    <a:lnT w="9525" cap="flat" cmpd="sng" algn="ctr">
+                      <a:solidFill>
+                        <a:srgbClr val="C9D3DB"/>
+                      </a:solidFill>
+                      <a:prstDash val="solid"/>
+                      <a:round/>
+                      <a:headEnd type="none" w="med" len="med"/>
+                      <a:tailEnd type="none" w="med" len="med"/>
+                    </a:lnT>
+                    <a:lnB w="9525" cap="flat" cmpd="sng" algn="ctr">
+                      <a:solidFill>
+                        <a:srgbClr val="C9D3DB"/>
+                      </a:solidFill>
+                      <a:prstDash val="solid"/>
+                      <a:round/>
+                      <a:headEnd type="none" w="med" len="med"/>
+                      <a:tailEnd type="none" w="med" len="med"/>
+                    </a:lnB>
+                  </a:tcPr>
+                </a:tc>
+                <a:tc>
+                  <a:txBody>
+                    <a:bodyPr/>
+                    <a:lstStyle/>
+                    <a:p>
+                      <a:pPr algn="r" indent="0" marL="0">
+                        <a:buNone/>
+                      </a:pPr>
+                      <a:r>
+                        <a:rPr lang="en-US" sz="1200" b="1" dirty="0">
+                          <a:solidFill>
+                            <a:srgbClr val="2B2B2B"/>
+                          </a:solidFill>
+                          <a:latin typeface="Meiryo" pitchFamily="34" charset="0"/>
+                          <a:ea typeface="Meiryo" pitchFamily="34" charset="-122"/>
+                          <a:cs typeface="Meiryo" pitchFamily="34" charset="-120"/>
+                        </a:rPr>
+                        <a:t>1,858,432</a:t>
+                      </a:r>
+                      <a:endParaRPr lang="en-US" sz="1200" dirty="0">
+                        <a:latin typeface="Meiryo" charset="0"/>
+                        <a:ea typeface="Meiryo" charset="0"/>
+                        <a:cs typeface="Meiryo" charset="0"/>
+                      </a:endParaRPr>
+                    </a:p>
+                  </a:txBody>
+                  <a:tcPr marL="54864" marR="54864" marT="54864" marB="54864" anchor="ctr">
                     <a:lnL w="9525" cap="flat" cmpd="sng" algn="ctr">
                       <a:solidFill>
                         <a:srgbClr val="C9D3DB"/>
@@ -3966,6 +6628,664 @@
                     </a:lnB>
                     <a:solidFill>
                       <a:srgbClr val="FBEBD6"/>
+                    </a:solidFill>
+                  </a:tcPr>
+                </a:tc>
+              </a:tr>
+              <a:tr h="301752">
+                <a:tc>
+                  <a:txBody>
+                    <a:bodyPr/>
+                    <a:lstStyle/>
+                    <a:p>
+                      <a:pPr indent="0" marL="0">
+                        <a:buNone/>
+                      </a:pPr>
+                      <a:r>
+                        <a:rPr lang="en-US" sz="1200" b="1" dirty="0">
+                          <a:solidFill>
+                            <a:srgbClr val="1F3A4D"/>
+                          </a:solidFill>
+                          <a:latin typeface="Meiryo" pitchFamily="34" charset="0"/>
+                          <a:ea typeface="Meiryo" pitchFamily="34" charset="-122"/>
+                          <a:cs typeface="Meiryo" pitchFamily="34" charset="-120"/>
+                        </a:rPr>
+                        <a:t>消費税相当額</a:t>
+                      </a:r>
+                      <a:endParaRPr lang="en-US" sz="1200" dirty="0">
+                        <a:latin typeface="Meiryo" charset="0"/>
+                        <a:ea typeface="Meiryo" charset="0"/>
+                        <a:cs typeface="Meiryo" charset="0"/>
+                      </a:endParaRPr>
+                    </a:p>
+                  </a:txBody>
+                  <a:tcPr marL="54864" marR="54864" marT="54864" marB="54864" anchor="ctr">
+                    <a:lnL w="9525" cap="flat" cmpd="sng" algn="ctr">
+                      <a:solidFill>
+                        <a:srgbClr val="C9D3DB"/>
+                      </a:solidFill>
+                      <a:prstDash val="solid"/>
+                      <a:round/>
+                      <a:headEnd type="none" w="med" len="med"/>
+                      <a:tailEnd type="none" w="med" len="med"/>
+                    </a:lnL>
+                    <a:lnR w="9525" cap="flat" cmpd="sng" algn="ctr">
+                      <a:solidFill>
+                        <a:srgbClr val="C9D3DB"/>
+                      </a:solidFill>
+                      <a:prstDash val="solid"/>
+                      <a:round/>
+                      <a:headEnd type="none" w="med" len="med"/>
+                      <a:tailEnd type="none" w="med" len="med"/>
+                    </a:lnR>
+                    <a:lnT w="9525" cap="flat" cmpd="sng" algn="ctr">
+                      <a:solidFill>
+                        <a:srgbClr val="C9D3DB"/>
+                      </a:solidFill>
+                      <a:prstDash val="solid"/>
+                      <a:round/>
+                      <a:headEnd type="none" w="med" len="med"/>
+                      <a:tailEnd type="none" w="med" len="med"/>
+                    </a:lnT>
+                    <a:lnB w="9525" cap="flat" cmpd="sng" algn="ctr">
+                      <a:solidFill>
+                        <a:srgbClr val="C9D3DB"/>
+                      </a:solidFill>
+                      <a:prstDash val="solid"/>
+                      <a:round/>
+                      <a:headEnd type="none" w="med" len="med"/>
+                      <a:tailEnd type="none" w="med" len="med"/>
+                    </a:lnB>
+                    <a:solidFill>
+                      <a:srgbClr val="EEF2F5"/>
+                    </a:solidFill>
+                  </a:tcPr>
+                </a:tc>
+                <a:tc>
+                  <a:txBody>
+                    <a:bodyPr/>
+                    <a:lstStyle/>
+                    <a:p>
+                      <a:pPr algn="r" indent="0" marL="0">
+                        <a:buNone/>
+                      </a:pPr>
+                      <a:r>
+                        <a:rPr lang="en-US" sz="1200" dirty="0">
+                          <a:solidFill>
+                            <a:srgbClr val="2B2B2B"/>
+                          </a:solidFill>
+                          <a:latin typeface="Meiryo" pitchFamily="34" charset="0"/>
+                          <a:ea typeface="Meiryo" pitchFamily="34" charset="-122"/>
+                          <a:cs typeface="Meiryo" pitchFamily="34" charset="-120"/>
+                        </a:rPr>
+                        <a:t>22,739,148</a:t>
+                      </a:r>
+                      <a:endParaRPr lang="en-US" sz="1200" dirty="0">
+                        <a:latin typeface="Meiryo" charset="0"/>
+                        <a:ea typeface="Meiryo" charset="0"/>
+                        <a:cs typeface="Meiryo" charset="0"/>
+                      </a:endParaRPr>
+                    </a:p>
+                  </a:txBody>
+                  <a:tcPr marL="54864" marR="54864" marT="54864" marB="54864" anchor="ctr">
+                    <a:lnL w="9525" cap="flat" cmpd="sng" algn="ctr">
+                      <a:solidFill>
+                        <a:srgbClr val="C9D3DB"/>
+                      </a:solidFill>
+                      <a:prstDash val="solid"/>
+                      <a:round/>
+                      <a:headEnd type="none" w="med" len="med"/>
+                      <a:tailEnd type="none" w="med" len="med"/>
+                    </a:lnL>
+                    <a:lnR w="9525" cap="flat" cmpd="sng" algn="ctr">
+                      <a:solidFill>
+                        <a:srgbClr val="C9D3DB"/>
+                      </a:solidFill>
+                      <a:prstDash val="solid"/>
+                      <a:round/>
+                      <a:headEnd type="none" w="med" len="med"/>
+                      <a:tailEnd type="none" w="med" len="med"/>
+                    </a:lnR>
+                    <a:lnT w="9525" cap="flat" cmpd="sng" algn="ctr">
+                      <a:solidFill>
+                        <a:srgbClr val="C9D3DB"/>
+                      </a:solidFill>
+                      <a:prstDash val="solid"/>
+                      <a:round/>
+                      <a:headEnd type="none" w="med" len="med"/>
+                      <a:tailEnd type="none" w="med" len="med"/>
+                    </a:lnT>
+                    <a:lnB w="9525" cap="flat" cmpd="sng" algn="ctr">
+                      <a:solidFill>
+                        <a:srgbClr val="C9D3DB"/>
+                      </a:solidFill>
+                      <a:prstDash val="solid"/>
+                      <a:round/>
+                      <a:headEnd type="none" w="med" len="med"/>
+                      <a:tailEnd type="none" w="med" len="med"/>
+                    </a:lnB>
+                  </a:tcPr>
+                </a:tc>
+                <a:tc>
+                  <a:txBody>
+                    <a:bodyPr/>
+                    <a:lstStyle/>
+                    <a:p>
+                      <a:pPr algn="ctr" indent="0" marL="0">
+                        <a:buNone/>
+                      </a:pPr>
+                      <a:r>
+                        <a:rPr lang="en-US" sz="1200" dirty="0">
+                          <a:solidFill>
+                            <a:srgbClr val="8A97A3"/>
+                          </a:solidFill>
+                          <a:latin typeface="Meiryo" pitchFamily="34" charset="0"/>
+                          <a:ea typeface="Meiryo" pitchFamily="34" charset="-122"/>
+                          <a:cs typeface="Meiryo" pitchFamily="34" charset="-120"/>
+                        </a:rPr>
+                        <a:t>-</a:t>
+                      </a:r>
+                      <a:endParaRPr lang="en-US" sz="1200" dirty="0">
+                        <a:latin typeface="Meiryo" charset="0"/>
+                        <a:ea typeface="Meiryo" charset="0"/>
+                        <a:cs typeface="Meiryo" charset="0"/>
+                      </a:endParaRPr>
+                    </a:p>
+                  </a:txBody>
+                  <a:tcPr marL="54864" marR="54864" marT="54864" marB="54864" anchor="ctr">
+                    <a:lnL w="9525" cap="flat" cmpd="sng" algn="ctr">
+                      <a:solidFill>
+                        <a:srgbClr val="C9D3DB"/>
+                      </a:solidFill>
+                      <a:prstDash val="solid"/>
+                      <a:round/>
+                      <a:headEnd type="none" w="med" len="med"/>
+                      <a:tailEnd type="none" w="med" len="med"/>
+                    </a:lnL>
+                    <a:lnR w="9525" cap="flat" cmpd="sng" algn="ctr">
+                      <a:solidFill>
+                        <a:srgbClr val="C9D3DB"/>
+                      </a:solidFill>
+                      <a:prstDash val="solid"/>
+                      <a:round/>
+                      <a:headEnd type="none" w="med" len="med"/>
+                      <a:tailEnd type="none" w="med" len="med"/>
+                    </a:lnR>
+                    <a:lnT w="9525" cap="flat" cmpd="sng" algn="ctr">
+                      <a:solidFill>
+                        <a:srgbClr val="C9D3DB"/>
+                      </a:solidFill>
+                      <a:prstDash val="solid"/>
+                      <a:round/>
+                      <a:headEnd type="none" w="med" len="med"/>
+                      <a:tailEnd type="none" w="med" len="med"/>
+                    </a:lnT>
+                    <a:lnB w="9525" cap="flat" cmpd="sng" algn="ctr">
+                      <a:solidFill>
+                        <a:srgbClr val="C9D3DB"/>
+                      </a:solidFill>
+                      <a:prstDash val="solid"/>
+                      <a:round/>
+                      <a:headEnd type="none" w="med" len="med"/>
+                      <a:tailEnd type="none" w="med" len="med"/>
+                    </a:lnB>
+                  </a:tcPr>
+                </a:tc>
+                <a:tc>
+                  <a:txBody>
+                    <a:bodyPr/>
+                    <a:lstStyle/>
+                    <a:p>
+                      <a:pPr algn="ctr" indent="0" marL="0">
+                        <a:buNone/>
+                      </a:pPr>
+                      <a:r>
+                        <a:rPr lang="en-US" sz="1200" dirty="0">
+                          <a:solidFill>
+                            <a:srgbClr val="8A97A3"/>
+                          </a:solidFill>
+                          <a:latin typeface="Meiryo" pitchFamily="34" charset="0"/>
+                          <a:ea typeface="Meiryo" pitchFamily="34" charset="-122"/>
+                          <a:cs typeface="Meiryo" pitchFamily="34" charset="-120"/>
+                        </a:rPr>
+                        <a:t>-</a:t>
+                      </a:r>
+                      <a:endParaRPr lang="en-US" sz="1200" dirty="0">
+                        <a:latin typeface="Meiryo" charset="0"/>
+                        <a:ea typeface="Meiryo" charset="0"/>
+                        <a:cs typeface="Meiryo" charset="0"/>
+                      </a:endParaRPr>
+                    </a:p>
+                  </a:txBody>
+                  <a:tcPr marL="54864" marR="54864" marT="54864" marB="54864" anchor="ctr">
+                    <a:lnL w="9525" cap="flat" cmpd="sng" algn="ctr">
+                      <a:solidFill>
+                        <a:srgbClr val="C9D3DB"/>
+                      </a:solidFill>
+                      <a:prstDash val="solid"/>
+                      <a:round/>
+                      <a:headEnd type="none" w="med" len="med"/>
+                      <a:tailEnd type="none" w="med" len="med"/>
+                    </a:lnL>
+                    <a:lnR w="9525" cap="flat" cmpd="sng" algn="ctr">
+                      <a:solidFill>
+                        <a:srgbClr val="C9D3DB"/>
+                      </a:solidFill>
+                      <a:prstDash val="solid"/>
+                      <a:round/>
+                      <a:headEnd type="none" w="med" len="med"/>
+                      <a:tailEnd type="none" w="med" len="med"/>
+                    </a:lnR>
+                    <a:lnT w="9525" cap="flat" cmpd="sng" algn="ctr">
+                      <a:solidFill>
+                        <a:srgbClr val="C9D3DB"/>
+                      </a:solidFill>
+                      <a:prstDash val="solid"/>
+                      <a:round/>
+                      <a:headEnd type="none" w="med" len="med"/>
+                      <a:tailEnd type="none" w="med" len="med"/>
+                    </a:lnT>
+                    <a:lnB w="9525" cap="flat" cmpd="sng" algn="ctr">
+                      <a:solidFill>
+                        <a:srgbClr val="C9D3DB"/>
+                      </a:solidFill>
+                      <a:prstDash val="solid"/>
+                      <a:round/>
+                      <a:headEnd type="none" w="med" len="med"/>
+                      <a:tailEnd type="none" w="med" len="med"/>
+                    </a:lnB>
+                  </a:tcPr>
+                </a:tc>
+                <a:tc>
+                  <a:txBody>
+                    <a:bodyPr/>
+                    <a:lstStyle/>
+                    <a:p>
+                      <a:pPr algn="ctr" indent="0" marL="0">
+                        <a:buNone/>
+                      </a:pPr>
+                      <a:r>
+                        <a:rPr lang="en-US" sz="1200" dirty="0">
+                          <a:solidFill>
+                            <a:srgbClr val="8A97A3"/>
+                          </a:solidFill>
+                          <a:latin typeface="Meiryo" pitchFamily="34" charset="0"/>
+                          <a:ea typeface="Meiryo" pitchFamily="34" charset="-122"/>
+                          <a:cs typeface="Meiryo" pitchFamily="34" charset="-120"/>
+                        </a:rPr>
+                        <a:t>-</a:t>
+                      </a:r>
+                      <a:endParaRPr lang="en-US" sz="1200" dirty="0">
+                        <a:latin typeface="Meiryo" charset="0"/>
+                        <a:ea typeface="Meiryo" charset="0"/>
+                        <a:cs typeface="Meiryo" charset="0"/>
+                      </a:endParaRPr>
+                    </a:p>
+                  </a:txBody>
+                  <a:tcPr marL="54864" marR="54864" marT="54864" marB="54864" anchor="ctr">
+                    <a:lnL w="9525" cap="flat" cmpd="sng" algn="ctr">
+                      <a:solidFill>
+                        <a:srgbClr val="C9D3DB"/>
+                      </a:solidFill>
+                      <a:prstDash val="solid"/>
+                      <a:round/>
+                      <a:headEnd type="none" w="med" len="med"/>
+                      <a:tailEnd type="none" w="med" len="med"/>
+                    </a:lnL>
+                    <a:lnR w="9525" cap="flat" cmpd="sng" algn="ctr">
+                      <a:solidFill>
+                        <a:srgbClr val="C9D3DB"/>
+                      </a:solidFill>
+                      <a:prstDash val="solid"/>
+                      <a:round/>
+                      <a:headEnd type="none" w="med" len="med"/>
+                      <a:tailEnd type="none" w="med" len="med"/>
+                    </a:lnR>
+                    <a:lnT w="9525" cap="flat" cmpd="sng" algn="ctr">
+                      <a:solidFill>
+                        <a:srgbClr val="C9D3DB"/>
+                      </a:solidFill>
+                      <a:prstDash val="solid"/>
+                      <a:round/>
+                      <a:headEnd type="none" w="med" len="med"/>
+                      <a:tailEnd type="none" w="med" len="med"/>
+                    </a:lnT>
+                    <a:lnB w="9525" cap="flat" cmpd="sng" algn="ctr">
+                      <a:solidFill>
+                        <a:srgbClr val="C9D3DB"/>
+                      </a:solidFill>
+                      <a:prstDash val="solid"/>
+                      <a:round/>
+                      <a:headEnd type="none" w="med" len="med"/>
+                      <a:tailEnd type="none" w="med" len="med"/>
+                    </a:lnB>
+                  </a:tcPr>
+                </a:tc>
+                <a:tc>
+                  <a:txBody>
+                    <a:bodyPr/>
+                    <a:lstStyle/>
+                    <a:p>
+                      <a:pPr algn="ctr" indent="0" marL="0">
+                        <a:buNone/>
+                      </a:pPr>
+                      <a:r>
+                        <a:rPr lang="en-US" sz="1200" dirty="0">
+                          <a:solidFill>
+                            <a:srgbClr val="8A97A3"/>
+                          </a:solidFill>
+                          <a:latin typeface="Meiryo" pitchFamily="34" charset="0"/>
+                          <a:ea typeface="Meiryo" pitchFamily="34" charset="-122"/>
+                          <a:cs typeface="Meiryo" pitchFamily="34" charset="-120"/>
+                        </a:rPr>
+                        <a:t>-</a:t>
+                      </a:r>
+                      <a:endParaRPr lang="en-US" sz="1200" dirty="0">
+                        <a:latin typeface="Meiryo" charset="0"/>
+                        <a:ea typeface="Meiryo" charset="0"/>
+                        <a:cs typeface="Meiryo" charset="0"/>
+                      </a:endParaRPr>
+                    </a:p>
+                  </a:txBody>
+                  <a:tcPr marL="54864" marR="54864" marT="54864" marB="54864" anchor="ctr">
+                    <a:lnL w="9525" cap="flat" cmpd="sng" algn="ctr">
+                      <a:solidFill>
+                        <a:srgbClr val="C9D3DB"/>
+                      </a:solidFill>
+                      <a:prstDash val="solid"/>
+                      <a:round/>
+                      <a:headEnd type="none" w="med" len="med"/>
+                      <a:tailEnd type="none" w="med" len="med"/>
+                    </a:lnL>
+                    <a:lnR w="9525" cap="flat" cmpd="sng" algn="ctr">
+                      <a:solidFill>
+                        <a:srgbClr val="C9D3DB"/>
+                      </a:solidFill>
+                      <a:prstDash val="solid"/>
+                      <a:round/>
+                      <a:headEnd type="none" w="med" len="med"/>
+                      <a:tailEnd type="none" w="med" len="med"/>
+                    </a:lnR>
+                    <a:lnT w="9525" cap="flat" cmpd="sng" algn="ctr">
+                      <a:solidFill>
+                        <a:srgbClr val="C9D3DB"/>
+                      </a:solidFill>
+                      <a:prstDash val="solid"/>
+                      <a:round/>
+                      <a:headEnd type="none" w="med" len="med"/>
+                      <a:tailEnd type="none" w="med" len="med"/>
+                    </a:lnT>
+                    <a:lnB w="9525" cap="flat" cmpd="sng" algn="ctr">
+                      <a:solidFill>
+                        <a:srgbClr val="C9D3DB"/>
+                      </a:solidFill>
+                      <a:prstDash val="solid"/>
+                      <a:round/>
+                      <a:headEnd type="none" w="med" len="med"/>
+                      <a:tailEnd type="none" w="med" len="med"/>
+                    </a:lnB>
+                  </a:tcPr>
+                </a:tc>
+              </a:tr>
+              <a:tr h="246888">
+                <a:tc>
+                  <a:txBody>
+                    <a:bodyPr/>
+                    <a:lstStyle/>
+                    <a:p>
+                      <a:pPr indent="0" marL="0">
+                        <a:buNone/>
+                      </a:pPr>
+                      <a:endParaRPr lang="en-US" sz="1200" dirty="0">
+                        <a:latin typeface="Meiryo" charset="0"/>
+                        <a:ea typeface="Meiryo" charset="0"/>
+                        <a:cs typeface="Meiryo" charset="0"/>
+                      </a:endParaRPr>
+                    </a:p>
+                  </a:txBody>
+                  <a:tcPr marL="54864" marR="54864" marT="54864" marB="54864" anchor="ctr">
+                    <a:lnL w="9525" cap="flat" cmpd="sng" algn="ctr">
+                      <a:solidFill>
+                        <a:srgbClr val="C9D3DB"/>
+                      </a:solidFill>
+                      <a:prstDash val="solid"/>
+                      <a:round/>
+                      <a:headEnd type="none" w="med" len="med"/>
+                      <a:tailEnd type="none" w="med" len="med"/>
+                    </a:lnL>
+                    <a:lnR w="9525" cap="flat" cmpd="sng" algn="ctr">
+                      <a:solidFill>
+                        <a:srgbClr val="C9D3DB"/>
+                      </a:solidFill>
+                      <a:prstDash val="solid"/>
+                      <a:round/>
+                      <a:headEnd type="none" w="med" len="med"/>
+                      <a:tailEnd type="none" w="med" len="med"/>
+                    </a:lnR>
+                    <a:lnT w="9525" cap="flat" cmpd="sng" algn="ctr">
+                      <a:solidFill>
+                        <a:srgbClr val="C9D3DB"/>
+                      </a:solidFill>
+                      <a:prstDash val="solid"/>
+                      <a:round/>
+                      <a:headEnd type="none" w="med" len="med"/>
+                      <a:tailEnd type="none" w="med" len="med"/>
+                    </a:lnT>
+                    <a:lnB w="9525" cap="flat" cmpd="sng" algn="ctr">
+                      <a:solidFill>
+                        <a:srgbClr val="C9D3DB"/>
+                      </a:solidFill>
+                      <a:prstDash val="solid"/>
+                      <a:round/>
+                      <a:headEnd type="none" w="med" len="med"/>
+                      <a:tailEnd type="none" w="med" len="med"/>
+                    </a:lnB>
+                    <a:solidFill>
+                      <a:srgbClr val="F7F9FA"/>
+                    </a:solidFill>
+                  </a:tcPr>
+                </a:tc>
+                <a:tc>
+                  <a:txBody>
+                    <a:bodyPr/>
+                    <a:lstStyle/>
+                    <a:p>
+                      <a:pPr algn="ctr" indent="0" marL="0">
+                        <a:buNone/>
+                      </a:pPr>
+                      <a:r>
+                        <a:rPr lang="en-US" sz="1100" dirty="0">
+                          <a:solidFill>
+                            <a:srgbClr val="2E5470"/>
+                          </a:solidFill>
+                          <a:latin typeface="Meiryo" pitchFamily="34" charset="0"/>
+                          <a:ea typeface="Meiryo" pitchFamily="34" charset="-122"/>
+                          <a:cs typeface="Meiryo" pitchFamily="34" charset="-120"/>
+                        </a:rPr>
+                        <a:t>⑨</a:t>
+                      </a:r>
+                      <a:endParaRPr lang="en-US" sz="1100" dirty="0">
+                        <a:latin typeface="Meiryo" charset="0"/>
+                        <a:ea typeface="Meiryo" charset="0"/>
+                        <a:cs typeface="Meiryo" charset="0"/>
+                      </a:endParaRPr>
+                    </a:p>
+                  </a:txBody>
+                  <a:tcPr marL="54864" marR="54864" marT="54864" marB="54864" anchor="ctr">
+                    <a:lnL w="9525" cap="flat" cmpd="sng" algn="ctr">
+                      <a:solidFill>
+                        <a:srgbClr val="C9D3DB"/>
+                      </a:solidFill>
+                      <a:prstDash val="solid"/>
+                      <a:round/>
+                      <a:headEnd type="none" w="med" len="med"/>
+                      <a:tailEnd type="none" w="med" len="med"/>
+                    </a:lnL>
+                    <a:lnR w="9525" cap="flat" cmpd="sng" algn="ctr">
+                      <a:solidFill>
+                        <a:srgbClr val="C9D3DB"/>
+                      </a:solidFill>
+                      <a:prstDash val="solid"/>
+                      <a:round/>
+                      <a:headEnd type="none" w="med" len="med"/>
+                      <a:tailEnd type="none" w="med" len="med"/>
+                    </a:lnR>
+                    <a:lnT w="9525" cap="flat" cmpd="sng" algn="ctr">
+                      <a:solidFill>
+                        <a:srgbClr val="C9D3DB"/>
+                      </a:solidFill>
+                      <a:prstDash val="solid"/>
+                      <a:round/>
+                      <a:headEnd type="none" w="med" len="med"/>
+                      <a:tailEnd type="none" w="med" len="med"/>
+                    </a:lnT>
+                    <a:lnB w="9525" cap="flat" cmpd="sng" algn="ctr">
+                      <a:solidFill>
+                        <a:srgbClr val="C9D3DB"/>
+                      </a:solidFill>
+                      <a:prstDash val="solid"/>
+                      <a:round/>
+                      <a:headEnd type="none" w="med" len="med"/>
+                      <a:tailEnd type="none" w="med" len="med"/>
+                    </a:lnB>
+                    <a:solidFill>
+                      <a:srgbClr val="F7F9FA"/>
+                    </a:solidFill>
+                  </a:tcPr>
+                </a:tc>
+                <a:tc>
+                  <a:txBody>
+                    <a:bodyPr/>
+                    <a:lstStyle/>
+                    <a:p>
+                      <a:pPr algn="ctr" indent="0" marL="0">
+                        <a:buNone/>
+                      </a:pPr>
+                      <a:r>
+                        <a:rPr lang="en-US" sz="1100" dirty="0">
+                          <a:solidFill>
+                            <a:srgbClr val="2E5470"/>
+                          </a:solidFill>
+                          <a:latin typeface="Meiryo" pitchFamily="34" charset="0"/>
+                          <a:ea typeface="Meiryo" pitchFamily="34" charset="-122"/>
+                          <a:cs typeface="Meiryo" pitchFamily="34" charset="-120"/>
+                        </a:rPr>
+                        <a:t>⑩</a:t>
+                      </a:r>
+                      <a:endParaRPr lang="en-US" sz="1100" dirty="0">
+                        <a:latin typeface="Meiryo" charset="0"/>
+                        <a:ea typeface="Meiryo" charset="0"/>
+                        <a:cs typeface="Meiryo" charset="0"/>
+                      </a:endParaRPr>
+                    </a:p>
+                  </a:txBody>
+                  <a:tcPr marL="54864" marR="54864" marT="54864" marB="54864" anchor="ctr">
+                    <a:lnL w="9525" cap="flat" cmpd="sng" algn="ctr">
+                      <a:solidFill>
+                        <a:srgbClr val="C9D3DB"/>
+                      </a:solidFill>
+                      <a:prstDash val="solid"/>
+                      <a:round/>
+                      <a:headEnd type="none" w="med" len="med"/>
+                      <a:tailEnd type="none" w="med" len="med"/>
+                    </a:lnL>
+                    <a:lnR w="9525" cap="flat" cmpd="sng" algn="ctr">
+                      <a:solidFill>
+                        <a:srgbClr val="C9D3DB"/>
+                      </a:solidFill>
+                      <a:prstDash val="solid"/>
+                      <a:round/>
+                      <a:headEnd type="none" w="med" len="med"/>
+                      <a:tailEnd type="none" w="med" len="med"/>
+                    </a:lnR>
+                    <a:lnT w="9525" cap="flat" cmpd="sng" algn="ctr">
+                      <a:solidFill>
+                        <a:srgbClr val="C9D3DB"/>
+                      </a:solidFill>
+                      <a:prstDash val="solid"/>
+                      <a:round/>
+                      <a:headEnd type="none" w="med" len="med"/>
+                      <a:tailEnd type="none" w="med" len="med"/>
+                    </a:lnT>
+                    <a:lnB w="9525" cap="flat" cmpd="sng" algn="ctr">
+                      <a:solidFill>
+                        <a:srgbClr val="C9D3DB"/>
+                      </a:solidFill>
+                      <a:prstDash val="solid"/>
+                      <a:round/>
+                      <a:headEnd type="none" w="med" len="med"/>
+                      <a:tailEnd type="none" w="med" len="med"/>
+                    </a:lnB>
+                    <a:solidFill>
+                      <a:srgbClr val="F7F9FA"/>
+                    </a:solidFill>
+                  </a:tcPr>
+                </a:tc>
+                <a:tc>
+                  <a:txBody>
+                    <a:bodyPr/>
+                    <a:lstStyle/>
+                    <a:p>
+                      <a:pPr algn="ctr" indent="0" marL="0">
+                        <a:buNone/>
+                      </a:pPr>
+                      <a:r>
+                        <a:rPr lang="en-US" sz="1100" dirty="0">
+                          <a:solidFill>
+                            <a:srgbClr val="2E5470"/>
+                          </a:solidFill>
+                          <a:latin typeface="Meiryo" pitchFamily="34" charset="0"/>
+                          <a:ea typeface="Meiryo" pitchFamily="34" charset="-122"/>
+                          <a:cs typeface="Meiryo" pitchFamily="34" charset="-120"/>
+                        </a:rPr>
+                        <a:t>P1''=⑨-⑩</a:t>
+                      </a:r>
+                      <a:endParaRPr lang="en-US" sz="1100" dirty="0">
+                        <a:latin typeface="Meiryo" charset="0"/>
+                        <a:ea typeface="Meiryo" charset="0"/>
+                        <a:cs typeface="Meiryo" charset="0"/>
+                      </a:endParaRPr>
+                    </a:p>
+                  </a:txBody>
+                  <a:tcPr marL="54864" marR="54864" marT="54864" marB="54864" anchor="ctr">
+                    <a:lnL w="9525" cap="flat" cmpd="sng" algn="ctr">
+                      <a:solidFill>
+                        <a:srgbClr val="C9D3DB"/>
+                      </a:solidFill>
+                      <a:prstDash val="solid"/>
+                      <a:round/>
+                      <a:headEnd type="none" w="med" len="med"/>
+                      <a:tailEnd type="none" w="med" len="med"/>
+                    </a:lnL>
+                    <a:lnR w="9525" cap="flat" cmpd="sng" algn="ctr">
+                      <a:solidFill>
+                        <a:srgbClr val="C9D3DB"/>
+                      </a:solidFill>
+                      <a:prstDash val="solid"/>
+                      <a:round/>
+                      <a:headEnd type="none" w="med" len="med"/>
+                      <a:tailEnd type="none" w="med" len="med"/>
+                    </a:lnR>
+                    <a:lnT w="9525" cap="flat" cmpd="sng" algn="ctr">
+                      <a:solidFill>
+                        <a:srgbClr val="C9D3DB"/>
+                      </a:solidFill>
+                      <a:prstDash val="solid"/>
+                      <a:round/>
+                      <a:headEnd type="none" w="med" len="med"/>
+                      <a:tailEnd type="none" w="med" len="med"/>
+                    </a:lnT>
+                    <a:lnB w="9525" cap="flat" cmpd="sng" algn="ctr">
+                      <a:solidFill>
+                        <a:srgbClr val="C9D3DB"/>
+                      </a:solidFill>
+                      <a:prstDash val="solid"/>
+                      <a:round/>
+                      <a:headEnd type="none" w="med" len="med"/>
+                      <a:tailEnd type="none" w="med" len="med"/>
+                    </a:lnB>
+                    <a:solidFill>
+                      <a:srgbClr val="F7F9FA"/>
                     </a:solidFill>
                   </a:tcPr>
                 </a:tc>
@@ -3977,14 +7297,14 @@
                       <a:pPr indent="0" marL="0">
                         <a:buNone/>
                       </a:pPr>
-                      <a:endParaRPr lang="en-US" sz="1400" dirty="0">
+                      <a:endParaRPr lang="en-US" sz="1200" dirty="0">
                         <a:latin typeface="Meiryo" charset="0"/>
                         <a:ea typeface="Meiryo" charset="0"/>
                         <a:cs typeface="Meiryo" charset="0"/>
                       </a:endParaRPr>
                     </a:p>
                   </a:txBody>
-                  <a:tcPr marL="91440" marR="91440" marT="45720" marB="45720" anchor="ctr">
+                  <a:tcPr marL="54864" marR="54864" marT="54864" marB="54864" anchor="ctr">
                     <a:lnL w="9525" cap="flat" cmpd="sng" algn="ctr">
                       <a:solidFill>
                         <a:srgbClr val="C9D3DB"/>
@@ -4022,8 +7342,460 @@
                       <a:tailEnd type="none" w="med" len="med"/>
                     </a:lnB>
                     <a:solidFill>
-                      <a:srgbClr val="FBEBD6"/>
+                      <a:srgbClr val="F7F9FA"/>
                     </a:solidFill>
+                  </a:tcPr>
+                </a:tc>
+                <a:tc>
+                  <a:txBody>
+                    <a:bodyPr/>
+                    <a:lstStyle/>
+                    <a:p>
+                      <a:pPr indent="0" marL="0">
+                        <a:buNone/>
+                      </a:pPr>
+                      <a:endParaRPr lang="en-US" sz="1200" dirty="0">
+                        <a:latin typeface="Meiryo" charset="0"/>
+                        <a:ea typeface="Meiryo" charset="0"/>
+                        <a:cs typeface="Meiryo" charset="0"/>
+                      </a:endParaRPr>
+                    </a:p>
+                  </a:txBody>
+                  <a:tcPr marL="54864" marR="54864" marT="54864" marB="54864" anchor="ctr">
+                    <a:lnL w="9525" cap="flat" cmpd="sng" algn="ctr">
+                      <a:solidFill>
+                        <a:srgbClr val="C9D3DB"/>
+                      </a:solidFill>
+                      <a:prstDash val="solid"/>
+                      <a:round/>
+                      <a:headEnd type="none" w="med" len="med"/>
+                      <a:tailEnd type="none" w="med" len="med"/>
+                    </a:lnL>
+                    <a:lnR w="9525" cap="flat" cmpd="sng" algn="ctr">
+                      <a:solidFill>
+                        <a:srgbClr val="C9D3DB"/>
+                      </a:solidFill>
+                      <a:prstDash val="solid"/>
+                      <a:round/>
+                      <a:headEnd type="none" w="med" len="med"/>
+                      <a:tailEnd type="none" w="med" len="med"/>
+                    </a:lnR>
+                    <a:lnT w="9525" cap="flat" cmpd="sng" algn="ctr">
+                      <a:solidFill>
+                        <a:srgbClr val="C9D3DB"/>
+                      </a:solidFill>
+                      <a:prstDash val="solid"/>
+                      <a:round/>
+                      <a:headEnd type="none" w="med" len="med"/>
+                      <a:tailEnd type="none" w="med" len="med"/>
+                    </a:lnT>
+                    <a:lnB w="9525" cap="flat" cmpd="sng" algn="ctr">
+                      <a:solidFill>
+                        <a:srgbClr val="C9D3DB"/>
+                      </a:solidFill>
+                      <a:prstDash val="solid"/>
+                      <a:round/>
+                      <a:headEnd type="none" w="med" len="med"/>
+                      <a:tailEnd type="none" w="med" len="med"/>
+                    </a:lnB>
+                    <a:solidFill>
+                      <a:srgbClr val="F7F9FA"/>
+                    </a:solidFill>
+                  </a:tcPr>
+                </a:tc>
+              </a:tr>
+              <a:tr h="301752">
+                <a:tc>
+                  <a:txBody>
+                    <a:bodyPr/>
+                    <a:lstStyle/>
+                    <a:p>
+                      <a:pPr indent="0" marL="0">
+                        <a:buNone/>
+                      </a:pPr>
+                      <a:r>
+                        <a:rPr lang="en-US" sz="1200" b="1" dirty="0">
+                          <a:solidFill>
+                            <a:srgbClr val="1F3A4D"/>
+                          </a:solidFill>
+                          <a:latin typeface="Meiryo" pitchFamily="34" charset="0"/>
+                          <a:ea typeface="Meiryo" pitchFamily="34" charset="-122"/>
+                          <a:cs typeface="Meiryo" pitchFamily="34" charset="-120"/>
+                        </a:rPr>
+                        <a:t>請負工事価格（新工種抜き）</a:t>
+                      </a:r>
+                      <a:endParaRPr lang="en-US" sz="1200" dirty="0">
+                        <a:latin typeface="Meiryo" charset="0"/>
+                        <a:ea typeface="Meiryo" charset="0"/>
+                        <a:cs typeface="Meiryo" charset="0"/>
+                      </a:endParaRPr>
+                    </a:p>
+                  </a:txBody>
+                  <a:tcPr marL="54864" marR="54864" marT="54864" marB="54864" anchor="ctr">
+                    <a:lnL w="9525" cap="flat" cmpd="sng" algn="ctr">
+                      <a:solidFill>
+                        <a:srgbClr val="C9D3DB"/>
+                      </a:solidFill>
+                      <a:prstDash val="solid"/>
+                      <a:round/>
+                      <a:headEnd type="none" w="med" len="med"/>
+                      <a:tailEnd type="none" w="med" len="med"/>
+                    </a:lnL>
+                    <a:lnR w="9525" cap="flat" cmpd="sng" algn="ctr">
+                      <a:solidFill>
+                        <a:srgbClr val="C9D3DB"/>
+                      </a:solidFill>
+                      <a:prstDash val="solid"/>
+                      <a:round/>
+                      <a:headEnd type="none" w="med" len="med"/>
+                      <a:tailEnd type="none" w="med" len="med"/>
+                    </a:lnR>
+                    <a:lnT w="9525" cap="flat" cmpd="sng" algn="ctr">
+                      <a:solidFill>
+                        <a:srgbClr val="C9D3DB"/>
+                      </a:solidFill>
+                      <a:prstDash val="solid"/>
+                      <a:round/>
+                      <a:headEnd type="none" w="med" len="med"/>
+                      <a:tailEnd type="none" w="med" len="med"/>
+                    </a:lnT>
+                    <a:lnB w="9525" cap="flat" cmpd="sng" algn="ctr">
+                      <a:solidFill>
+                        <a:srgbClr val="C9D3DB"/>
+                      </a:solidFill>
+                      <a:prstDash val="solid"/>
+                      <a:round/>
+                      <a:headEnd type="none" w="med" len="med"/>
+                      <a:tailEnd type="none" w="med" len="med"/>
+                    </a:lnB>
+                    <a:solidFill>
+                      <a:srgbClr val="EEF2F5"/>
+                    </a:solidFill>
+                  </a:tcPr>
+                </a:tc>
+                <a:tc>
+                  <a:txBody>
+                    <a:bodyPr/>
+                    <a:lstStyle/>
+                    <a:p>
+                      <a:pPr algn="r" indent="0" marL="0">
+                        <a:buNone/>
+                      </a:pPr>
+                      <a:r>
+                        <a:rPr lang="en-US" sz="1200" dirty="0">
+                          <a:solidFill>
+                            <a:srgbClr val="2B2B2B"/>
+                          </a:solidFill>
+                          <a:latin typeface="Meiryo" pitchFamily="34" charset="0"/>
+                          <a:ea typeface="Meiryo" pitchFamily="34" charset="-122"/>
+                          <a:cs typeface="Meiryo" pitchFamily="34" charset="-120"/>
+                        </a:rPr>
+                        <a:t>218,181,818</a:t>
+                      </a:r>
+                      <a:endParaRPr lang="en-US" sz="1200" dirty="0">
+                        <a:latin typeface="Meiryo" charset="0"/>
+                        <a:ea typeface="Meiryo" charset="0"/>
+                        <a:cs typeface="Meiryo" charset="0"/>
+                      </a:endParaRPr>
+                    </a:p>
+                  </a:txBody>
+                  <a:tcPr marL="54864" marR="54864" marT="54864" marB="54864" anchor="ctr">
+                    <a:lnL w="9525" cap="flat" cmpd="sng" algn="ctr">
+                      <a:solidFill>
+                        <a:srgbClr val="C9D3DB"/>
+                      </a:solidFill>
+                      <a:prstDash val="solid"/>
+                      <a:round/>
+                      <a:headEnd type="none" w="med" len="med"/>
+                      <a:tailEnd type="none" w="med" len="med"/>
+                    </a:lnL>
+                    <a:lnR w="9525" cap="flat" cmpd="sng" algn="ctr">
+                      <a:solidFill>
+                        <a:srgbClr val="C9D3DB"/>
+                      </a:solidFill>
+                      <a:prstDash val="solid"/>
+                      <a:round/>
+                      <a:headEnd type="none" w="med" len="med"/>
+                      <a:tailEnd type="none" w="med" len="med"/>
+                    </a:lnR>
+                    <a:lnT w="9525" cap="flat" cmpd="sng" algn="ctr">
+                      <a:solidFill>
+                        <a:srgbClr val="C9D3DB"/>
+                      </a:solidFill>
+                      <a:prstDash val="solid"/>
+                      <a:round/>
+                      <a:headEnd type="none" w="med" len="med"/>
+                      <a:tailEnd type="none" w="med" len="med"/>
+                    </a:lnT>
+                    <a:lnB w="9525" cap="flat" cmpd="sng" algn="ctr">
+                      <a:solidFill>
+                        <a:srgbClr val="C9D3DB"/>
+                      </a:solidFill>
+                      <a:prstDash val="solid"/>
+                      <a:round/>
+                      <a:headEnd type="none" w="med" len="med"/>
+                      <a:tailEnd type="none" w="med" len="med"/>
+                    </a:lnB>
+                  </a:tcPr>
+                </a:tc>
+                <a:tc>
+                  <a:txBody>
+                    <a:bodyPr/>
+                    <a:lstStyle/>
+                    <a:p>
+                      <a:pPr algn="r" indent="0" marL="0">
+                        <a:buNone/>
+                      </a:pPr>
+                      <a:r>
+                        <a:rPr lang="en-US" sz="1200" dirty="0">
+                          <a:solidFill>
+                            <a:srgbClr val="2B2B2B"/>
+                          </a:solidFill>
+                          <a:latin typeface="Meiryo" pitchFamily="34" charset="0"/>
+                          <a:ea typeface="Meiryo" pitchFamily="34" charset="-122"/>
+                          <a:cs typeface="Meiryo" pitchFamily="34" charset="-120"/>
+                        </a:rPr>
+                        <a:t>81,796,504</a:t>
+                      </a:r>
+                      <a:endParaRPr lang="en-US" sz="1200" dirty="0">
+                        <a:latin typeface="Meiryo" charset="0"/>
+                        <a:ea typeface="Meiryo" charset="0"/>
+                        <a:cs typeface="Meiryo" charset="0"/>
+                      </a:endParaRPr>
+                    </a:p>
+                  </a:txBody>
+                  <a:tcPr marL="54864" marR="54864" marT="54864" marB="54864" anchor="ctr">
+                    <a:lnL w="9525" cap="flat" cmpd="sng" algn="ctr">
+                      <a:solidFill>
+                        <a:srgbClr val="C9D3DB"/>
+                      </a:solidFill>
+                      <a:prstDash val="solid"/>
+                      <a:round/>
+                      <a:headEnd type="none" w="med" len="med"/>
+                      <a:tailEnd type="none" w="med" len="med"/>
+                    </a:lnL>
+                    <a:lnR w="9525" cap="flat" cmpd="sng" algn="ctr">
+                      <a:solidFill>
+                        <a:srgbClr val="C9D3DB"/>
+                      </a:solidFill>
+                      <a:prstDash val="solid"/>
+                      <a:round/>
+                      <a:headEnd type="none" w="med" len="med"/>
+                      <a:tailEnd type="none" w="med" len="med"/>
+                    </a:lnR>
+                    <a:lnT w="9525" cap="flat" cmpd="sng" algn="ctr">
+                      <a:solidFill>
+                        <a:srgbClr val="C9D3DB"/>
+                      </a:solidFill>
+                      <a:prstDash val="solid"/>
+                      <a:round/>
+                      <a:headEnd type="none" w="med" len="med"/>
+                      <a:tailEnd type="none" w="med" len="med"/>
+                    </a:lnT>
+                    <a:lnB w="9525" cap="flat" cmpd="sng" algn="ctr">
+                      <a:solidFill>
+                        <a:srgbClr val="C9D3DB"/>
+                      </a:solidFill>
+                      <a:prstDash val="solid"/>
+                      <a:round/>
+                      <a:headEnd type="none" w="med" len="med"/>
+                      <a:tailEnd type="none" w="med" len="med"/>
+                    </a:lnB>
+                  </a:tcPr>
+                </a:tc>
+                <a:tc>
+                  <a:txBody>
+                    <a:bodyPr/>
+                    <a:lstStyle/>
+                    <a:p>
+                      <a:pPr algn="r" indent="0" marL="0">
+                        <a:buNone/>
+                      </a:pPr>
+                      <a:r>
+                        <a:rPr lang="en-US" sz="1200" dirty="0">
+                          <a:solidFill>
+                            <a:srgbClr val="2B2B2B"/>
+                          </a:solidFill>
+                          <a:latin typeface="Meiryo" pitchFamily="34" charset="0"/>
+                          <a:ea typeface="Meiryo" pitchFamily="34" charset="-122"/>
+                          <a:cs typeface="Meiryo" pitchFamily="34" charset="-120"/>
+                        </a:rPr>
+                        <a:t>136,385,314</a:t>
+                      </a:r>
+                      <a:endParaRPr lang="en-US" sz="1200" dirty="0">
+                        <a:latin typeface="Meiryo" charset="0"/>
+                        <a:ea typeface="Meiryo" charset="0"/>
+                        <a:cs typeface="Meiryo" charset="0"/>
+                      </a:endParaRPr>
+                    </a:p>
+                  </a:txBody>
+                  <a:tcPr marL="54864" marR="54864" marT="54864" marB="54864" anchor="ctr">
+                    <a:lnL w="9525" cap="flat" cmpd="sng" algn="ctr">
+                      <a:solidFill>
+                        <a:srgbClr val="C9D3DB"/>
+                      </a:solidFill>
+                      <a:prstDash val="solid"/>
+                      <a:round/>
+                      <a:headEnd type="none" w="med" len="med"/>
+                      <a:tailEnd type="none" w="med" len="med"/>
+                    </a:lnL>
+                    <a:lnR w="9525" cap="flat" cmpd="sng" algn="ctr">
+                      <a:solidFill>
+                        <a:srgbClr val="C9D3DB"/>
+                      </a:solidFill>
+                      <a:prstDash val="solid"/>
+                      <a:round/>
+                      <a:headEnd type="none" w="med" len="med"/>
+                      <a:tailEnd type="none" w="med" len="med"/>
+                    </a:lnR>
+                    <a:lnT w="9525" cap="flat" cmpd="sng" algn="ctr">
+                      <a:solidFill>
+                        <a:srgbClr val="C9D3DB"/>
+                      </a:solidFill>
+                      <a:prstDash val="solid"/>
+                      <a:round/>
+                      <a:headEnd type="none" w="med" len="med"/>
+                      <a:tailEnd type="none" w="med" len="med"/>
+                    </a:lnT>
+                    <a:lnB w="9525" cap="flat" cmpd="sng" algn="ctr">
+                      <a:solidFill>
+                        <a:srgbClr val="C9D3DB"/>
+                      </a:solidFill>
+                      <a:prstDash val="solid"/>
+                      <a:round/>
+                      <a:headEnd type="none" w="med" len="med"/>
+                      <a:tailEnd type="none" w="med" len="med"/>
+                    </a:lnB>
+                  </a:tcPr>
+                </a:tc>
+                <a:tc>
+                  <a:txBody>
+                    <a:bodyPr/>
+                    <a:lstStyle/>
+                    <a:p>
+                      <a:pPr algn="ctr" indent="0" marL="0">
+                        <a:buNone/>
+                      </a:pPr>
+                      <a:r>
+                        <a:rPr lang="en-US" sz="1200" dirty="0">
+                          <a:solidFill>
+                            <a:srgbClr val="8A97A3"/>
+                          </a:solidFill>
+                          <a:latin typeface="Meiryo" pitchFamily="34" charset="0"/>
+                          <a:ea typeface="Meiryo" pitchFamily="34" charset="-122"/>
+                          <a:cs typeface="Meiryo" pitchFamily="34" charset="-120"/>
+                        </a:rPr>
+                        <a:t>-</a:t>
+                      </a:r>
+                      <a:endParaRPr lang="en-US" sz="1200" dirty="0">
+                        <a:latin typeface="Meiryo" charset="0"/>
+                        <a:ea typeface="Meiryo" charset="0"/>
+                        <a:cs typeface="Meiryo" charset="0"/>
+                      </a:endParaRPr>
+                    </a:p>
+                  </a:txBody>
+                  <a:tcPr marL="54864" marR="54864" marT="54864" marB="54864" anchor="ctr">
+                    <a:lnL w="9525" cap="flat" cmpd="sng" algn="ctr">
+                      <a:solidFill>
+                        <a:srgbClr val="C9D3DB"/>
+                      </a:solidFill>
+                      <a:prstDash val="solid"/>
+                      <a:round/>
+                      <a:headEnd type="none" w="med" len="med"/>
+                      <a:tailEnd type="none" w="med" len="med"/>
+                    </a:lnL>
+                    <a:lnR w="9525" cap="flat" cmpd="sng" algn="ctr">
+                      <a:solidFill>
+                        <a:srgbClr val="C9D3DB"/>
+                      </a:solidFill>
+                      <a:prstDash val="solid"/>
+                      <a:round/>
+                      <a:headEnd type="none" w="med" len="med"/>
+                      <a:tailEnd type="none" w="med" len="med"/>
+                    </a:lnR>
+                    <a:lnT w="9525" cap="flat" cmpd="sng" algn="ctr">
+                      <a:solidFill>
+                        <a:srgbClr val="C9D3DB"/>
+                      </a:solidFill>
+                      <a:prstDash val="solid"/>
+                      <a:round/>
+                      <a:headEnd type="none" w="med" len="med"/>
+                      <a:tailEnd type="none" w="med" len="med"/>
+                    </a:lnT>
+                    <a:lnB w="9525" cap="flat" cmpd="sng" algn="ctr">
+                      <a:solidFill>
+                        <a:srgbClr val="C9D3DB"/>
+                      </a:solidFill>
+                      <a:prstDash val="solid"/>
+                      <a:round/>
+                      <a:headEnd type="none" w="med" len="med"/>
+                      <a:tailEnd type="none" w="med" len="med"/>
+                    </a:lnB>
+                  </a:tcPr>
+                </a:tc>
+                <a:tc>
+                  <a:txBody>
+                    <a:bodyPr/>
+                    <a:lstStyle/>
+                    <a:p>
+                      <a:pPr algn="ctr" indent="0" marL="0">
+                        <a:buNone/>
+                      </a:pPr>
+                      <a:r>
+                        <a:rPr lang="en-US" sz="1200" dirty="0">
+                          <a:solidFill>
+                            <a:srgbClr val="8A97A3"/>
+                          </a:solidFill>
+                          <a:latin typeface="Meiryo" pitchFamily="34" charset="0"/>
+                          <a:ea typeface="Meiryo" pitchFamily="34" charset="-122"/>
+                          <a:cs typeface="Meiryo" pitchFamily="34" charset="-120"/>
+                        </a:rPr>
+                        <a:t>-</a:t>
+                      </a:r>
+                      <a:endParaRPr lang="en-US" sz="1200" dirty="0">
+                        <a:latin typeface="Meiryo" charset="0"/>
+                        <a:ea typeface="Meiryo" charset="0"/>
+                        <a:cs typeface="Meiryo" charset="0"/>
+                      </a:endParaRPr>
+                    </a:p>
+                  </a:txBody>
+                  <a:tcPr marL="54864" marR="54864" marT="54864" marB="54864" anchor="ctr">
+                    <a:lnL w="9525" cap="flat" cmpd="sng" algn="ctr">
+                      <a:solidFill>
+                        <a:srgbClr val="C9D3DB"/>
+                      </a:solidFill>
+                      <a:prstDash val="solid"/>
+                      <a:round/>
+                      <a:headEnd type="none" w="med" len="med"/>
+                      <a:tailEnd type="none" w="med" len="med"/>
+                    </a:lnL>
+                    <a:lnR w="9525" cap="flat" cmpd="sng" algn="ctr">
+                      <a:solidFill>
+                        <a:srgbClr val="C9D3DB"/>
+                      </a:solidFill>
+                      <a:prstDash val="solid"/>
+                      <a:round/>
+                      <a:headEnd type="none" w="med" len="med"/>
+                      <a:tailEnd type="none" w="med" len="med"/>
+                    </a:lnR>
+                    <a:lnT w="9525" cap="flat" cmpd="sng" algn="ctr">
+                      <a:solidFill>
+                        <a:srgbClr val="C9D3DB"/>
+                      </a:solidFill>
+                      <a:prstDash val="solid"/>
+                      <a:round/>
+                      <a:headEnd type="none" w="med" len="med"/>
+                      <a:tailEnd type="none" w="med" len="med"/>
+                    </a:lnT>
+                    <a:lnB w="9525" cap="flat" cmpd="sng" algn="ctr">
+                      <a:solidFill>
+                        <a:srgbClr val="C9D3DB"/>
+                      </a:solidFill>
+                      <a:prstDash val="solid"/>
+                      <a:round/>
+                      <a:headEnd type="none" w="med" len="med"/>
+                      <a:tailEnd type="none" w="med" len="med"/>
+                    </a:lnB>
                   </a:tcPr>
                 </a:tc>
               </a:tr>
@@ -4033,41 +7805,14 @@
       </p:graphicFrame>
       <p:sp>
         <p:nvSpPr>
-          <p:cNvPr id="5" name="Shape 2"/>
-          <p:cNvSpPr/>
-          <p:nvPr/>
-        </p:nvSpPr>
-        <p:spPr>
-          <a:xfrm>
-            <a:off x="8229600" y="1645920"/>
-            <a:ext cx="3383280" cy="3401568"/>
-          </a:xfrm>
-          <a:prstGeom prst="roundRect">
-            <a:avLst>
-              <a:gd name="adj" fmla="val 2162"/>
-            </a:avLst>
-          </a:prstGeom>
-          <a:solidFill>
-            <a:srgbClr val="1F3A4D"/>
-          </a:solidFill>
-          <a:ln w="12700">
-            <a:solidFill>
-              <a:srgbClr val="1F3A4D"/>
-            </a:solidFill>
-            <a:prstDash val="solid"/>
-          </a:ln>
-        </p:spPr>
-      </p:sp>
-      <p:sp>
-        <p:nvSpPr>
-          <p:cNvPr id="6" name="Text 3"/>
+          <p:cNvPr id="5" name="Text 2"/>
           <p:cNvSpPr txBox="1"/>
           <p:nvPr/>
         </p:nvSpPr>
         <p:spPr>
           <a:xfrm>
-            <a:off x="8412480" y="1920240"/>
-            <a:ext cx="3017520" cy="365760"/>
+            <a:off x="548640" y="5715000"/>
+            <a:ext cx="11064240" cy="594360"/>
           </a:xfrm>
           <a:prstGeom prst="rect">
             <a:avLst/>
@@ -4076,139 +7821,62 @@
           <a:ln/>
         </p:spPr>
         <p:txBody>
-          <a:bodyPr wrap="square" lIns="0" tIns="0" rIns="0" bIns="0" rtlCol="0" anchor="ctr"/>
+          <a:bodyPr wrap="square" lIns="0" tIns="0" rIns="0" bIns="0" rtlCol="0" anchor="t"/>
           <a:lstStyle/>
           <a:p>
-            <a:pPr algn="ctr" indent="0" marL="0">
+            <a:pPr indent="0" marL="0">
+              <a:spcAft>
+                <a:spcPts val="400"/>
+              </a:spcAft>
               <a:buNone/>
             </a:pPr>
             <a:r>
-              <a:rPr lang="en-US" sz="1600" dirty="0">
+              <a:rPr lang="en-US" sz="1400" dirty="0">
                 <a:solidFill>
-                  <a:srgbClr val="B9C8D4"/>
+                  <a:srgbClr val="2B2B2B"/>
                 </a:solidFill>
                 <a:latin typeface="Meiryo" pitchFamily="34" charset="0"/>
                 <a:ea typeface="Meiryo" pitchFamily="34" charset="-122"/>
                 <a:cs typeface="Meiryo" pitchFamily="34" charset="-120"/>
               </a:rPr>
-              <a:t>スライド額</a:t>
+              <a:t>請負率 ③/① ＝ 87.5859%</a:t>
             </a:r>
-            <a:endParaRPr lang="en-US" sz="1600" dirty="0"/>
-          </a:p>
-        </p:txBody>
-      </p:sp>
-      <p:sp>
-        <p:nvSpPr>
-          <p:cNvPr id="7" name="Text 4"/>
-          <p:cNvSpPr txBox="1"/>
-          <p:nvPr/>
-        </p:nvSpPr>
-        <p:spPr>
-          <a:xfrm>
-            <a:off x="8412480" y="2468880"/>
-            <a:ext cx="3017520" cy="1005840"/>
-          </a:xfrm>
-          <a:prstGeom prst="rect">
-            <a:avLst/>
-          </a:prstGeom>
-          <a:noFill/>
-          <a:ln/>
-        </p:spPr>
-        <p:txBody>
-          <a:bodyPr wrap="square" lIns="0" tIns="0" rIns="0" bIns="0" rtlCol="0" anchor="ctr"/>
-          <a:lstStyle/>
-          <a:p>
-            <a:pPr algn="ctr" indent="0" marL="0">
+            <a:endParaRPr lang="en-US" sz="1400" dirty="0"/>
+          </a:p>
+          <a:p>
+            <a:pPr indent="0" marL="0">
+              <a:spcAft>
+                <a:spcPts val="400"/>
+              </a:spcAft>
               <a:buNone/>
             </a:pPr>
             <a:r>
-              <a:rPr lang="en-US" sz="4800" b="1" dirty="0">
+              <a:rPr lang="en-US" sz="1400" dirty="0">
                 <a:solidFill>
-                  <a:srgbClr val="E08E2B"/>
-                </a:solidFill>
-                <a:latin typeface="Arial" pitchFamily="34" charset="0"/>
-                <a:ea typeface="Arial" pitchFamily="34" charset="-122"/>
-                <a:cs typeface="Arial" pitchFamily="34" charset="-120"/>
-              </a:rPr>
-              <a:t>【XX.X】</a:t>
-            </a:r>
-            <a:endParaRPr lang="en-US" sz="4800" dirty="0"/>
-          </a:p>
-        </p:txBody>
-      </p:sp>
-      <p:sp>
-        <p:nvSpPr>
-          <p:cNvPr id="8" name="Text 5"/>
-          <p:cNvSpPr txBox="1"/>
-          <p:nvPr/>
-        </p:nvSpPr>
-        <p:spPr>
-          <a:xfrm>
-            <a:off x="8412480" y="3474720"/>
-            <a:ext cx="3017520" cy="365760"/>
-          </a:xfrm>
-          <a:prstGeom prst="rect">
-            <a:avLst/>
-          </a:prstGeom>
-          <a:noFill/>
-          <a:ln/>
-        </p:spPr>
-        <p:txBody>
-          <a:bodyPr wrap="square" lIns="0" tIns="0" rIns="0" bIns="0" rtlCol="0" anchor="ctr"/>
-          <a:lstStyle/>
-          <a:p>
-            <a:pPr algn="ctr" indent="0" marL="0">
-              <a:buNone/>
-            </a:pPr>
-            <a:r>
-              <a:rPr lang="en-US" sz="1600" dirty="0">
-                <a:solidFill>
-                  <a:srgbClr val="FFFFFF"/>
+                  <a:srgbClr val="2B2B2B"/>
                 </a:solidFill>
                 <a:latin typeface="Meiryo" pitchFamily="34" charset="0"/>
                 <a:ea typeface="Meiryo" pitchFamily="34" charset="-122"/>
                 <a:cs typeface="Meiryo" pitchFamily="34" charset="-120"/>
               </a:rPr>
-              <a:t>百万円</a:t>
+              <a:t>S' ＝ 149,092,281 − 145,869,995 − 136,385,314 × 1/100 ＝ </a:t>
             </a:r>
-            <a:endParaRPr lang="en-US" sz="1600" dirty="0"/>
-          </a:p>
-        </p:txBody>
-      </p:sp>
-      <p:sp>
-        <p:nvSpPr>
-          <p:cNvPr id="9" name="Text 6"/>
-          <p:cNvSpPr txBox="1"/>
-          <p:nvPr/>
-        </p:nvSpPr>
-        <p:spPr>
-          <a:xfrm>
-            <a:off x="8412480" y="4114800"/>
-            <a:ext cx="3017520" cy="365760"/>
-          </a:xfrm>
-          <a:prstGeom prst="rect">
-            <a:avLst/>
-          </a:prstGeom>
-          <a:noFill/>
-          <a:ln/>
-        </p:spPr>
-        <p:txBody>
-          <a:bodyPr wrap="square" lIns="0" tIns="0" rIns="0" bIns="0" rtlCol="0" anchor="ctr"/>
-          <a:lstStyle/>
-          <a:p>
-            <a:pPr algn="ctr" indent="0" marL="0">
+            <a:pPr indent="0" marL="0">
+              <a:spcAft>
+                <a:spcPts val="400"/>
+              </a:spcAft>
               <a:buNone/>
             </a:pPr>
             <a:r>
-              <a:rPr lang="en-US" sz="1400" dirty="0">
+              <a:rPr lang="en-US" sz="1400" b="1" dirty="0">
                 <a:solidFill>
-                  <a:srgbClr val="B9C8D4"/>
+                  <a:srgbClr val="E08E2B"/>
                 </a:solidFill>
                 <a:latin typeface="Meiryo" pitchFamily="34" charset="0"/>
                 <a:ea typeface="Meiryo" pitchFamily="34" charset="-122"/>
                 <a:cs typeface="Meiryo" pitchFamily="34" charset="-120"/>
               </a:rPr>
-              <a:t>請負代金額の【X.X】%</a:t>
+              <a:t>1,858,432円（増額スライド）</a:t>
             </a:r>
             <a:endParaRPr lang="en-US" sz="1400" dirty="0"/>
           </a:p>
@@ -4216,46 +7884,7 @@
       </p:sp>
       <p:sp>
         <p:nvSpPr>
-          <p:cNvPr id="10" name="Text 7"/>
-          <p:cNvSpPr txBox="1"/>
-          <p:nvPr/>
-        </p:nvSpPr>
-        <p:spPr>
-          <a:xfrm>
-            <a:off x="548640" y="5486400"/>
-            <a:ext cx="11064240" cy="457200"/>
-          </a:xfrm>
-          <a:prstGeom prst="rect">
-            <a:avLst/>
-          </a:prstGeom>
-          <a:noFill/>
-          <a:ln/>
-        </p:spPr>
-        <p:txBody>
-          <a:bodyPr wrap="square" lIns="0" tIns="0" rIns="0" bIns="0" rtlCol="0" anchor="ctr"/>
-          <a:lstStyle/>
-          <a:p>
-            <a:pPr indent="0" marL="0">
-              <a:buNone/>
-            </a:pPr>
-            <a:r>
-              <a:rPr lang="en-US" sz="1400" dirty="0">
-                <a:solidFill>
-                  <a:srgbClr val="8A97A3"/>
-                </a:solidFill>
-                <a:latin typeface="Meiryo" pitchFamily="34" charset="0"/>
-                <a:ea typeface="Meiryo" pitchFamily="34" charset="-122"/>
-                <a:cs typeface="Meiryo" pitchFamily="34" charset="-120"/>
-              </a:rPr>
-              <a:t>【補足・注意点を記入】</a:t>
-            </a:r>
-            <a:endParaRPr lang="en-US" sz="1400" dirty="0"/>
-          </a:p>
-        </p:txBody>
-      </p:sp>
-      <p:sp>
-        <p:nvSpPr>
-          <p:cNvPr id="11" name="Text 8"/>
+          <p:cNvPr id="7" name="Text 3"/>
           <p:cNvSpPr txBox="1"/>
           <p:nvPr/>
         </p:nvSpPr>
@@ -4306,7 +7935,7 @@
     <p:bg>
       <p:bgPr>
         <a:solidFill>
-          <a:srgbClr val="1F3A4D"/>
+          <a:srgbClr val="FFFFFF"/>
         </a:solidFill>
       </p:bgPr>
     </p:bg>
@@ -4390,7 +8019,7 @@
             <a:r>
               <a:rPr lang="en-US" sz="3400" b="1" dirty="0">
                 <a:solidFill>
-                  <a:srgbClr val="FFFFFF"/>
+                  <a:srgbClr val="1F3A4D"/>
                 </a:solidFill>
                 <a:latin typeface="Meiryo" pitchFamily="34" charset="0"/>
                 <a:ea typeface="Meiryo" pitchFamily="34" charset="-122"/>
@@ -4429,7 +8058,7 @@
             <a:r>
               <a:rPr lang="en-US" sz="1600" dirty="0">
                 <a:solidFill>
-                  <a:srgbClr val="B9C8D4"/>
+                  <a:srgbClr val="8A97A3"/>
                 </a:solidFill>
                 <a:latin typeface="Meiryo" pitchFamily="34" charset="0"/>
                 <a:ea typeface="Meiryo" pitchFamily="34" charset="-122"/>
@@ -7678,11 +11307,11 @@
             </a:avLst>
           </a:prstGeom>
           <a:solidFill>
-            <a:srgbClr val="1F3A4D"/>
+            <a:srgbClr val="EEF2F5"/>
           </a:solidFill>
           <a:ln w="12700">
             <a:solidFill>
-              <a:srgbClr val="1F3A4D"/>
+              <a:srgbClr val="EEF2F5"/>
             </a:solidFill>
             <a:prstDash val="solid"/>
           </a:ln>
@@ -7715,7 +11344,7 @@
             <a:r>
               <a:rPr lang="en-US" sz="1600" b="1" dirty="0">
                 <a:solidFill>
-                  <a:srgbClr val="B9C8D4"/>
+                  <a:srgbClr val="1F3A4D"/>
                 </a:solidFill>
                 <a:latin typeface="Meiryo" pitchFamily="34" charset="0"/>
                 <a:ea typeface="Meiryo" pitchFamily="34" charset="-122"/>
@@ -7754,7 +11383,7 @@
             <a:r>
               <a:rPr lang="en-US" sz="5400" b="1" dirty="0">
                 <a:solidFill>
-                  <a:srgbClr val="E08E2B"/>
+                  <a:srgbClr val="1F3A4D"/>
                 </a:solidFill>
                 <a:latin typeface="Arial" pitchFamily="34" charset="0"/>
                 <a:ea typeface="Arial" pitchFamily="34" charset="-122"/>
@@ -7793,7 +11422,7 @@
             <a:r>
               <a:rPr lang="en-US" sz="1500" dirty="0">
                 <a:solidFill>
-                  <a:srgbClr val="FFFFFF"/>
+                  <a:srgbClr val="8A97A3"/>
                 </a:solidFill>
                 <a:latin typeface="Meiryo" pitchFamily="34" charset="0"/>
                 <a:ea typeface="Meiryo" pitchFamily="34" charset="-122"/>
@@ -8098,7 +11727,7 @@
     <p:bg>
       <p:bgPr>
         <a:solidFill>
-          <a:srgbClr val="1F3A4D"/>
+          <a:srgbClr val="FFFFFF"/>
         </a:solidFill>
       </p:bgPr>
     </p:bg>
@@ -8182,13 +11811,13 @@
             <a:r>
               <a:rPr lang="en-US" sz="3400" b="1" dirty="0">
                 <a:solidFill>
-                  <a:srgbClr val="FFFFFF"/>
+                  <a:srgbClr val="1F3A4D"/>
                 </a:solidFill>
                 <a:latin typeface="Meiryo" pitchFamily="34" charset="0"/>
                 <a:ea typeface="Meiryo" pitchFamily="34" charset="-122"/>
                 <a:cs typeface="Meiryo" pitchFamily="34" charset="-120"/>
               </a:rPr>
-              <a:t>論点・今後の進め方</a:t>
+              <a:t>本日の論点</a:t>
             </a:r>
             <a:endParaRPr lang="en-US" sz="3400" dirty="0"/>
           </a:p>
@@ -8221,13 +11850,13 @@
             <a:r>
               <a:rPr lang="en-US" sz="1600" dirty="0">
                 <a:solidFill>
-                  <a:srgbClr val="B9C8D4"/>
+                  <a:srgbClr val="8A97A3"/>
                 </a:solidFill>
                 <a:latin typeface="Meiryo" pitchFamily="34" charset="0"/>
                 <a:ea typeface="Meiryo" pitchFamily="34" charset="-122"/>
                 <a:cs typeface="Meiryo" pitchFamily="34" charset="-120"/>
               </a:rPr>
-              <a:t>本日の論点・スケジュール・担当</a:t>
+              <a:t>ご議論いただきたい事項</a:t>
             </a:r>
             <a:endParaRPr lang="en-US" sz="1600" dirty="0"/>
           </a:p>
@@ -8774,2188 +12403,6 @@
                 <a:ea typeface="Meiryo" pitchFamily="34" charset="-122"/>
                 <a:cs typeface="Meiryo" pitchFamily="34" charset="-120"/>
               </a:rPr>
-              <a:t>今後のスケジュール</a:t>
-            </a:r>
-            <a:endParaRPr lang="en-US" sz="3000" dirty="0"/>
-          </a:p>
-        </p:txBody>
-      </p:sp>
-      <p:sp>
-        <p:nvSpPr>
-          <p:cNvPr id="3" name="Shape 1"/>
-          <p:cNvSpPr/>
-          <p:nvPr/>
-        </p:nvSpPr>
-        <p:spPr>
-          <a:xfrm>
-            <a:off x="1554480" y="3017520"/>
-            <a:ext cx="9052560" cy="0"/>
-          </a:xfrm>
-          <a:prstGeom prst="line">
-            <a:avLst/>
-          </a:prstGeom>
-          <a:noFill/>
-          <a:ln w="38100">
-            <a:solidFill>
-              <a:srgbClr val="C9D3DB"/>
-            </a:solidFill>
-            <a:prstDash val="solid"/>
-          </a:ln>
-        </p:spPr>
-      </p:sp>
-      <p:sp>
-        <p:nvSpPr>
-          <p:cNvPr id="4" name="Shape 2"/>
-          <p:cNvSpPr/>
-          <p:nvPr/>
-        </p:nvSpPr>
-        <p:spPr>
-          <a:xfrm>
-            <a:off x="1389888" y="2852928"/>
-            <a:ext cx="329184" cy="329184"/>
-          </a:xfrm>
-          <a:prstGeom prst="ellipse">
-            <a:avLst/>
-          </a:prstGeom>
-          <a:solidFill>
-            <a:srgbClr val="E08E2B"/>
-          </a:solidFill>
-          <a:ln w="25400">
-            <a:solidFill>
-              <a:srgbClr val="FFFFFF"/>
-            </a:solidFill>
-            <a:prstDash val="solid"/>
-          </a:ln>
-        </p:spPr>
-      </p:sp>
-      <p:sp>
-        <p:nvSpPr>
-          <p:cNvPr id="5" name="Text 3"/>
-          <p:cNvSpPr txBox="1"/>
-          <p:nvPr/>
-        </p:nvSpPr>
-        <p:spPr>
-          <a:xfrm>
-            <a:off x="548640" y="2194560"/>
-            <a:ext cx="2011680" cy="411480"/>
-          </a:xfrm>
-          <a:prstGeom prst="rect">
-            <a:avLst/>
-          </a:prstGeom>
-          <a:noFill/>
-          <a:ln/>
-        </p:spPr>
-        <p:txBody>
-          <a:bodyPr wrap="square" lIns="0" tIns="0" rIns="0" bIns="0" rtlCol="0" anchor="ctr"/>
-          <a:lstStyle/>
-          <a:p>
-            <a:pPr algn="ctr" indent="0" marL="0">
-              <a:buNone/>
-            </a:pPr>
-            <a:r>
-              <a:rPr lang="en-US" sz="1600" b="1" dirty="0">
-                <a:solidFill>
-                  <a:srgbClr val="1F3A4D"/>
-                </a:solidFill>
-                <a:latin typeface="Meiryo" pitchFamily="34" charset="0"/>
-                <a:ea typeface="Meiryo" pitchFamily="34" charset="-122"/>
-                <a:cs typeface="Meiryo" pitchFamily="34" charset="-120"/>
-              </a:rPr>
-              <a:t>【XX月】</a:t>
-            </a:r>
-            <a:endParaRPr lang="en-US" sz="1600" dirty="0"/>
-          </a:p>
-        </p:txBody>
-      </p:sp>
-      <p:sp>
-        <p:nvSpPr>
-          <p:cNvPr id="6" name="Text 4"/>
-          <p:cNvSpPr txBox="1"/>
-          <p:nvPr/>
-        </p:nvSpPr>
-        <p:spPr>
-          <a:xfrm>
-            <a:off x="548640" y="3383280"/>
-            <a:ext cx="2011680" cy="411480"/>
-          </a:xfrm>
-          <a:prstGeom prst="rect">
-            <a:avLst/>
-          </a:prstGeom>
-          <a:noFill/>
-          <a:ln/>
-        </p:spPr>
-        <p:txBody>
-          <a:bodyPr wrap="square" lIns="0" tIns="0" rIns="0" bIns="0" rtlCol="0" anchor="ctr"/>
-          <a:lstStyle/>
-          <a:p>
-            <a:pPr algn="ctr" indent="0" marL="0">
-              <a:buNone/>
-            </a:pPr>
-            <a:r>
-              <a:rPr lang="en-US" sz="1500" b="1" dirty="0">
-                <a:solidFill>
-                  <a:srgbClr val="2B2B2B"/>
-                </a:solidFill>
-                <a:latin typeface="Meiryo" pitchFamily="34" charset="0"/>
-                <a:ea typeface="Meiryo" pitchFamily="34" charset="-122"/>
-                <a:cs typeface="Meiryo" pitchFamily="34" charset="-120"/>
-              </a:rPr>
-              <a:t>方針決定</a:t>
-            </a:r>
-            <a:endParaRPr lang="en-US" sz="1500" dirty="0"/>
-          </a:p>
-        </p:txBody>
-      </p:sp>
-      <p:sp>
-        <p:nvSpPr>
-          <p:cNvPr id="7" name="Text 5"/>
-          <p:cNvSpPr txBox="1"/>
-          <p:nvPr/>
-        </p:nvSpPr>
-        <p:spPr>
-          <a:xfrm>
-            <a:off x="548640" y="3794760"/>
-            <a:ext cx="2011680" cy="365760"/>
-          </a:xfrm>
-          <a:prstGeom prst="rect">
-            <a:avLst/>
-          </a:prstGeom>
-          <a:noFill/>
-          <a:ln/>
-        </p:spPr>
-        <p:txBody>
-          <a:bodyPr wrap="square" lIns="0" tIns="0" rIns="0" bIns="0" rtlCol="0" anchor="ctr"/>
-          <a:lstStyle/>
-          <a:p>
-            <a:pPr algn="ctr" indent="0" marL="0">
-              <a:buNone/>
-            </a:pPr>
-            <a:r>
-              <a:rPr lang="en-US" sz="1300" dirty="0">
-                <a:solidFill>
-                  <a:srgbClr val="8A97A3"/>
-                </a:solidFill>
-                <a:latin typeface="Meiryo" pitchFamily="34" charset="0"/>
-                <a:ea typeface="Meiryo" pitchFamily="34" charset="-122"/>
-                <a:cs typeface="Meiryo" pitchFamily="34" charset="-120"/>
-              </a:rPr>
-              <a:t>【詳細】</a:t>
-            </a:r>
-            <a:endParaRPr lang="en-US" sz="1300" dirty="0"/>
-          </a:p>
-        </p:txBody>
-      </p:sp>
-      <p:sp>
-        <p:nvSpPr>
-          <p:cNvPr id="8" name="Shape 6"/>
-          <p:cNvSpPr/>
-          <p:nvPr/>
-        </p:nvSpPr>
-        <p:spPr>
-          <a:xfrm>
-            <a:off x="3653028" y="2852928"/>
-            <a:ext cx="329184" cy="329184"/>
-          </a:xfrm>
-          <a:prstGeom prst="ellipse">
-            <a:avLst/>
-          </a:prstGeom>
-          <a:solidFill>
-            <a:srgbClr val="1F3A4D"/>
-          </a:solidFill>
-          <a:ln w="25400">
-            <a:solidFill>
-              <a:srgbClr val="FFFFFF"/>
-            </a:solidFill>
-            <a:prstDash val="solid"/>
-          </a:ln>
-        </p:spPr>
-      </p:sp>
-      <p:sp>
-        <p:nvSpPr>
-          <p:cNvPr id="9" name="Text 7"/>
-          <p:cNvSpPr txBox="1"/>
-          <p:nvPr/>
-        </p:nvSpPr>
-        <p:spPr>
-          <a:xfrm>
-            <a:off x="2811780" y="2194560"/>
-            <a:ext cx="2011680" cy="411480"/>
-          </a:xfrm>
-          <a:prstGeom prst="rect">
-            <a:avLst/>
-          </a:prstGeom>
-          <a:noFill/>
-          <a:ln/>
-        </p:spPr>
-        <p:txBody>
-          <a:bodyPr wrap="square" lIns="0" tIns="0" rIns="0" bIns="0" rtlCol="0" anchor="ctr"/>
-          <a:lstStyle/>
-          <a:p>
-            <a:pPr algn="ctr" indent="0" marL="0">
-              <a:buNone/>
-            </a:pPr>
-            <a:r>
-              <a:rPr lang="en-US" sz="1600" b="1" dirty="0">
-                <a:solidFill>
-                  <a:srgbClr val="1F3A4D"/>
-                </a:solidFill>
-                <a:latin typeface="Meiryo" pitchFamily="34" charset="0"/>
-                <a:ea typeface="Meiryo" pitchFamily="34" charset="-122"/>
-                <a:cs typeface="Meiryo" pitchFamily="34" charset="-120"/>
-              </a:rPr>
-              <a:t>【XX月】</a:t>
-            </a:r>
-            <a:endParaRPr lang="en-US" sz="1600" dirty="0"/>
-          </a:p>
-        </p:txBody>
-      </p:sp>
-      <p:sp>
-        <p:nvSpPr>
-          <p:cNvPr id="10" name="Text 8"/>
-          <p:cNvSpPr txBox="1"/>
-          <p:nvPr/>
-        </p:nvSpPr>
-        <p:spPr>
-          <a:xfrm>
-            <a:off x="2811780" y="3383280"/>
-            <a:ext cx="2011680" cy="411480"/>
-          </a:xfrm>
-          <a:prstGeom prst="rect">
-            <a:avLst/>
-          </a:prstGeom>
-          <a:noFill/>
-          <a:ln/>
-        </p:spPr>
-        <p:txBody>
-          <a:bodyPr wrap="square" lIns="0" tIns="0" rIns="0" bIns="0" rtlCol="0" anchor="ctr"/>
-          <a:lstStyle/>
-          <a:p>
-            <a:pPr algn="ctr" indent="0" marL="0">
-              <a:buNone/>
-            </a:pPr>
-            <a:r>
-              <a:rPr lang="en-US" sz="1500" b="1" dirty="0">
-                <a:solidFill>
-                  <a:srgbClr val="2B2B2B"/>
-                </a:solidFill>
-                <a:latin typeface="Meiryo" pitchFamily="34" charset="0"/>
-                <a:ea typeface="Meiryo" pitchFamily="34" charset="-122"/>
-                <a:cs typeface="Meiryo" pitchFamily="34" charset="-120"/>
-              </a:rPr>
-              <a:t>運用ルール案作成</a:t>
-            </a:r>
-            <a:endParaRPr lang="en-US" sz="1500" dirty="0"/>
-          </a:p>
-        </p:txBody>
-      </p:sp>
-      <p:sp>
-        <p:nvSpPr>
-          <p:cNvPr id="11" name="Text 9"/>
-          <p:cNvSpPr txBox="1"/>
-          <p:nvPr/>
-        </p:nvSpPr>
-        <p:spPr>
-          <a:xfrm>
-            <a:off x="2811780" y="3794760"/>
-            <a:ext cx="2011680" cy="365760"/>
-          </a:xfrm>
-          <a:prstGeom prst="rect">
-            <a:avLst/>
-          </a:prstGeom>
-          <a:noFill/>
-          <a:ln/>
-        </p:spPr>
-        <p:txBody>
-          <a:bodyPr wrap="square" lIns="0" tIns="0" rIns="0" bIns="0" rtlCol="0" anchor="ctr"/>
-          <a:lstStyle/>
-          <a:p>
-            <a:pPr algn="ctr" indent="0" marL="0">
-              <a:buNone/>
-            </a:pPr>
-            <a:r>
-              <a:rPr lang="en-US" sz="1300" dirty="0">
-                <a:solidFill>
-                  <a:srgbClr val="8A97A3"/>
-                </a:solidFill>
-                <a:latin typeface="Meiryo" pitchFamily="34" charset="0"/>
-                <a:ea typeface="Meiryo" pitchFamily="34" charset="-122"/>
-                <a:cs typeface="Meiryo" pitchFamily="34" charset="-120"/>
-              </a:rPr>
-              <a:t>【詳細】</a:t>
-            </a:r>
-            <a:endParaRPr lang="en-US" sz="1300" dirty="0"/>
-          </a:p>
-        </p:txBody>
-      </p:sp>
-      <p:sp>
-        <p:nvSpPr>
-          <p:cNvPr id="12" name="Shape 10"/>
-          <p:cNvSpPr/>
-          <p:nvPr/>
-        </p:nvSpPr>
-        <p:spPr>
-          <a:xfrm>
-            <a:off x="5916168" y="2852928"/>
-            <a:ext cx="329184" cy="329184"/>
-          </a:xfrm>
-          <a:prstGeom prst="ellipse">
-            <a:avLst/>
-          </a:prstGeom>
-          <a:solidFill>
-            <a:srgbClr val="1F3A4D"/>
-          </a:solidFill>
-          <a:ln w="25400">
-            <a:solidFill>
-              <a:srgbClr val="FFFFFF"/>
-            </a:solidFill>
-            <a:prstDash val="solid"/>
-          </a:ln>
-        </p:spPr>
-      </p:sp>
-      <p:sp>
-        <p:nvSpPr>
-          <p:cNvPr id="13" name="Text 11"/>
-          <p:cNvSpPr txBox="1"/>
-          <p:nvPr/>
-        </p:nvSpPr>
-        <p:spPr>
-          <a:xfrm>
-            <a:off x="5074920" y="2194560"/>
-            <a:ext cx="2011680" cy="411480"/>
-          </a:xfrm>
-          <a:prstGeom prst="rect">
-            <a:avLst/>
-          </a:prstGeom>
-          <a:noFill/>
-          <a:ln/>
-        </p:spPr>
-        <p:txBody>
-          <a:bodyPr wrap="square" lIns="0" tIns="0" rIns="0" bIns="0" rtlCol="0" anchor="ctr"/>
-          <a:lstStyle/>
-          <a:p>
-            <a:pPr algn="ctr" indent="0" marL="0">
-              <a:buNone/>
-            </a:pPr>
-            <a:r>
-              <a:rPr lang="en-US" sz="1600" b="1" dirty="0">
-                <a:solidFill>
-                  <a:srgbClr val="1F3A4D"/>
-                </a:solidFill>
-                <a:latin typeface="Meiryo" pitchFamily="34" charset="0"/>
-                <a:ea typeface="Meiryo" pitchFamily="34" charset="-122"/>
-                <a:cs typeface="Meiryo" pitchFamily="34" charset="-120"/>
-              </a:rPr>
-              <a:t>【XX月】</a:t>
-            </a:r>
-            <a:endParaRPr lang="en-US" sz="1600" dirty="0"/>
-          </a:p>
-        </p:txBody>
-      </p:sp>
-      <p:sp>
-        <p:nvSpPr>
-          <p:cNvPr id="14" name="Text 12"/>
-          <p:cNvSpPr txBox="1"/>
-          <p:nvPr/>
-        </p:nvSpPr>
-        <p:spPr>
-          <a:xfrm>
-            <a:off x="5074920" y="3383280"/>
-            <a:ext cx="2011680" cy="411480"/>
-          </a:xfrm>
-          <a:prstGeom prst="rect">
-            <a:avLst/>
-          </a:prstGeom>
-          <a:noFill/>
-          <a:ln/>
-        </p:spPr>
-        <p:txBody>
-          <a:bodyPr wrap="square" lIns="0" tIns="0" rIns="0" bIns="0" rtlCol="0" anchor="ctr"/>
-          <a:lstStyle/>
-          <a:p>
-            <a:pPr algn="ctr" indent="0" marL="0">
-              <a:buNone/>
-            </a:pPr>
-            <a:r>
-              <a:rPr lang="en-US" sz="1500" b="1" dirty="0">
-                <a:solidFill>
-                  <a:srgbClr val="2B2B2B"/>
-                </a:solidFill>
-                <a:latin typeface="Meiryo" pitchFamily="34" charset="0"/>
-                <a:ea typeface="Meiryo" pitchFamily="34" charset="-122"/>
-                <a:cs typeface="Meiryo" pitchFamily="34" charset="-120"/>
-              </a:rPr>
-              <a:t>関係者調整・周知</a:t>
-            </a:r>
-            <a:endParaRPr lang="en-US" sz="1500" dirty="0"/>
-          </a:p>
-        </p:txBody>
-      </p:sp>
-      <p:sp>
-        <p:nvSpPr>
-          <p:cNvPr id="15" name="Text 13"/>
-          <p:cNvSpPr txBox="1"/>
-          <p:nvPr/>
-        </p:nvSpPr>
-        <p:spPr>
-          <a:xfrm>
-            <a:off x="5074920" y="3794760"/>
-            <a:ext cx="2011680" cy="365760"/>
-          </a:xfrm>
-          <a:prstGeom prst="rect">
-            <a:avLst/>
-          </a:prstGeom>
-          <a:noFill/>
-          <a:ln/>
-        </p:spPr>
-        <p:txBody>
-          <a:bodyPr wrap="square" lIns="0" tIns="0" rIns="0" bIns="0" rtlCol="0" anchor="ctr"/>
-          <a:lstStyle/>
-          <a:p>
-            <a:pPr algn="ctr" indent="0" marL="0">
-              <a:buNone/>
-            </a:pPr>
-            <a:r>
-              <a:rPr lang="en-US" sz="1300" dirty="0">
-                <a:solidFill>
-                  <a:srgbClr val="8A97A3"/>
-                </a:solidFill>
-                <a:latin typeface="Meiryo" pitchFamily="34" charset="0"/>
-                <a:ea typeface="Meiryo" pitchFamily="34" charset="-122"/>
-                <a:cs typeface="Meiryo" pitchFamily="34" charset="-120"/>
-              </a:rPr>
-              <a:t>【詳細】</a:t>
-            </a:r>
-            <a:endParaRPr lang="en-US" sz="1300" dirty="0"/>
-          </a:p>
-        </p:txBody>
-      </p:sp>
-      <p:sp>
-        <p:nvSpPr>
-          <p:cNvPr id="16" name="Shape 14"/>
-          <p:cNvSpPr/>
-          <p:nvPr/>
-        </p:nvSpPr>
-        <p:spPr>
-          <a:xfrm>
-            <a:off x="8179308" y="2852928"/>
-            <a:ext cx="329184" cy="329184"/>
-          </a:xfrm>
-          <a:prstGeom prst="ellipse">
-            <a:avLst/>
-          </a:prstGeom>
-          <a:solidFill>
-            <a:srgbClr val="1F3A4D"/>
-          </a:solidFill>
-          <a:ln w="25400">
-            <a:solidFill>
-              <a:srgbClr val="FFFFFF"/>
-            </a:solidFill>
-            <a:prstDash val="solid"/>
-          </a:ln>
-        </p:spPr>
-      </p:sp>
-      <p:sp>
-        <p:nvSpPr>
-          <p:cNvPr id="17" name="Text 15"/>
-          <p:cNvSpPr txBox="1"/>
-          <p:nvPr/>
-        </p:nvSpPr>
-        <p:spPr>
-          <a:xfrm>
-            <a:off x="7338060" y="2194560"/>
-            <a:ext cx="2011680" cy="411480"/>
-          </a:xfrm>
-          <a:prstGeom prst="rect">
-            <a:avLst/>
-          </a:prstGeom>
-          <a:noFill/>
-          <a:ln/>
-        </p:spPr>
-        <p:txBody>
-          <a:bodyPr wrap="square" lIns="0" tIns="0" rIns="0" bIns="0" rtlCol="0" anchor="ctr"/>
-          <a:lstStyle/>
-          <a:p>
-            <a:pPr algn="ctr" indent="0" marL="0">
-              <a:buNone/>
-            </a:pPr>
-            <a:r>
-              <a:rPr lang="en-US" sz="1600" b="1" dirty="0">
-                <a:solidFill>
-                  <a:srgbClr val="1F3A4D"/>
-                </a:solidFill>
-                <a:latin typeface="Meiryo" pitchFamily="34" charset="0"/>
-                <a:ea typeface="Meiryo" pitchFamily="34" charset="-122"/>
-                <a:cs typeface="Meiryo" pitchFamily="34" charset="-120"/>
-              </a:rPr>
-              <a:t>【XX月】</a:t>
-            </a:r>
-            <a:endParaRPr lang="en-US" sz="1600" dirty="0"/>
-          </a:p>
-        </p:txBody>
-      </p:sp>
-      <p:sp>
-        <p:nvSpPr>
-          <p:cNvPr id="18" name="Text 16"/>
-          <p:cNvSpPr txBox="1"/>
-          <p:nvPr/>
-        </p:nvSpPr>
-        <p:spPr>
-          <a:xfrm>
-            <a:off x="7338060" y="3383280"/>
-            <a:ext cx="2011680" cy="411480"/>
-          </a:xfrm>
-          <a:prstGeom prst="rect">
-            <a:avLst/>
-          </a:prstGeom>
-          <a:noFill/>
-          <a:ln/>
-        </p:spPr>
-        <p:txBody>
-          <a:bodyPr wrap="square" lIns="0" tIns="0" rIns="0" bIns="0" rtlCol="0" anchor="ctr"/>
-          <a:lstStyle/>
-          <a:p>
-            <a:pPr algn="ctr" indent="0" marL="0">
-              <a:buNone/>
-            </a:pPr>
-            <a:r>
-              <a:rPr lang="en-US" sz="1500" b="1" dirty="0">
-                <a:solidFill>
-                  <a:srgbClr val="2B2B2B"/>
-                </a:solidFill>
-                <a:latin typeface="Meiryo" pitchFamily="34" charset="0"/>
-                <a:ea typeface="Meiryo" pitchFamily="34" charset="-122"/>
-                <a:cs typeface="Meiryo" pitchFamily="34" charset="-120"/>
-              </a:rPr>
-              <a:t>試行開始</a:t>
-            </a:r>
-            <a:endParaRPr lang="en-US" sz="1500" dirty="0"/>
-          </a:p>
-        </p:txBody>
-      </p:sp>
-      <p:sp>
-        <p:nvSpPr>
-          <p:cNvPr id="19" name="Text 17"/>
-          <p:cNvSpPr txBox="1"/>
-          <p:nvPr/>
-        </p:nvSpPr>
-        <p:spPr>
-          <a:xfrm>
-            <a:off x="7338060" y="3794760"/>
-            <a:ext cx="2011680" cy="365760"/>
-          </a:xfrm>
-          <a:prstGeom prst="rect">
-            <a:avLst/>
-          </a:prstGeom>
-          <a:noFill/>
-          <a:ln/>
-        </p:spPr>
-        <p:txBody>
-          <a:bodyPr wrap="square" lIns="0" tIns="0" rIns="0" bIns="0" rtlCol="0" anchor="ctr"/>
-          <a:lstStyle/>
-          <a:p>
-            <a:pPr algn="ctr" indent="0" marL="0">
-              <a:buNone/>
-            </a:pPr>
-            <a:r>
-              <a:rPr lang="en-US" sz="1300" dirty="0">
-                <a:solidFill>
-                  <a:srgbClr val="8A97A3"/>
-                </a:solidFill>
-                <a:latin typeface="Meiryo" pitchFamily="34" charset="0"/>
-                <a:ea typeface="Meiryo" pitchFamily="34" charset="-122"/>
-                <a:cs typeface="Meiryo" pitchFamily="34" charset="-120"/>
-              </a:rPr>
-              <a:t>【詳細】</a:t>
-            </a:r>
-            <a:endParaRPr lang="en-US" sz="1300" dirty="0"/>
-          </a:p>
-        </p:txBody>
-      </p:sp>
-      <p:sp>
-        <p:nvSpPr>
-          <p:cNvPr id="20" name="Shape 18"/>
-          <p:cNvSpPr/>
-          <p:nvPr/>
-        </p:nvSpPr>
-        <p:spPr>
-          <a:xfrm>
-            <a:off x="10442448" y="2852928"/>
-            <a:ext cx="329184" cy="329184"/>
-          </a:xfrm>
-          <a:prstGeom prst="ellipse">
-            <a:avLst/>
-          </a:prstGeom>
-          <a:solidFill>
-            <a:srgbClr val="1F3A4D"/>
-          </a:solidFill>
-          <a:ln w="25400">
-            <a:solidFill>
-              <a:srgbClr val="FFFFFF"/>
-            </a:solidFill>
-            <a:prstDash val="solid"/>
-          </a:ln>
-        </p:spPr>
-      </p:sp>
-      <p:sp>
-        <p:nvSpPr>
-          <p:cNvPr id="21" name="Text 19"/>
-          <p:cNvSpPr txBox="1"/>
-          <p:nvPr/>
-        </p:nvSpPr>
-        <p:spPr>
-          <a:xfrm>
-            <a:off x="9601200" y="2194560"/>
-            <a:ext cx="2011680" cy="411480"/>
-          </a:xfrm>
-          <a:prstGeom prst="rect">
-            <a:avLst/>
-          </a:prstGeom>
-          <a:noFill/>
-          <a:ln/>
-        </p:spPr>
-        <p:txBody>
-          <a:bodyPr wrap="square" lIns="0" tIns="0" rIns="0" bIns="0" rtlCol="0" anchor="ctr"/>
-          <a:lstStyle/>
-          <a:p>
-            <a:pPr algn="ctr" indent="0" marL="0">
-              <a:buNone/>
-            </a:pPr>
-            <a:r>
-              <a:rPr lang="en-US" sz="1600" b="1" dirty="0">
-                <a:solidFill>
-                  <a:srgbClr val="1F3A4D"/>
-                </a:solidFill>
-                <a:latin typeface="Meiryo" pitchFamily="34" charset="0"/>
-                <a:ea typeface="Meiryo" pitchFamily="34" charset="-122"/>
-                <a:cs typeface="Meiryo" pitchFamily="34" charset="-120"/>
-              </a:rPr>
-              <a:t>【XX月】</a:t>
-            </a:r>
-            <a:endParaRPr lang="en-US" sz="1600" dirty="0"/>
-          </a:p>
-        </p:txBody>
-      </p:sp>
-      <p:sp>
-        <p:nvSpPr>
-          <p:cNvPr id="22" name="Text 20"/>
-          <p:cNvSpPr txBox="1"/>
-          <p:nvPr/>
-        </p:nvSpPr>
-        <p:spPr>
-          <a:xfrm>
-            <a:off x="9601200" y="3383280"/>
-            <a:ext cx="2011680" cy="411480"/>
-          </a:xfrm>
-          <a:prstGeom prst="rect">
-            <a:avLst/>
-          </a:prstGeom>
-          <a:noFill/>
-          <a:ln/>
-        </p:spPr>
-        <p:txBody>
-          <a:bodyPr wrap="square" lIns="0" tIns="0" rIns="0" bIns="0" rtlCol="0" anchor="ctr"/>
-          <a:lstStyle/>
-          <a:p>
-            <a:pPr algn="ctr" indent="0" marL="0">
-              <a:buNone/>
-            </a:pPr>
-            <a:r>
-              <a:rPr lang="en-US" sz="1500" b="1" dirty="0">
-                <a:solidFill>
-                  <a:srgbClr val="2B2B2B"/>
-                </a:solidFill>
-                <a:latin typeface="Meiryo" pitchFamily="34" charset="0"/>
-                <a:ea typeface="Meiryo" pitchFamily="34" charset="-122"/>
-                <a:cs typeface="Meiryo" pitchFamily="34" charset="-120"/>
-              </a:rPr>
-              <a:t>本格運用</a:t>
-            </a:r>
-            <a:endParaRPr lang="en-US" sz="1500" dirty="0"/>
-          </a:p>
-        </p:txBody>
-      </p:sp>
-      <p:sp>
-        <p:nvSpPr>
-          <p:cNvPr id="23" name="Text 21"/>
-          <p:cNvSpPr txBox="1"/>
-          <p:nvPr/>
-        </p:nvSpPr>
-        <p:spPr>
-          <a:xfrm>
-            <a:off x="9601200" y="3794760"/>
-            <a:ext cx="2011680" cy="365760"/>
-          </a:xfrm>
-          <a:prstGeom prst="rect">
-            <a:avLst/>
-          </a:prstGeom>
-          <a:noFill/>
-          <a:ln/>
-        </p:spPr>
-        <p:txBody>
-          <a:bodyPr wrap="square" lIns="0" tIns="0" rIns="0" bIns="0" rtlCol="0" anchor="ctr"/>
-          <a:lstStyle/>
-          <a:p>
-            <a:pPr algn="ctr" indent="0" marL="0">
-              <a:buNone/>
-            </a:pPr>
-            <a:r>
-              <a:rPr lang="en-US" sz="1300" dirty="0">
-                <a:solidFill>
-                  <a:srgbClr val="8A97A3"/>
-                </a:solidFill>
-                <a:latin typeface="Meiryo" pitchFamily="34" charset="0"/>
-                <a:ea typeface="Meiryo" pitchFamily="34" charset="-122"/>
-                <a:cs typeface="Meiryo" pitchFamily="34" charset="-120"/>
-              </a:rPr>
-              <a:t>【詳細】</a:t>
-            </a:r>
-            <a:endParaRPr lang="en-US" sz="1300" dirty="0"/>
-          </a:p>
-        </p:txBody>
-      </p:sp>
-      <p:sp>
-        <p:nvSpPr>
-          <p:cNvPr id="24" name="Text 22"/>
-          <p:cNvSpPr txBox="1"/>
-          <p:nvPr/>
-        </p:nvSpPr>
-        <p:spPr>
-          <a:xfrm>
-            <a:off x="11155680" y="6400800"/>
-            <a:ext cx="548640" cy="274320"/>
-          </a:xfrm>
-          <a:prstGeom prst="rect">
-            <a:avLst/>
-          </a:prstGeom>
-          <a:noFill/>
-          <a:ln/>
-        </p:spPr>
-        <p:txBody>
-          <a:bodyPr wrap="square" lIns="0" tIns="0" rIns="0" bIns="0" rtlCol="0" anchor="ctr"/>
-          <a:lstStyle/>
-          <a:p>
-            <a:pPr algn="r" indent="0" marL="0">
-              <a:buNone/>
-            </a:pPr>
-            <a:r>
-              <a:rPr lang="en-US" sz="1000" dirty="0">
-                <a:solidFill>
-                  <a:srgbClr val="8A97A3"/>
-                </a:solidFill>
-                <a:latin typeface="Meiryo" pitchFamily="34" charset="0"/>
-                <a:ea typeface="Meiryo" pitchFamily="34" charset="-122"/>
-                <a:cs typeface="Meiryo" pitchFamily="34" charset="-120"/>
-              </a:rPr>
-              <a:t>17</a:t>
-            </a:r>
-            <a:endParaRPr lang="en-US" sz="1000" dirty="0"/>
-          </a:p>
-        </p:txBody>
-      </p:sp>
-    </p:spTree>
-  </p:cSld>
-  <p:clrMapOvr>
-    <a:masterClrMapping/>
-  </p:clrMapOvr>
-</p:sld>
-</file>
-
-<file path=ppt/slides/slide18.xml><?xml version="1.0" encoding="utf-8"?>
-<p:sld xmlns:a="http://schemas.openxmlformats.org/drawingml/2006/main" xmlns:r="http://schemas.openxmlformats.org/officeDocument/2006/relationships" xmlns:p="http://schemas.openxmlformats.org/presentationml/2006/main">
-  <p:cSld name="Slide 18">
-    <p:bg>
-      <p:bgPr>
-        <a:solidFill>
-          <a:srgbClr val="FFFFFF"/>
-        </a:solidFill>
-      </p:bgPr>
-    </p:bg>
-    <p:spTree>
-      <p:nvGrpSpPr>
-        <p:cNvPr id="1" name=""/>
-        <p:cNvGrpSpPr/>
-        <p:nvPr/>
-      </p:nvGrpSpPr>
-      <p:grpSpPr>
-        <a:xfrm>
-          <a:off x="0" y="0"/>
-          <a:ext cx="0" cy="0"/>
-          <a:chOff x="0" y="0"/>
-          <a:chExt cx="0" cy="0"/>
-        </a:xfrm>
-      </p:grpSpPr>
-      <p:sp>
-        <p:nvSpPr>
-          <p:cNvPr id="2" name="Text 0"/>
-          <p:cNvSpPr txBox="1"/>
-          <p:nvPr/>
-        </p:nvSpPr>
-        <p:spPr>
-          <a:xfrm>
-            <a:off x="548640" y="365760"/>
-            <a:ext cx="11064240" cy="731520"/>
-          </a:xfrm>
-          <a:prstGeom prst="rect">
-            <a:avLst/>
-          </a:prstGeom>
-          <a:noFill/>
-          <a:ln/>
-        </p:spPr>
-        <p:txBody>
-          <a:bodyPr wrap="square" lIns="0" tIns="0" rIns="0" bIns="0" rtlCol="0" anchor="ctr"/>
-          <a:lstStyle/>
-          <a:p>
-            <a:pPr indent="0" marL="0">
-              <a:buNone/>
-            </a:pPr>
-            <a:r>
-              <a:rPr lang="en-US" sz="3000" b="1" dirty="0">
-                <a:solidFill>
-                  <a:srgbClr val="1F3A4D"/>
-                </a:solidFill>
-                <a:latin typeface="Meiryo" pitchFamily="34" charset="0"/>
-                <a:ea typeface="Meiryo" pitchFamily="34" charset="-122"/>
-                <a:cs typeface="Meiryo" pitchFamily="34" charset="-120"/>
-              </a:rPr>
-              <a:t>決定事項とネクストアクション</a:t>
-            </a:r>
-            <a:endParaRPr lang="en-US" sz="3000" dirty="0"/>
-          </a:p>
-        </p:txBody>
-      </p:sp>
-      <p:sp>
-        <p:nvSpPr>
-          <p:cNvPr id="3" name="Shape 1"/>
-          <p:cNvSpPr/>
-          <p:nvPr/>
-        </p:nvSpPr>
-        <p:spPr>
-          <a:xfrm>
-            <a:off x="548640" y="1463040"/>
-            <a:ext cx="4206240" cy="4480560"/>
-          </a:xfrm>
-          <a:prstGeom prst="roundRect">
-            <a:avLst>
-              <a:gd name="adj" fmla="val 1739"/>
-            </a:avLst>
-          </a:prstGeom>
-          <a:solidFill>
-            <a:srgbClr val="1F3A4D"/>
-          </a:solidFill>
-          <a:ln w="12700">
-            <a:solidFill>
-              <a:srgbClr val="1F3A4D"/>
-            </a:solidFill>
-            <a:prstDash val="solid"/>
-          </a:ln>
-        </p:spPr>
-      </p:sp>
-      <p:sp>
-        <p:nvSpPr>
-          <p:cNvPr id="4" name="Text 2"/>
-          <p:cNvSpPr txBox="1"/>
-          <p:nvPr/>
-        </p:nvSpPr>
-        <p:spPr>
-          <a:xfrm>
-            <a:off x="822960" y="1691640"/>
-            <a:ext cx="3657600" cy="457200"/>
-          </a:xfrm>
-          <a:prstGeom prst="rect">
-            <a:avLst/>
-          </a:prstGeom>
-          <a:noFill/>
-          <a:ln/>
-        </p:spPr>
-        <p:txBody>
-          <a:bodyPr wrap="square" lIns="0" tIns="0" rIns="0" bIns="0" rtlCol="0" anchor="ctr"/>
-          <a:lstStyle/>
-          <a:p>
-            <a:pPr indent="0" marL="0">
-              <a:buNone/>
-            </a:pPr>
-            <a:r>
-              <a:rPr lang="en-US" sz="2000" b="1" dirty="0">
-                <a:solidFill>
-                  <a:srgbClr val="E08E2B"/>
-                </a:solidFill>
-                <a:latin typeface="Meiryo" pitchFamily="34" charset="0"/>
-                <a:ea typeface="Meiryo" pitchFamily="34" charset="-122"/>
-                <a:cs typeface="Meiryo" pitchFamily="34" charset="-120"/>
-              </a:rPr>
-              <a:t>本日の決定事項</a:t>
-            </a:r>
-            <a:endParaRPr lang="en-US" sz="2000" dirty="0"/>
-          </a:p>
-        </p:txBody>
-      </p:sp>
-      <p:sp>
-        <p:nvSpPr>
-          <p:cNvPr id="5" name="Text 3"/>
-          <p:cNvSpPr txBox="1"/>
-          <p:nvPr/>
-        </p:nvSpPr>
-        <p:spPr>
-          <a:xfrm>
-            <a:off x="822960" y="2331720"/>
-            <a:ext cx="3657600" cy="3291840"/>
-          </a:xfrm>
-          <a:prstGeom prst="rect">
-            <a:avLst/>
-          </a:prstGeom>
-          <a:noFill/>
-          <a:ln/>
-        </p:spPr>
-        <p:txBody>
-          <a:bodyPr wrap="square" lIns="0" tIns="0" rIns="0" bIns="0" rtlCol="0" anchor="t"/>
-          <a:lstStyle/>
-          <a:p>
-            <a:pPr marL="342900" indent="-342900">
-              <a:spcAft>
-                <a:spcPts val="1000"/>
-              </a:spcAft>
-              <a:buSzPct val="100000"/>
-              <a:buChar char="•"/>
-            </a:pPr>
-            <a:r>
-              <a:rPr lang="en-US" sz="1500" dirty="0">
-                <a:solidFill>
-                  <a:srgbClr val="D5DEE5"/>
-                </a:solidFill>
-                <a:latin typeface="Meiryo" pitchFamily="34" charset="0"/>
-                <a:ea typeface="Meiryo" pitchFamily="34" charset="-122"/>
-                <a:cs typeface="Meiryo" pitchFamily="34" charset="-120"/>
-              </a:rPr>
-              <a:t>【決定事項1】</a:t>
-            </a:r>
-            <a:endParaRPr lang="en-US" sz="1500" dirty="0"/>
-          </a:p>
-          <a:p>
-            <a:pPr marL="342900" indent="-342900">
-              <a:spcAft>
-                <a:spcPts val="1000"/>
-              </a:spcAft>
-              <a:buSzPct val="100000"/>
-              <a:buChar char="•"/>
-            </a:pPr>
-            <a:r>
-              <a:rPr lang="en-US" sz="1500" dirty="0">
-                <a:solidFill>
-                  <a:srgbClr val="D5DEE5"/>
-                </a:solidFill>
-                <a:latin typeface="Meiryo" pitchFamily="34" charset="0"/>
-                <a:ea typeface="Meiryo" pitchFamily="34" charset="-122"/>
-                <a:cs typeface="Meiryo" pitchFamily="34" charset="-120"/>
-              </a:rPr>
-              <a:t>【決定事項2】</a:t>
-            </a:r>
-            <a:endParaRPr lang="en-US" sz="1500" dirty="0"/>
-          </a:p>
-          <a:p>
-            <a:pPr marL="342900" indent="-342900">
-              <a:spcAft>
-                <a:spcPts val="1000"/>
-              </a:spcAft>
-              <a:buSzPct val="100000"/>
-              <a:buChar char="•"/>
-            </a:pPr>
-            <a:r>
-              <a:rPr lang="en-US" sz="1500" dirty="0">
-                <a:solidFill>
-                  <a:srgbClr val="D5DEE5"/>
-                </a:solidFill>
-                <a:latin typeface="Meiryo" pitchFamily="34" charset="0"/>
-                <a:ea typeface="Meiryo" pitchFamily="34" charset="-122"/>
-                <a:cs typeface="Meiryo" pitchFamily="34" charset="-120"/>
-              </a:rPr>
-              <a:t>【決定事項3】</a:t>
-            </a:r>
-            <a:endParaRPr lang="en-US" sz="1500" dirty="0"/>
-          </a:p>
-        </p:txBody>
-      </p:sp>
-      <p:graphicFrame>
-        <p:nvGraphicFramePr>
-          <p:cNvPr id="19" name="Table 0"/>
-          <p:cNvGraphicFramePr>
-            <a:graphicFrameLocks noGrp="1"/>
-          </p:cNvGraphicFramePr>
-          <p:nvPr>
-            <p:extLst>
-              <p:ext uri="{D42A27DB-BD31-4B8C-83A1-F6EECF244321}">
-                <p14:modId xmlns:p14="http://schemas.microsoft.com/office/powerpoint/2010/main" val="1579011935"/>
-              </p:ext>
-            </p:extLst>
-          </p:nvPr>
-        </p:nvGraphicFramePr>
-        <p:xfrm>
-          <a:off x="5120640" y="1463040"/>
-          <a:ext cx="6492240" cy="914400"/>
-        </p:xfrm>
-        <a:graphic>
-          <a:graphicData uri="http://schemas.openxmlformats.org/drawingml/2006/table">
-            <a:tbl>
-              <a:tblPr/>
-              <a:tblGrid>
-                <a:gridCol w="3749040"/>
-                <a:gridCol w="1371600"/>
-                <a:gridCol w="1371600"/>
-              </a:tblGrid>
-              <a:tr h="548640">
-                <a:tc>
-                  <a:txBody>
-                    <a:bodyPr/>
-                    <a:lstStyle/>
-                    <a:p>
-                      <a:pPr algn="ctr" indent="0" marL="0">
-                        <a:buNone/>
-                      </a:pPr>
-                      <a:r>
-                        <a:rPr lang="en-US" sz="1400" b="1" dirty="0">
-                          <a:solidFill>
-                            <a:srgbClr val="FFFFFF"/>
-                          </a:solidFill>
-                          <a:latin typeface="Meiryo" pitchFamily="34" charset="0"/>
-                          <a:ea typeface="Meiryo" pitchFamily="34" charset="-122"/>
-                          <a:cs typeface="Meiryo" pitchFamily="34" charset="-120"/>
-                        </a:rPr>
-                        <a:t>アクション</a:t>
-                      </a:r>
-                      <a:endParaRPr lang="en-US" sz="1400" dirty="0">
-                        <a:latin typeface="Meiryo" charset="0"/>
-                        <a:ea typeface="Meiryo" charset="0"/>
-                        <a:cs typeface="Meiryo" charset="0"/>
-                      </a:endParaRPr>
-                    </a:p>
-                  </a:txBody>
-                  <a:tcPr marL="91440" marR="91440" marT="45720" marB="45720" anchor="ctr">
-                    <a:lnL w="9525" cap="flat" cmpd="sng" algn="ctr">
-                      <a:solidFill>
-                        <a:srgbClr val="C9D3DB"/>
-                      </a:solidFill>
-                      <a:prstDash val="solid"/>
-                      <a:round/>
-                      <a:headEnd type="none" w="med" len="med"/>
-                      <a:tailEnd type="none" w="med" len="med"/>
-                    </a:lnL>
-                    <a:lnR w="9525" cap="flat" cmpd="sng" algn="ctr">
-                      <a:solidFill>
-                        <a:srgbClr val="C9D3DB"/>
-                      </a:solidFill>
-                      <a:prstDash val="solid"/>
-                      <a:round/>
-                      <a:headEnd type="none" w="med" len="med"/>
-                      <a:tailEnd type="none" w="med" len="med"/>
-                    </a:lnR>
-                    <a:lnT w="9525" cap="flat" cmpd="sng" algn="ctr">
-                      <a:solidFill>
-                        <a:srgbClr val="C9D3DB"/>
-                      </a:solidFill>
-                      <a:prstDash val="solid"/>
-                      <a:round/>
-                      <a:headEnd type="none" w="med" len="med"/>
-                      <a:tailEnd type="none" w="med" len="med"/>
-                    </a:lnT>
-                    <a:lnB w="9525" cap="flat" cmpd="sng" algn="ctr">
-                      <a:solidFill>
-                        <a:srgbClr val="C9D3DB"/>
-                      </a:solidFill>
-                      <a:prstDash val="solid"/>
-                      <a:round/>
-                      <a:headEnd type="none" w="med" len="med"/>
-                      <a:tailEnd type="none" w="med" len="med"/>
-                    </a:lnB>
-                    <a:solidFill>
-                      <a:srgbClr val="1F3A4D"/>
-                    </a:solidFill>
-                  </a:tcPr>
-                </a:tc>
-                <a:tc>
-                  <a:txBody>
-                    <a:bodyPr/>
-                    <a:lstStyle/>
-                    <a:p>
-                      <a:pPr algn="ctr" indent="0" marL="0">
-                        <a:buNone/>
-                      </a:pPr>
-                      <a:r>
-                        <a:rPr lang="en-US" sz="1400" b="1" dirty="0">
-                          <a:solidFill>
-                            <a:srgbClr val="FFFFFF"/>
-                          </a:solidFill>
-                          <a:latin typeface="Meiryo" pitchFamily="34" charset="0"/>
-                          <a:ea typeface="Meiryo" pitchFamily="34" charset="-122"/>
-                          <a:cs typeface="Meiryo" pitchFamily="34" charset="-120"/>
-                        </a:rPr>
-                        <a:t>担当</a:t>
-                      </a:r>
-                      <a:endParaRPr lang="en-US" sz="1400" dirty="0">
-                        <a:latin typeface="Meiryo" charset="0"/>
-                        <a:ea typeface="Meiryo" charset="0"/>
-                        <a:cs typeface="Meiryo" charset="0"/>
-                      </a:endParaRPr>
-                    </a:p>
-                  </a:txBody>
-                  <a:tcPr marL="91440" marR="91440" marT="45720" marB="45720" anchor="ctr">
-                    <a:lnL w="9525" cap="flat" cmpd="sng" algn="ctr">
-                      <a:solidFill>
-                        <a:srgbClr val="C9D3DB"/>
-                      </a:solidFill>
-                      <a:prstDash val="solid"/>
-                      <a:round/>
-                      <a:headEnd type="none" w="med" len="med"/>
-                      <a:tailEnd type="none" w="med" len="med"/>
-                    </a:lnL>
-                    <a:lnR w="9525" cap="flat" cmpd="sng" algn="ctr">
-                      <a:solidFill>
-                        <a:srgbClr val="C9D3DB"/>
-                      </a:solidFill>
-                      <a:prstDash val="solid"/>
-                      <a:round/>
-                      <a:headEnd type="none" w="med" len="med"/>
-                      <a:tailEnd type="none" w="med" len="med"/>
-                    </a:lnR>
-                    <a:lnT w="9525" cap="flat" cmpd="sng" algn="ctr">
-                      <a:solidFill>
-                        <a:srgbClr val="C9D3DB"/>
-                      </a:solidFill>
-                      <a:prstDash val="solid"/>
-                      <a:round/>
-                      <a:headEnd type="none" w="med" len="med"/>
-                      <a:tailEnd type="none" w="med" len="med"/>
-                    </a:lnT>
-                    <a:lnB w="9525" cap="flat" cmpd="sng" algn="ctr">
-                      <a:solidFill>
-                        <a:srgbClr val="C9D3DB"/>
-                      </a:solidFill>
-                      <a:prstDash val="solid"/>
-                      <a:round/>
-                      <a:headEnd type="none" w="med" len="med"/>
-                      <a:tailEnd type="none" w="med" len="med"/>
-                    </a:lnB>
-                    <a:solidFill>
-                      <a:srgbClr val="1F3A4D"/>
-                    </a:solidFill>
-                  </a:tcPr>
-                </a:tc>
-                <a:tc>
-                  <a:txBody>
-                    <a:bodyPr/>
-                    <a:lstStyle/>
-                    <a:p>
-                      <a:pPr algn="ctr" indent="0" marL="0">
-                        <a:buNone/>
-                      </a:pPr>
-                      <a:r>
-                        <a:rPr lang="en-US" sz="1400" b="1" dirty="0">
-                          <a:solidFill>
-                            <a:srgbClr val="FFFFFF"/>
-                          </a:solidFill>
-                          <a:latin typeface="Meiryo" pitchFamily="34" charset="0"/>
-                          <a:ea typeface="Meiryo" pitchFamily="34" charset="-122"/>
-                          <a:cs typeface="Meiryo" pitchFamily="34" charset="-120"/>
-                        </a:rPr>
-                        <a:t>期限</a:t>
-                      </a:r>
-                      <a:endParaRPr lang="en-US" sz="1400" dirty="0">
-                        <a:latin typeface="Meiryo" charset="0"/>
-                        <a:ea typeface="Meiryo" charset="0"/>
-                        <a:cs typeface="Meiryo" charset="0"/>
-                      </a:endParaRPr>
-                    </a:p>
-                  </a:txBody>
-                  <a:tcPr marL="91440" marR="91440" marT="45720" marB="45720" anchor="ctr">
-                    <a:lnL w="9525" cap="flat" cmpd="sng" algn="ctr">
-                      <a:solidFill>
-                        <a:srgbClr val="C9D3DB"/>
-                      </a:solidFill>
-                      <a:prstDash val="solid"/>
-                      <a:round/>
-                      <a:headEnd type="none" w="med" len="med"/>
-                      <a:tailEnd type="none" w="med" len="med"/>
-                    </a:lnL>
-                    <a:lnR w="9525" cap="flat" cmpd="sng" algn="ctr">
-                      <a:solidFill>
-                        <a:srgbClr val="C9D3DB"/>
-                      </a:solidFill>
-                      <a:prstDash val="solid"/>
-                      <a:round/>
-                      <a:headEnd type="none" w="med" len="med"/>
-                      <a:tailEnd type="none" w="med" len="med"/>
-                    </a:lnR>
-                    <a:lnT w="9525" cap="flat" cmpd="sng" algn="ctr">
-                      <a:solidFill>
-                        <a:srgbClr val="C9D3DB"/>
-                      </a:solidFill>
-                      <a:prstDash val="solid"/>
-                      <a:round/>
-                      <a:headEnd type="none" w="med" len="med"/>
-                      <a:tailEnd type="none" w="med" len="med"/>
-                    </a:lnT>
-                    <a:lnB w="9525" cap="flat" cmpd="sng" algn="ctr">
-                      <a:solidFill>
-                        <a:srgbClr val="C9D3DB"/>
-                      </a:solidFill>
-                      <a:prstDash val="solid"/>
-                      <a:round/>
-                      <a:headEnd type="none" w="med" len="med"/>
-                      <a:tailEnd type="none" w="med" len="med"/>
-                    </a:lnB>
-                    <a:solidFill>
-                      <a:srgbClr val="1F3A4D"/>
-                    </a:solidFill>
-                  </a:tcPr>
-                </a:tc>
-              </a:tr>
-              <a:tr h="548640">
-                <a:tc>
-                  <a:txBody>
-                    <a:bodyPr/>
-                    <a:lstStyle/>
-                    <a:p>
-                      <a:pPr indent="0" marL="0">
-                        <a:buNone/>
-                      </a:pPr>
-                      <a:r>
-                        <a:rPr lang="en-US" sz="1400" dirty="0">
-                          <a:solidFill>
-                            <a:srgbClr val="8A97A3"/>
-                          </a:solidFill>
-                          <a:latin typeface="Meiryo" pitchFamily="34" charset="0"/>
-                          <a:ea typeface="Meiryo" pitchFamily="34" charset="-122"/>
-                          <a:cs typeface="Meiryo" pitchFamily="34" charset="-120"/>
-                        </a:rPr>
-                        <a:t>【アクション1】</a:t>
-                      </a:r>
-                      <a:endParaRPr lang="en-US" sz="1400" dirty="0">
-                        <a:latin typeface="Meiryo" charset="0"/>
-                        <a:ea typeface="Meiryo" charset="0"/>
-                        <a:cs typeface="Meiryo" charset="0"/>
-                      </a:endParaRPr>
-                    </a:p>
-                  </a:txBody>
-                  <a:tcPr marL="91440" marR="91440" marT="45720" marB="45720" anchor="ctr">
-                    <a:lnL w="9525" cap="flat" cmpd="sng" algn="ctr">
-                      <a:solidFill>
-                        <a:srgbClr val="C9D3DB"/>
-                      </a:solidFill>
-                      <a:prstDash val="solid"/>
-                      <a:round/>
-                      <a:headEnd type="none" w="med" len="med"/>
-                      <a:tailEnd type="none" w="med" len="med"/>
-                    </a:lnL>
-                    <a:lnR w="9525" cap="flat" cmpd="sng" algn="ctr">
-                      <a:solidFill>
-                        <a:srgbClr val="C9D3DB"/>
-                      </a:solidFill>
-                      <a:prstDash val="solid"/>
-                      <a:round/>
-                      <a:headEnd type="none" w="med" len="med"/>
-                      <a:tailEnd type="none" w="med" len="med"/>
-                    </a:lnR>
-                    <a:lnT w="9525" cap="flat" cmpd="sng" algn="ctr">
-                      <a:solidFill>
-                        <a:srgbClr val="C9D3DB"/>
-                      </a:solidFill>
-                      <a:prstDash val="solid"/>
-                      <a:round/>
-                      <a:headEnd type="none" w="med" len="med"/>
-                      <a:tailEnd type="none" w="med" len="med"/>
-                    </a:lnT>
-                    <a:lnB w="9525" cap="flat" cmpd="sng" algn="ctr">
-                      <a:solidFill>
-                        <a:srgbClr val="C9D3DB"/>
-                      </a:solidFill>
-                      <a:prstDash val="solid"/>
-                      <a:round/>
-                      <a:headEnd type="none" w="med" len="med"/>
-                      <a:tailEnd type="none" w="med" len="med"/>
-                    </a:lnB>
-                  </a:tcPr>
-                </a:tc>
-                <a:tc>
-                  <a:txBody>
-                    <a:bodyPr/>
-                    <a:lstStyle/>
-                    <a:p>
-                      <a:pPr algn="ctr" indent="0" marL="0">
-                        <a:buNone/>
-                      </a:pPr>
-                      <a:r>
-                        <a:rPr lang="en-US" sz="1400" dirty="0">
-                          <a:solidFill>
-                            <a:srgbClr val="8A97A3"/>
-                          </a:solidFill>
-                          <a:latin typeface="Meiryo" pitchFamily="34" charset="0"/>
-                          <a:ea typeface="Meiryo" pitchFamily="34" charset="-122"/>
-                          <a:cs typeface="Meiryo" pitchFamily="34" charset="-120"/>
-                        </a:rPr>
-                        <a:t>【担当】</a:t>
-                      </a:r>
-                      <a:endParaRPr lang="en-US" sz="1400" dirty="0">
-                        <a:latin typeface="Meiryo" charset="0"/>
-                        <a:ea typeface="Meiryo" charset="0"/>
-                        <a:cs typeface="Meiryo" charset="0"/>
-                      </a:endParaRPr>
-                    </a:p>
-                  </a:txBody>
-                  <a:tcPr marL="91440" marR="91440" marT="45720" marB="45720" anchor="ctr">
-                    <a:lnL w="9525" cap="flat" cmpd="sng" algn="ctr">
-                      <a:solidFill>
-                        <a:srgbClr val="C9D3DB"/>
-                      </a:solidFill>
-                      <a:prstDash val="solid"/>
-                      <a:round/>
-                      <a:headEnd type="none" w="med" len="med"/>
-                      <a:tailEnd type="none" w="med" len="med"/>
-                    </a:lnL>
-                    <a:lnR w="9525" cap="flat" cmpd="sng" algn="ctr">
-                      <a:solidFill>
-                        <a:srgbClr val="C9D3DB"/>
-                      </a:solidFill>
-                      <a:prstDash val="solid"/>
-                      <a:round/>
-                      <a:headEnd type="none" w="med" len="med"/>
-                      <a:tailEnd type="none" w="med" len="med"/>
-                    </a:lnR>
-                    <a:lnT w="9525" cap="flat" cmpd="sng" algn="ctr">
-                      <a:solidFill>
-                        <a:srgbClr val="C9D3DB"/>
-                      </a:solidFill>
-                      <a:prstDash val="solid"/>
-                      <a:round/>
-                      <a:headEnd type="none" w="med" len="med"/>
-                      <a:tailEnd type="none" w="med" len="med"/>
-                    </a:lnT>
-                    <a:lnB w="9525" cap="flat" cmpd="sng" algn="ctr">
-                      <a:solidFill>
-                        <a:srgbClr val="C9D3DB"/>
-                      </a:solidFill>
-                      <a:prstDash val="solid"/>
-                      <a:round/>
-                      <a:headEnd type="none" w="med" len="med"/>
-                      <a:tailEnd type="none" w="med" len="med"/>
-                    </a:lnB>
-                  </a:tcPr>
-                </a:tc>
-                <a:tc>
-                  <a:txBody>
-                    <a:bodyPr/>
-                    <a:lstStyle/>
-                    <a:p>
-                      <a:pPr algn="ctr" indent="0" marL="0">
-                        <a:buNone/>
-                      </a:pPr>
-                      <a:r>
-                        <a:rPr lang="en-US" sz="1400" dirty="0">
-                          <a:solidFill>
-                            <a:srgbClr val="8A97A3"/>
-                          </a:solidFill>
-                          <a:latin typeface="Meiryo" pitchFamily="34" charset="0"/>
-                          <a:ea typeface="Meiryo" pitchFamily="34" charset="-122"/>
-                          <a:cs typeface="Meiryo" pitchFamily="34" charset="-120"/>
-                        </a:rPr>
-                        <a:t>【XX/XX】</a:t>
-                      </a:r>
-                      <a:endParaRPr lang="en-US" sz="1400" dirty="0">
-                        <a:latin typeface="Meiryo" charset="0"/>
-                        <a:ea typeface="Meiryo" charset="0"/>
-                        <a:cs typeface="Meiryo" charset="0"/>
-                      </a:endParaRPr>
-                    </a:p>
-                  </a:txBody>
-                  <a:tcPr marL="91440" marR="91440" marT="45720" marB="45720" anchor="ctr">
-                    <a:lnL w="9525" cap="flat" cmpd="sng" algn="ctr">
-                      <a:solidFill>
-                        <a:srgbClr val="C9D3DB"/>
-                      </a:solidFill>
-                      <a:prstDash val="solid"/>
-                      <a:round/>
-                      <a:headEnd type="none" w="med" len="med"/>
-                      <a:tailEnd type="none" w="med" len="med"/>
-                    </a:lnL>
-                    <a:lnR w="9525" cap="flat" cmpd="sng" algn="ctr">
-                      <a:solidFill>
-                        <a:srgbClr val="C9D3DB"/>
-                      </a:solidFill>
-                      <a:prstDash val="solid"/>
-                      <a:round/>
-                      <a:headEnd type="none" w="med" len="med"/>
-                      <a:tailEnd type="none" w="med" len="med"/>
-                    </a:lnR>
-                    <a:lnT w="9525" cap="flat" cmpd="sng" algn="ctr">
-                      <a:solidFill>
-                        <a:srgbClr val="C9D3DB"/>
-                      </a:solidFill>
-                      <a:prstDash val="solid"/>
-                      <a:round/>
-                      <a:headEnd type="none" w="med" len="med"/>
-                      <a:tailEnd type="none" w="med" len="med"/>
-                    </a:lnT>
-                    <a:lnB w="9525" cap="flat" cmpd="sng" algn="ctr">
-                      <a:solidFill>
-                        <a:srgbClr val="C9D3DB"/>
-                      </a:solidFill>
-                      <a:prstDash val="solid"/>
-                      <a:round/>
-                      <a:headEnd type="none" w="med" len="med"/>
-                      <a:tailEnd type="none" w="med" len="med"/>
-                    </a:lnB>
-                  </a:tcPr>
-                </a:tc>
-              </a:tr>
-              <a:tr h="548640">
-                <a:tc>
-                  <a:txBody>
-                    <a:bodyPr/>
-                    <a:lstStyle/>
-                    <a:p>
-                      <a:pPr indent="0" marL="0">
-                        <a:buNone/>
-                      </a:pPr>
-                      <a:r>
-                        <a:rPr lang="en-US" sz="1400" dirty="0">
-                          <a:solidFill>
-                            <a:srgbClr val="8A97A3"/>
-                          </a:solidFill>
-                          <a:latin typeface="Meiryo" pitchFamily="34" charset="0"/>
-                          <a:ea typeface="Meiryo" pitchFamily="34" charset="-122"/>
-                          <a:cs typeface="Meiryo" pitchFamily="34" charset="-120"/>
-                        </a:rPr>
-                        <a:t>【アクション2】</a:t>
-                      </a:r>
-                      <a:endParaRPr lang="en-US" sz="1400" dirty="0">
-                        <a:latin typeface="Meiryo" charset="0"/>
-                        <a:ea typeface="Meiryo" charset="0"/>
-                        <a:cs typeface="Meiryo" charset="0"/>
-                      </a:endParaRPr>
-                    </a:p>
-                  </a:txBody>
-                  <a:tcPr marL="91440" marR="91440" marT="45720" marB="45720" anchor="ctr">
-                    <a:lnL w="9525" cap="flat" cmpd="sng" algn="ctr">
-                      <a:solidFill>
-                        <a:srgbClr val="C9D3DB"/>
-                      </a:solidFill>
-                      <a:prstDash val="solid"/>
-                      <a:round/>
-                      <a:headEnd type="none" w="med" len="med"/>
-                      <a:tailEnd type="none" w="med" len="med"/>
-                    </a:lnL>
-                    <a:lnR w="9525" cap="flat" cmpd="sng" algn="ctr">
-                      <a:solidFill>
-                        <a:srgbClr val="C9D3DB"/>
-                      </a:solidFill>
-                      <a:prstDash val="solid"/>
-                      <a:round/>
-                      <a:headEnd type="none" w="med" len="med"/>
-                      <a:tailEnd type="none" w="med" len="med"/>
-                    </a:lnR>
-                    <a:lnT w="9525" cap="flat" cmpd="sng" algn="ctr">
-                      <a:solidFill>
-                        <a:srgbClr val="C9D3DB"/>
-                      </a:solidFill>
-                      <a:prstDash val="solid"/>
-                      <a:round/>
-                      <a:headEnd type="none" w="med" len="med"/>
-                      <a:tailEnd type="none" w="med" len="med"/>
-                    </a:lnT>
-                    <a:lnB w="9525" cap="flat" cmpd="sng" algn="ctr">
-                      <a:solidFill>
-                        <a:srgbClr val="C9D3DB"/>
-                      </a:solidFill>
-                      <a:prstDash val="solid"/>
-                      <a:round/>
-                      <a:headEnd type="none" w="med" len="med"/>
-                      <a:tailEnd type="none" w="med" len="med"/>
-                    </a:lnB>
-                  </a:tcPr>
-                </a:tc>
-                <a:tc>
-                  <a:txBody>
-                    <a:bodyPr/>
-                    <a:lstStyle/>
-                    <a:p>
-                      <a:pPr algn="ctr" indent="0" marL="0">
-                        <a:buNone/>
-                      </a:pPr>
-                      <a:r>
-                        <a:rPr lang="en-US" sz="1400" dirty="0">
-                          <a:solidFill>
-                            <a:srgbClr val="8A97A3"/>
-                          </a:solidFill>
-                          <a:latin typeface="Meiryo" pitchFamily="34" charset="0"/>
-                          <a:ea typeface="Meiryo" pitchFamily="34" charset="-122"/>
-                          <a:cs typeface="Meiryo" pitchFamily="34" charset="-120"/>
-                        </a:rPr>
-                        <a:t>【担当】</a:t>
-                      </a:r>
-                      <a:endParaRPr lang="en-US" sz="1400" dirty="0">
-                        <a:latin typeface="Meiryo" charset="0"/>
-                        <a:ea typeface="Meiryo" charset="0"/>
-                        <a:cs typeface="Meiryo" charset="0"/>
-                      </a:endParaRPr>
-                    </a:p>
-                  </a:txBody>
-                  <a:tcPr marL="91440" marR="91440" marT="45720" marB="45720" anchor="ctr">
-                    <a:lnL w="9525" cap="flat" cmpd="sng" algn="ctr">
-                      <a:solidFill>
-                        <a:srgbClr val="C9D3DB"/>
-                      </a:solidFill>
-                      <a:prstDash val="solid"/>
-                      <a:round/>
-                      <a:headEnd type="none" w="med" len="med"/>
-                      <a:tailEnd type="none" w="med" len="med"/>
-                    </a:lnL>
-                    <a:lnR w="9525" cap="flat" cmpd="sng" algn="ctr">
-                      <a:solidFill>
-                        <a:srgbClr val="C9D3DB"/>
-                      </a:solidFill>
-                      <a:prstDash val="solid"/>
-                      <a:round/>
-                      <a:headEnd type="none" w="med" len="med"/>
-                      <a:tailEnd type="none" w="med" len="med"/>
-                    </a:lnR>
-                    <a:lnT w="9525" cap="flat" cmpd="sng" algn="ctr">
-                      <a:solidFill>
-                        <a:srgbClr val="C9D3DB"/>
-                      </a:solidFill>
-                      <a:prstDash val="solid"/>
-                      <a:round/>
-                      <a:headEnd type="none" w="med" len="med"/>
-                      <a:tailEnd type="none" w="med" len="med"/>
-                    </a:lnT>
-                    <a:lnB w="9525" cap="flat" cmpd="sng" algn="ctr">
-                      <a:solidFill>
-                        <a:srgbClr val="C9D3DB"/>
-                      </a:solidFill>
-                      <a:prstDash val="solid"/>
-                      <a:round/>
-                      <a:headEnd type="none" w="med" len="med"/>
-                      <a:tailEnd type="none" w="med" len="med"/>
-                    </a:lnB>
-                  </a:tcPr>
-                </a:tc>
-                <a:tc>
-                  <a:txBody>
-                    <a:bodyPr/>
-                    <a:lstStyle/>
-                    <a:p>
-                      <a:pPr algn="ctr" indent="0" marL="0">
-                        <a:buNone/>
-                      </a:pPr>
-                      <a:r>
-                        <a:rPr lang="en-US" sz="1400" dirty="0">
-                          <a:solidFill>
-                            <a:srgbClr val="8A97A3"/>
-                          </a:solidFill>
-                          <a:latin typeface="Meiryo" pitchFamily="34" charset="0"/>
-                          <a:ea typeface="Meiryo" pitchFamily="34" charset="-122"/>
-                          <a:cs typeface="Meiryo" pitchFamily="34" charset="-120"/>
-                        </a:rPr>
-                        <a:t>【XX/XX】</a:t>
-                      </a:r>
-                      <a:endParaRPr lang="en-US" sz="1400" dirty="0">
-                        <a:latin typeface="Meiryo" charset="0"/>
-                        <a:ea typeface="Meiryo" charset="0"/>
-                        <a:cs typeface="Meiryo" charset="0"/>
-                      </a:endParaRPr>
-                    </a:p>
-                  </a:txBody>
-                  <a:tcPr marL="91440" marR="91440" marT="45720" marB="45720" anchor="ctr">
-                    <a:lnL w="9525" cap="flat" cmpd="sng" algn="ctr">
-                      <a:solidFill>
-                        <a:srgbClr val="C9D3DB"/>
-                      </a:solidFill>
-                      <a:prstDash val="solid"/>
-                      <a:round/>
-                      <a:headEnd type="none" w="med" len="med"/>
-                      <a:tailEnd type="none" w="med" len="med"/>
-                    </a:lnL>
-                    <a:lnR w="9525" cap="flat" cmpd="sng" algn="ctr">
-                      <a:solidFill>
-                        <a:srgbClr val="C9D3DB"/>
-                      </a:solidFill>
-                      <a:prstDash val="solid"/>
-                      <a:round/>
-                      <a:headEnd type="none" w="med" len="med"/>
-                      <a:tailEnd type="none" w="med" len="med"/>
-                    </a:lnR>
-                    <a:lnT w="9525" cap="flat" cmpd="sng" algn="ctr">
-                      <a:solidFill>
-                        <a:srgbClr val="C9D3DB"/>
-                      </a:solidFill>
-                      <a:prstDash val="solid"/>
-                      <a:round/>
-                      <a:headEnd type="none" w="med" len="med"/>
-                      <a:tailEnd type="none" w="med" len="med"/>
-                    </a:lnT>
-                    <a:lnB w="9525" cap="flat" cmpd="sng" algn="ctr">
-                      <a:solidFill>
-                        <a:srgbClr val="C9D3DB"/>
-                      </a:solidFill>
-                      <a:prstDash val="solid"/>
-                      <a:round/>
-                      <a:headEnd type="none" w="med" len="med"/>
-                      <a:tailEnd type="none" w="med" len="med"/>
-                    </a:lnB>
-                  </a:tcPr>
-                </a:tc>
-              </a:tr>
-              <a:tr h="548640">
-                <a:tc>
-                  <a:txBody>
-                    <a:bodyPr/>
-                    <a:lstStyle/>
-                    <a:p>
-                      <a:pPr indent="0" marL="0">
-                        <a:buNone/>
-                      </a:pPr>
-                      <a:r>
-                        <a:rPr lang="en-US" sz="1400" dirty="0">
-                          <a:solidFill>
-                            <a:srgbClr val="8A97A3"/>
-                          </a:solidFill>
-                          <a:latin typeface="Meiryo" pitchFamily="34" charset="0"/>
-                          <a:ea typeface="Meiryo" pitchFamily="34" charset="-122"/>
-                          <a:cs typeface="Meiryo" pitchFamily="34" charset="-120"/>
-                        </a:rPr>
-                        <a:t>【アクション3】</a:t>
-                      </a:r>
-                      <a:endParaRPr lang="en-US" sz="1400" dirty="0">
-                        <a:latin typeface="Meiryo" charset="0"/>
-                        <a:ea typeface="Meiryo" charset="0"/>
-                        <a:cs typeface="Meiryo" charset="0"/>
-                      </a:endParaRPr>
-                    </a:p>
-                  </a:txBody>
-                  <a:tcPr marL="91440" marR="91440" marT="45720" marB="45720" anchor="ctr">
-                    <a:lnL w="9525" cap="flat" cmpd="sng" algn="ctr">
-                      <a:solidFill>
-                        <a:srgbClr val="C9D3DB"/>
-                      </a:solidFill>
-                      <a:prstDash val="solid"/>
-                      <a:round/>
-                      <a:headEnd type="none" w="med" len="med"/>
-                      <a:tailEnd type="none" w="med" len="med"/>
-                    </a:lnL>
-                    <a:lnR w="9525" cap="flat" cmpd="sng" algn="ctr">
-                      <a:solidFill>
-                        <a:srgbClr val="C9D3DB"/>
-                      </a:solidFill>
-                      <a:prstDash val="solid"/>
-                      <a:round/>
-                      <a:headEnd type="none" w="med" len="med"/>
-                      <a:tailEnd type="none" w="med" len="med"/>
-                    </a:lnR>
-                    <a:lnT w="9525" cap="flat" cmpd="sng" algn="ctr">
-                      <a:solidFill>
-                        <a:srgbClr val="C9D3DB"/>
-                      </a:solidFill>
-                      <a:prstDash val="solid"/>
-                      <a:round/>
-                      <a:headEnd type="none" w="med" len="med"/>
-                      <a:tailEnd type="none" w="med" len="med"/>
-                    </a:lnT>
-                    <a:lnB w="9525" cap="flat" cmpd="sng" algn="ctr">
-                      <a:solidFill>
-                        <a:srgbClr val="C9D3DB"/>
-                      </a:solidFill>
-                      <a:prstDash val="solid"/>
-                      <a:round/>
-                      <a:headEnd type="none" w="med" len="med"/>
-                      <a:tailEnd type="none" w="med" len="med"/>
-                    </a:lnB>
-                  </a:tcPr>
-                </a:tc>
-                <a:tc>
-                  <a:txBody>
-                    <a:bodyPr/>
-                    <a:lstStyle/>
-                    <a:p>
-                      <a:pPr algn="ctr" indent="0" marL="0">
-                        <a:buNone/>
-                      </a:pPr>
-                      <a:r>
-                        <a:rPr lang="en-US" sz="1400" dirty="0">
-                          <a:solidFill>
-                            <a:srgbClr val="8A97A3"/>
-                          </a:solidFill>
-                          <a:latin typeface="Meiryo" pitchFamily="34" charset="0"/>
-                          <a:ea typeface="Meiryo" pitchFamily="34" charset="-122"/>
-                          <a:cs typeface="Meiryo" pitchFamily="34" charset="-120"/>
-                        </a:rPr>
-                        <a:t>【担当】</a:t>
-                      </a:r>
-                      <a:endParaRPr lang="en-US" sz="1400" dirty="0">
-                        <a:latin typeface="Meiryo" charset="0"/>
-                        <a:ea typeface="Meiryo" charset="0"/>
-                        <a:cs typeface="Meiryo" charset="0"/>
-                      </a:endParaRPr>
-                    </a:p>
-                  </a:txBody>
-                  <a:tcPr marL="91440" marR="91440" marT="45720" marB="45720" anchor="ctr">
-                    <a:lnL w="9525" cap="flat" cmpd="sng" algn="ctr">
-                      <a:solidFill>
-                        <a:srgbClr val="C9D3DB"/>
-                      </a:solidFill>
-                      <a:prstDash val="solid"/>
-                      <a:round/>
-                      <a:headEnd type="none" w="med" len="med"/>
-                      <a:tailEnd type="none" w="med" len="med"/>
-                    </a:lnL>
-                    <a:lnR w="9525" cap="flat" cmpd="sng" algn="ctr">
-                      <a:solidFill>
-                        <a:srgbClr val="C9D3DB"/>
-                      </a:solidFill>
-                      <a:prstDash val="solid"/>
-                      <a:round/>
-                      <a:headEnd type="none" w="med" len="med"/>
-                      <a:tailEnd type="none" w="med" len="med"/>
-                    </a:lnR>
-                    <a:lnT w="9525" cap="flat" cmpd="sng" algn="ctr">
-                      <a:solidFill>
-                        <a:srgbClr val="C9D3DB"/>
-                      </a:solidFill>
-                      <a:prstDash val="solid"/>
-                      <a:round/>
-                      <a:headEnd type="none" w="med" len="med"/>
-                      <a:tailEnd type="none" w="med" len="med"/>
-                    </a:lnT>
-                    <a:lnB w="9525" cap="flat" cmpd="sng" algn="ctr">
-                      <a:solidFill>
-                        <a:srgbClr val="C9D3DB"/>
-                      </a:solidFill>
-                      <a:prstDash val="solid"/>
-                      <a:round/>
-                      <a:headEnd type="none" w="med" len="med"/>
-                      <a:tailEnd type="none" w="med" len="med"/>
-                    </a:lnB>
-                  </a:tcPr>
-                </a:tc>
-                <a:tc>
-                  <a:txBody>
-                    <a:bodyPr/>
-                    <a:lstStyle/>
-                    <a:p>
-                      <a:pPr algn="ctr" indent="0" marL="0">
-                        <a:buNone/>
-                      </a:pPr>
-                      <a:r>
-                        <a:rPr lang="en-US" sz="1400" dirty="0">
-                          <a:solidFill>
-                            <a:srgbClr val="8A97A3"/>
-                          </a:solidFill>
-                          <a:latin typeface="Meiryo" pitchFamily="34" charset="0"/>
-                          <a:ea typeface="Meiryo" pitchFamily="34" charset="-122"/>
-                          <a:cs typeface="Meiryo" pitchFamily="34" charset="-120"/>
-                        </a:rPr>
-                        <a:t>【XX/XX】</a:t>
-                      </a:r>
-                      <a:endParaRPr lang="en-US" sz="1400" dirty="0">
-                        <a:latin typeface="Meiryo" charset="0"/>
-                        <a:ea typeface="Meiryo" charset="0"/>
-                        <a:cs typeface="Meiryo" charset="0"/>
-                      </a:endParaRPr>
-                    </a:p>
-                  </a:txBody>
-                  <a:tcPr marL="91440" marR="91440" marT="45720" marB="45720" anchor="ctr">
-                    <a:lnL w="9525" cap="flat" cmpd="sng" algn="ctr">
-                      <a:solidFill>
-                        <a:srgbClr val="C9D3DB"/>
-                      </a:solidFill>
-                      <a:prstDash val="solid"/>
-                      <a:round/>
-                      <a:headEnd type="none" w="med" len="med"/>
-                      <a:tailEnd type="none" w="med" len="med"/>
-                    </a:lnL>
-                    <a:lnR w="9525" cap="flat" cmpd="sng" algn="ctr">
-                      <a:solidFill>
-                        <a:srgbClr val="C9D3DB"/>
-                      </a:solidFill>
-                      <a:prstDash val="solid"/>
-                      <a:round/>
-                      <a:headEnd type="none" w="med" len="med"/>
-                      <a:tailEnd type="none" w="med" len="med"/>
-                    </a:lnR>
-                    <a:lnT w="9525" cap="flat" cmpd="sng" algn="ctr">
-                      <a:solidFill>
-                        <a:srgbClr val="C9D3DB"/>
-                      </a:solidFill>
-                      <a:prstDash val="solid"/>
-                      <a:round/>
-                      <a:headEnd type="none" w="med" len="med"/>
-                      <a:tailEnd type="none" w="med" len="med"/>
-                    </a:lnT>
-                    <a:lnB w="9525" cap="flat" cmpd="sng" algn="ctr">
-                      <a:solidFill>
-                        <a:srgbClr val="C9D3DB"/>
-                      </a:solidFill>
-                      <a:prstDash val="solid"/>
-                      <a:round/>
-                      <a:headEnd type="none" w="med" len="med"/>
-                      <a:tailEnd type="none" w="med" len="med"/>
-                    </a:lnB>
-                  </a:tcPr>
-                </a:tc>
-              </a:tr>
-              <a:tr h="548640">
-                <a:tc>
-                  <a:txBody>
-                    <a:bodyPr/>
-                    <a:lstStyle/>
-                    <a:p>
-                      <a:pPr indent="0" marL="0">
-                        <a:buNone/>
-                      </a:pPr>
-                      <a:r>
-                        <a:rPr lang="en-US" sz="1400" dirty="0">
-                          <a:solidFill>
-                            <a:srgbClr val="8A97A3"/>
-                          </a:solidFill>
-                          <a:latin typeface="Meiryo" pitchFamily="34" charset="0"/>
-                          <a:ea typeface="Meiryo" pitchFamily="34" charset="-122"/>
-                          <a:cs typeface="Meiryo" pitchFamily="34" charset="-120"/>
-                        </a:rPr>
-                        <a:t>【アクション4】</a:t>
-                      </a:r>
-                      <a:endParaRPr lang="en-US" sz="1400" dirty="0">
-                        <a:latin typeface="Meiryo" charset="0"/>
-                        <a:ea typeface="Meiryo" charset="0"/>
-                        <a:cs typeface="Meiryo" charset="0"/>
-                      </a:endParaRPr>
-                    </a:p>
-                  </a:txBody>
-                  <a:tcPr marL="91440" marR="91440" marT="45720" marB="45720" anchor="ctr">
-                    <a:lnL w="9525" cap="flat" cmpd="sng" algn="ctr">
-                      <a:solidFill>
-                        <a:srgbClr val="C9D3DB"/>
-                      </a:solidFill>
-                      <a:prstDash val="solid"/>
-                      <a:round/>
-                      <a:headEnd type="none" w="med" len="med"/>
-                      <a:tailEnd type="none" w="med" len="med"/>
-                    </a:lnL>
-                    <a:lnR w="9525" cap="flat" cmpd="sng" algn="ctr">
-                      <a:solidFill>
-                        <a:srgbClr val="C9D3DB"/>
-                      </a:solidFill>
-                      <a:prstDash val="solid"/>
-                      <a:round/>
-                      <a:headEnd type="none" w="med" len="med"/>
-                      <a:tailEnd type="none" w="med" len="med"/>
-                    </a:lnR>
-                    <a:lnT w="9525" cap="flat" cmpd="sng" algn="ctr">
-                      <a:solidFill>
-                        <a:srgbClr val="C9D3DB"/>
-                      </a:solidFill>
-                      <a:prstDash val="solid"/>
-                      <a:round/>
-                      <a:headEnd type="none" w="med" len="med"/>
-                      <a:tailEnd type="none" w="med" len="med"/>
-                    </a:lnT>
-                    <a:lnB w="9525" cap="flat" cmpd="sng" algn="ctr">
-                      <a:solidFill>
-                        <a:srgbClr val="C9D3DB"/>
-                      </a:solidFill>
-                      <a:prstDash val="solid"/>
-                      <a:round/>
-                      <a:headEnd type="none" w="med" len="med"/>
-                      <a:tailEnd type="none" w="med" len="med"/>
-                    </a:lnB>
-                  </a:tcPr>
-                </a:tc>
-                <a:tc>
-                  <a:txBody>
-                    <a:bodyPr/>
-                    <a:lstStyle/>
-                    <a:p>
-                      <a:pPr algn="ctr" indent="0" marL="0">
-                        <a:buNone/>
-                      </a:pPr>
-                      <a:r>
-                        <a:rPr lang="en-US" sz="1400" dirty="0">
-                          <a:solidFill>
-                            <a:srgbClr val="8A97A3"/>
-                          </a:solidFill>
-                          <a:latin typeface="Meiryo" pitchFamily="34" charset="0"/>
-                          <a:ea typeface="Meiryo" pitchFamily="34" charset="-122"/>
-                          <a:cs typeface="Meiryo" pitchFamily="34" charset="-120"/>
-                        </a:rPr>
-                        <a:t>【担当】</a:t>
-                      </a:r>
-                      <a:endParaRPr lang="en-US" sz="1400" dirty="0">
-                        <a:latin typeface="Meiryo" charset="0"/>
-                        <a:ea typeface="Meiryo" charset="0"/>
-                        <a:cs typeface="Meiryo" charset="0"/>
-                      </a:endParaRPr>
-                    </a:p>
-                  </a:txBody>
-                  <a:tcPr marL="91440" marR="91440" marT="45720" marB="45720" anchor="ctr">
-                    <a:lnL w="9525" cap="flat" cmpd="sng" algn="ctr">
-                      <a:solidFill>
-                        <a:srgbClr val="C9D3DB"/>
-                      </a:solidFill>
-                      <a:prstDash val="solid"/>
-                      <a:round/>
-                      <a:headEnd type="none" w="med" len="med"/>
-                      <a:tailEnd type="none" w="med" len="med"/>
-                    </a:lnL>
-                    <a:lnR w="9525" cap="flat" cmpd="sng" algn="ctr">
-                      <a:solidFill>
-                        <a:srgbClr val="C9D3DB"/>
-                      </a:solidFill>
-                      <a:prstDash val="solid"/>
-                      <a:round/>
-                      <a:headEnd type="none" w="med" len="med"/>
-                      <a:tailEnd type="none" w="med" len="med"/>
-                    </a:lnR>
-                    <a:lnT w="9525" cap="flat" cmpd="sng" algn="ctr">
-                      <a:solidFill>
-                        <a:srgbClr val="C9D3DB"/>
-                      </a:solidFill>
-                      <a:prstDash val="solid"/>
-                      <a:round/>
-                      <a:headEnd type="none" w="med" len="med"/>
-                      <a:tailEnd type="none" w="med" len="med"/>
-                    </a:lnT>
-                    <a:lnB w="9525" cap="flat" cmpd="sng" algn="ctr">
-                      <a:solidFill>
-                        <a:srgbClr val="C9D3DB"/>
-                      </a:solidFill>
-                      <a:prstDash val="solid"/>
-                      <a:round/>
-                      <a:headEnd type="none" w="med" len="med"/>
-                      <a:tailEnd type="none" w="med" len="med"/>
-                    </a:lnB>
-                  </a:tcPr>
-                </a:tc>
-                <a:tc>
-                  <a:txBody>
-                    <a:bodyPr/>
-                    <a:lstStyle/>
-                    <a:p>
-                      <a:pPr algn="ctr" indent="0" marL="0">
-                        <a:buNone/>
-                      </a:pPr>
-                      <a:r>
-                        <a:rPr lang="en-US" sz="1400" dirty="0">
-                          <a:solidFill>
-                            <a:srgbClr val="8A97A3"/>
-                          </a:solidFill>
-                          <a:latin typeface="Meiryo" pitchFamily="34" charset="0"/>
-                          <a:ea typeface="Meiryo" pitchFamily="34" charset="-122"/>
-                          <a:cs typeface="Meiryo" pitchFamily="34" charset="-120"/>
-                        </a:rPr>
-                        <a:t>【XX/XX】</a:t>
-                      </a:r>
-                      <a:endParaRPr lang="en-US" sz="1400" dirty="0">
-                        <a:latin typeface="Meiryo" charset="0"/>
-                        <a:ea typeface="Meiryo" charset="0"/>
-                        <a:cs typeface="Meiryo" charset="0"/>
-                      </a:endParaRPr>
-                    </a:p>
-                  </a:txBody>
-                  <a:tcPr marL="91440" marR="91440" marT="45720" marB="45720" anchor="ctr">
-                    <a:lnL w="9525" cap="flat" cmpd="sng" algn="ctr">
-                      <a:solidFill>
-                        <a:srgbClr val="C9D3DB"/>
-                      </a:solidFill>
-                      <a:prstDash val="solid"/>
-                      <a:round/>
-                      <a:headEnd type="none" w="med" len="med"/>
-                      <a:tailEnd type="none" w="med" len="med"/>
-                    </a:lnL>
-                    <a:lnR w="9525" cap="flat" cmpd="sng" algn="ctr">
-                      <a:solidFill>
-                        <a:srgbClr val="C9D3DB"/>
-                      </a:solidFill>
-                      <a:prstDash val="solid"/>
-                      <a:round/>
-                      <a:headEnd type="none" w="med" len="med"/>
-                      <a:tailEnd type="none" w="med" len="med"/>
-                    </a:lnR>
-                    <a:lnT w="9525" cap="flat" cmpd="sng" algn="ctr">
-                      <a:solidFill>
-                        <a:srgbClr val="C9D3DB"/>
-                      </a:solidFill>
-                      <a:prstDash val="solid"/>
-                      <a:round/>
-                      <a:headEnd type="none" w="med" len="med"/>
-                      <a:tailEnd type="none" w="med" len="med"/>
-                    </a:lnT>
-                    <a:lnB w="9525" cap="flat" cmpd="sng" algn="ctr">
-                      <a:solidFill>
-                        <a:srgbClr val="C9D3DB"/>
-                      </a:solidFill>
-                      <a:prstDash val="solid"/>
-                      <a:round/>
-                      <a:headEnd type="none" w="med" len="med"/>
-                      <a:tailEnd type="none" w="med" len="med"/>
-                    </a:lnB>
-                  </a:tcPr>
-                </a:tc>
-              </a:tr>
-            </a:tbl>
-          </a:graphicData>
-        </a:graphic>
-      </p:graphicFrame>
-      <p:sp>
-        <p:nvSpPr>
-          <p:cNvPr id="7" name="Text 4"/>
-          <p:cNvSpPr txBox="1"/>
-          <p:nvPr/>
-        </p:nvSpPr>
-        <p:spPr>
-          <a:xfrm>
-            <a:off x="5120640" y="4572000"/>
-            <a:ext cx="6492240" cy="365760"/>
-          </a:xfrm>
-          <a:prstGeom prst="rect">
-            <a:avLst/>
-          </a:prstGeom>
-          <a:noFill/>
-          <a:ln/>
-        </p:spPr>
-        <p:txBody>
-          <a:bodyPr wrap="square" lIns="0" tIns="0" rIns="0" bIns="0" rtlCol="0" anchor="ctr"/>
-          <a:lstStyle/>
-          <a:p>
-            <a:pPr indent="0" marL="0">
-              <a:buNone/>
-            </a:pPr>
-            <a:r>
-              <a:rPr lang="en-US" sz="1500" b="1" dirty="0">
-                <a:solidFill>
-                  <a:srgbClr val="1F3A4D"/>
-                </a:solidFill>
-                <a:latin typeface="Meiryo" pitchFamily="34" charset="0"/>
-                <a:ea typeface="Meiryo" pitchFamily="34" charset="-122"/>
-                <a:cs typeface="Meiryo" pitchFamily="34" charset="-120"/>
-              </a:rPr>
-              <a:t>次回会議：</a:t>
-            </a:r>
-            <a:pPr indent="0" marL="0">
-              <a:buNone/>
-            </a:pPr>
-            <a:r>
-              <a:rPr lang="en-US" sz="1500" dirty="0">
-                <a:solidFill>
-                  <a:srgbClr val="8A97A3"/>
-                </a:solidFill>
-                <a:latin typeface="Meiryo" pitchFamily="34" charset="0"/>
-                <a:ea typeface="Meiryo" pitchFamily="34" charset="-122"/>
-                <a:cs typeface="Meiryo" pitchFamily="34" charset="-120"/>
-              </a:rPr>
-              <a:t>【XX月XX日（X）XX:XX〜】</a:t>
-            </a:r>
-            <a:endParaRPr lang="en-US" sz="1500" dirty="0"/>
-          </a:p>
-        </p:txBody>
-      </p:sp>
-      <p:sp>
-        <p:nvSpPr>
-          <p:cNvPr id="8" name="Text 5"/>
-          <p:cNvSpPr txBox="1"/>
-          <p:nvPr/>
-        </p:nvSpPr>
-        <p:spPr>
-          <a:xfrm>
-            <a:off x="11155680" y="6400800"/>
-            <a:ext cx="548640" cy="274320"/>
-          </a:xfrm>
-          <a:prstGeom prst="rect">
-            <a:avLst/>
-          </a:prstGeom>
-          <a:noFill/>
-          <a:ln/>
-        </p:spPr>
-        <p:txBody>
-          <a:bodyPr wrap="square" lIns="0" tIns="0" rIns="0" bIns="0" rtlCol="0" anchor="ctr"/>
-          <a:lstStyle/>
-          <a:p>
-            <a:pPr algn="r" indent="0" marL="0">
-              <a:buNone/>
-            </a:pPr>
-            <a:r>
-              <a:rPr lang="en-US" sz="1000" dirty="0">
-                <a:solidFill>
-                  <a:srgbClr val="8A97A3"/>
-                </a:solidFill>
-                <a:latin typeface="Meiryo" pitchFamily="34" charset="0"/>
-                <a:ea typeface="Meiryo" pitchFamily="34" charset="-122"/>
-                <a:cs typeface="Meiryo" pitchFamily="34" charset="-120"/>
-              </a:rPr>
-              <a:t>18</a:t>
-            </a:r>
-            <a:endParaRPr lang="en-US" sz="1000" dirty="0"/>
-          </a:p>
-        </p:txBody>
-      </p:sp>
-    </p:spTree>
-  </p:cSld>
-  <p:clrMapOvr>
-    <a:masterClrMapping/>
-  </p:clrMapOvr>
-</p:sld>
-</file>
-
-<file path=ppt/slides/slide19.xml><?xml version="1.0" encoding="utf-8"?>
-<p:sld xmlns:a="http://schemas.openxmlformats.org/drawingml/2006/main" xmlns:r="http://schemas.openxmlformats.org/officeDocument/2006/relationships" xmlns:p="http://schemas.openxmlformats.org/presentationml/2006/main">
-  <p:cSld name="Slide 19">
-    <p:bg>
-      <p:bgPr>
-        <a:solidFill>
-          <a:srgbClr val="FFFFFF"/>
-        </a:solidFill>
-      </p:bgPr>
-    </p:bg>
-    <p:spTree>
-      <p:nvGrpSpPr>
-        <p:cNvPr id="1" name=""/>
-        <p:cNvGrpSpPr/>
-        <p:nvPr/>
-      </p:nvGrpSpPr>
-      <p:grpSpPr>
-        <a:xfrm>
-          <a:off x="0" y="0"/>
-          <a:ext cx="0" cy="0"/>
-          <a:chOff x="0" y="0"/>
-          <a:chExt cx="0" cy="0"/>
-        </a:xfrm>
-      </p:grpSpPr>
-      <p:sp>
-        <p:nvSpPr>
-          <p:cNvPr id="2" name="Text 0"/>
-          <p:cNvSpPr txBox="1"/>
-          <p:nvPr/>
-        </p:nvSpPr>
-        <p:spPr>
-          <a:xfrm>
-            <a:off x="548640" y="365760"/>
-            <a:ext cx="11064240" cy="731520"/>
-          </a:xfrm>
-          <a:prstGeom prst="rect">
-            <a:avLst/>
-          </a:prstGeom>
-          <a:noFill/>
-          <a:ln/>
-        </p:spPr>
-        <p:txBody>
-          <a:bodyPr wrap="square" lIns="0" tIns="0" rIns="0" bIns="0" rtlCol="0" anchor="ctr"/>
-          <a:lstStyle/>
-          <a:p>
-            <a:pPr indent="0" marL="0">
-              <a:buNone/>
-            </a:pPr>
-            <a:r>
-              <a:rPr lang="en-US" sz="3000" b="1" dirty="0">
-                <a:solidFill>
-                  <a:srgbClr val="1F3A4D"/>
-                </a:solidFill>
-                <a:latin typeface="Meiryo" pitchFamily="34" charset="0"/>
-                <a:ea typeface="Meiryo" pitchFamily="34" charset="-122"/>
-                <a:cs typeface="Meiryo" pitchFamily="34" charset="-120"/>
-              </a:rPr>
               <a:t>参考資料</a:t>
             </a:r>
             <a:endParaRPr lang="en-US" sz="3000" dirty="0"/>
@@ -11407,7 +12854,7 @@
                 <a:ea typeface="Meiryo" pitchFamily="34" charset="-122"/>
                 <a:cs typeface="Meiryo" pitchFamily="34" charset="-120"/>
               </a:rPr>
-              <a:t>19</a:t>
+              <a:t>17</a:t>
             </a:r>
             <a:endParaRPr lang="en-US" sz="1000" dirty="0"/>
           </a:p>
@@ -11478,7 +12925,7 @@
                 <a:ea typeface="Meiryo" pitchFamily="34" charset="-122"/>
                 <a:cs typeface="Meiryo" pitchFamily="34" charset="-120"/>
               </a:rPr>
-              <a:t>本日のアジェンダ</a:t>
+              <a:t>本日の内容</a:t>
             </a:r>
             <a:endParaRPr lang="en-US" sz="3000" dirty="0"/>
           </a:p>
@@ -12149,7 +13596,7 @@
                 <a:ea typeface="Meiryo" pitchFamily="34" charset="-122"/>
                 <a:cs typeface="Meiryo" pitchFamily="34" charset="-120"/>
               </a:rPr>
-              <a:t>論点・今後の進め方</a:t>
+              <a:t>本日の論点</a:t>
             </a:r>
             <a:endParaRPr lang="en-US" sz="2000" dirty="0"/>
           </a:p>
@@ -12188,7 +13635,7 @@
                 <a:ea typeface="Meiryo" pitchFamily="34" charset="-122"/>
                 <a:cs typeface="Meiryo" pitchFamily="34" charset="-120"/>
               </a:rPr>
-              <a:t>決定事項の確認・スケジュール・担当</a:t>
+              <a:t>ご議論いただきたい事項</a:t>
             </a:r>
             <a:endParaRPr lang="en-US" sz="1400" dirty="0"/>
           </a:p>
@@ -12600,7 +14047,7 @@
                 <a:ea typeface="Meiryo" pitchFamily="34" charset="-122"/>
                 <a:cs typeface="Meiryo" pitchFamily="34" charset="-120"/>
               </a:rPr>
-              <a:t>【今後の進め方を決定する】</a:t>
+              <a:t>【簡略化案の方向性を決定する】</a:t>
             </a:r>
             <a:endParaRPr lang="en-US" sz="1500" dirty="0"/>
           </a:p>
@@ -12712,7 +14159,7 @@
     <p:bg>
       <p:bgPr>
         <a:solidFill>
-          <a:srgbClr val="1F3A4D"/>
+          <a:srgbClr val="FFFFFF"/>
         </a:solidFill>
       </p:bgPr>
     </p:bg>
@@ -12796,7 +14243,7 @@
             <a:r>
               <a:rPr lang="en-US" sz="3400" b="1" dirty="0">
                 <a:solidFill>
-                  <a:srgbClr val="FFFFFF"/>
+                  <a:srgbClr val="1F3A4D"/>
                 </a:solidFill>
                 <a:latin typeface="Meiryo" pitchFamily="34" charset="0"/>
                 <a:ea typeface="Meiryo" pitchFamily="34" charset="-122"/>
@@ -12835,7 +14282,7 @@
             <a:r>
               <a:rPr lang="en-US" sz="1600" dirty="0">
                 <a:solidFill>
-                  <a:srgbClr val="B9C8D4"/>
+                  <a:srgbClr val="8A97A3"/>
                 </a:solidFill>
                 <a:latin typeface="Meiryo" pitchFamily="34" charset="0"/>
                 <a:ea typeface="Meiryo" pitchFamily="34" charset="-122"/>
@@ -15574,7 +17021,7 @@
     <p:bg>
       <p:bgPr>
         <a:solidFill>
-          <a:srgbClr val="1F3A4D"/>
+          <a:srgbClr val="FFFFFF"/>
         </a:solidFill>
       </p:bgPr>
     </p:bg>
@@ -15658,7 +17105,7 @@
             <a:r>
               <a:rPr lang="en-US" sz="3400" b="1" dirty="0">
                 <a:solidFill>
-                  <a:srgbClr val="FFFFFF"/>
+                  <a:srgbClr val="1F3A4D"/>
                 </a:solidFill>
                 <a:latin typeface="Meiryo" pitchFamily="34" charset="0"/>
                 <a:ea typeface="Meiryo" pitchFamily="34" charset="-122"/>
@@ -15697,7 +17144,7 @@
             <a:r>
               <a:rPr lang="en-US" sz="1600" dirty="0">
                 <a:solidFill>
-                  <a:srgbClr val="B9C8D4"/>
+                  <a:srgbClr val="8A97A3"/>
                 </a:solidFill>
                 <a:latin typeface="Meiryo" pitchFamily="34" charset="0"/>
                 <a:ea typeface="Meiryo" pitchFamily="34" charset="-122"/>
@@ -15782,7 +17229,46 @@
       </p:sp>
       <p:sp>
         <p:nvSpPr>
-          <p:cNvPr id="3" name="Shape 1"/>
+          <p:cNvPr id="3" name="Text 1"/>
+          <p:cNvSpPr txBox="1"/>
+          <p:nvPr/>
+        </p:nvSpPr>
+        <p:spPr>
+          <a:xfrm>
+            <a:off x="548640" y="1051560"/>
+            <a:ext cx="11064240" cy="365760"/>
+          </a:xfrm>
+          <a:prstGeom prst="rect">
+            <a:avLst/>
+          </a:prstGeom>
+          <a:noFill/>
+          <a:ln/>
+        </p:spPr>
+        <p:txBody>
+          <a:bodyPr wrap="square" lIns="0" tIns="0" rIns="0" bIns="0" rtlCol="0" anchor="ctr"/>
+          <a:lstStyle/>
+          <a:p>
+            <a:pPr indent="0" marL="0">
+              <a:buNone/>
+            </a:pPr>
+            <a:r>
+              <a:rPr lang="en-US" sz="1400" dirty="0">
+                <a:solidFill>
+                  <a:srgbClr val="8A97A3"/>
+                </a:solidFill>
+                <a:latin typeface="Meiryo" pitchFamily="34" charset="0"/>
+                <a:ea typeface="Meiryo" pitchFamily="34" charset="-122"/>
+                <a:cs typeface="Meiryo" pitchFamily="34" charset="-120"/>
+              </a:rPr>
+              <a:t>スライド調書（様式4-2号）の算式</a:t>
+            </a:r>
+            <a:endParaRPr lang="en-US" sz="1400" dirty="0"/>
+          </a:p>
+        </p:txBody>
+      </p:sp>
+      <p:sp>
+        <p:nvSpPr>
+          <p:cNvPr id="4" name="Shape 2"/>
           <p:cNvSpPr/>
           <p:nvPr/>
         </p:nvSpPr>
@@ -15797,11 +17283,11 @@
             </a:avLst>
           </a:prstGeom>
           <a:solidFill>
-            <a:srgbClr val="1F3A4D"/>
+            <a:srgbClr val="EEF2F5"/>
           </a:solidFill>
           <a:ln w="12700">
             <a:solidFill>
-              <a:srgbClr val="1F3A4D"/>
+              <a:srgbClr val="EEF2F5"/>
             </a:solidFill>
             <a:prstDash val="solid"/>
           </a:ln>
@@ -15809,7 +17295,7 @@
       </p:sp>
       <p:sp>
         <p:nvSpPr>
-          <p:cNvPr id="4" name="Text 2"/>
+          <p:cNvPr id="5" name="Text 3"/>
           <p:cNvSpPr txBox="1"/>
           <p:nvPr/>
         </p:nvSpPr>
@@ -15834,13 +17320,13 @@
             <a:r>
               <a:rPr lang="en-US" sz="3400" b="1" dirty="0">
                 <a:solidFill>
-                  <a:srgbClr val="FFFFFF"/>
+                  <a:srgbClr val="1F3A4D"/>
                 </a:solidFill>
                 <a:latin typeface="Meiryo" pitchFamily="34" charset="0"/>
                 <a:ea typeface="Meiryo" pitchFamily="34" charset="-122"/>
                 <a:cs typeface="Meiryo" pitchFamily="34" charset="-120"/>
               </a:rPr>
-              <a:t>スライド額 S ＝ </a:t>
+              <a:t>スライド額 S' ＝ </a:t>
             </a:r>
             <a:pPr algn="ctr" indent="0" marL="0">
               <a:buNone/>
@@ -15854,7 +17340,7 @@
                 <a:ea typeface="Meiryo" pitchFamily="34" charset="-122"/>
                 <a:cs typeface="Meiryo" pitchFamily="34" charset="-120"/>
               </a:rPr>
-              <a:t>( P2 − P1 )</a:t>
+              <a:t>( P2' − P1' )</a:t>
             </a:r>
             <a:pPr algn="ctr" indent="0" marL="0">
               <a:buNone/>
@@ -15862,13 +17348,13 @@
             <a:r>
               <a:rPr lang="en-US" sz="3400" b="1" dirty="0">
                 <a:solidFill>
-                  <a:srgbClr val="FFFFFF"/>
+                  <a:srgbClr val="1F3A4D"/>
                 </a:solidFill>
                 <a:latin typeface="Meiryo" pitchFamily="34" charset="0"/>
                 <a:ea typeface="Meiryo" pitchFamily="34" charset="-122"/>
                 <a:cs typeface="Meiryo" pitchFamily="34" charset="-120"/>
               </a:rPr>
-              <a:t> − P1 × 1/100</a:t>
+              <a:t> − P1'' × 1/100</a:t>
             </a:r>
             <a:endParaRPr lang="en-US" sz="3400" dirty="0"/>
           </a:p>
@@ -15876,7 +17362,7 @@
       </p:sp>
       <p:sp>
         <p:nvSpPr>
-          <p:cNvPr id="5" name="Shape 3"/>
+          <p:cNvPr id="6" name="Shape 4"/>
           <p:cNvSpPr/>
           <p:nvPr/>
         </p:nvSpPr>
@@ -15903,7 +17389,7 @@
       </p:sp>
       <p:sp>
         <p:nvSpPr>
-          <p:cNvPr id="6" name="Text 4"/>
+          <p:cNvPr id="7" name="Text 5"/>
           <p:cNvSpPr txBox="1"/>
           <p:nvPr/>
         </p:nvSpPr>
@@ -15926,7 +17412,7 @@
               <a:buNone/>
             </a:pPr>
             <a:r>
-              <a:rPr lang="en-US" sz="1800" b="1" dirty="0">
+              <a:rPr lang="en-US" sz="1700" b="1" dirty="0">
                 <a:solidFill>
                   <a:srgbClr val="1F3A4D"/>
                 </a:solidFill>
@@ -15934,22 +17420,22 @@
                 <a:ea typeface="Arial" pitchFamily="34" charset="-122"/>
                 <a:cs typeface="Arial" pitchFamily="34" charset="-120"/>
               </a:rPr>
-              <a:t>S</a:t>
+              <a:t>S'</a:t>
             </a:r>
-            <a:endParaRPr lang="en-US" sz="1800" dirty="0"/>
+            <a:endParaRPr lang="en-US" sz="1700" dirty="0"/>
           </a:p>
         </p:txBody>
       </p:sp>
       <p:sp>
         <p:nvSpPr>
-          <p:cNvPr id="7" name="Text 5"/>
+          <p:cNvPr id="8" name="Text 6"/>
           <p:cNvSpPr txBox="1"/>
           <p:nvPr/>
         </p:nvSpPr>
         <p:spPr>
           <a:xfrm>
             <a:off x="1874520" y="3383280"/>
-            <a:ext cx="2926080" cy="548640"/>
+            <a:ext cx="3291840" cy="548640"/>
           </a:xfrm>
           <a:prstGeom prst="rect">
             <a:avLst/>
@@ -15965,7 +17451,7 @@
               <a:buNone/>
             </a:pPr>
             <a:r>
-              <a:rPr lang="en-US" sz="1600" b="1" dirty="0">
+              <a:rPr lang="en-US" sz="1400" b="1" dirty="0">
                 <a:solidFill>
                   <a:srgbClr val="2B2B2B"/>
                 </a:solidFill>
@@ -15973,22 +17459,22 @@
                 <a:ea typeface="Meiryo" pitchFamily="34" charset="-122"/>
                 <a:cs typeface="Meiryo" pitchFamily="34" charset="-120"/>
               </a:rPr>
-              <a:t>インフレスライド額</a:t>
+              <a:t>スライド額</a:t>
             </a:r>
-            <a:endParaRPr lang="en-US" sz="1600" dirty="0"/>
+            <a:endParaRPr lang="en-US" sz="1400" dirty="0"/>
           </a:p>
         </p:txBody>
       </p:sp>
       <p:sp>
         <p:nvSpPr>
-          <p:cNvPr id="8" name="Text 6"/>
+          <p:cNvPr id="9" name="Text 7"/>
           <p:cNvSpPr txBox="1"/>
           <p:nvPr/>
         </p:nvSpPr>
         <p:spPr>
           <a:xfrm>
-            <a:off x="4846320" y="3383280"/>
-            <a:ext cx="6766560" cy="548640"/>
+            <a:off x="5303520" y="3383280"/>
+            <a:ext cx="6309360" cy="548640"/>
           </a:xfrm>
           <a:prstGeom prst="rect">
             <a:avLst/>
@@ -16006,13 +17492,13 @@
             <a:r>
               <a:rPr lang="en-US" sz="1400" dirty="0">
                 <a:solidFill>
-                  <a:srgbClr val="8A97A3"/>
+                  <a:srgbClr val="2B2B2B"/>
                 </a:solidFill>
                 <a:latin typeface="Meiryo" pitchFamily="34" charset="0"/>
                 <a:ea typeface="Meiryo" pitchFamily="34" charset="-122"/>
                 <a:cs typeface="Meiryo" pitchFamily="34" charset="-120"/>
               </a:rPr>
-              <a:t>【定義・留意点を記入】</a:t>
+              <a:t>増額スライドは1%を控除、減額スライドは1%を戻す（− → ＋）</a:t>
             </a:r>
             <a:endParaRPr lang="en-US" sz="1400" dirty="0"/>
           </a:p>
@@ -16020,7 +17506,7 @@
       </p:sp>
       <p:sp>
         <p:nvSpPr>
-          <p:cNvPr id="9" name="Shape 7"/>
+          <p:cNvPr id="10" name="Shape 8"/>
           <p:cNvSpPr/>
           <p:nvPr/>
         </p:nvSpPr>
@@ -16047,7 +17533,7 @@
       </p:sp>
       <p:sp>
         <p:nvSpPr>
-          <p:cNvPr id="10" name="Text 8"/>
+          <p:cNvPr id="11" name="Text 9"/>
           <p:cNvSpPr txBox="1"/>
           <p:nvPr/>
         </p:nvSpPr>
@@ -16070,7 +17556,7 @@
               <a:buNone/>
             </a:pPr>
             <a:r>
-              <a:rPr lang="en-US" sz="1800" b="1" dirty="0">
+              <a:rPr lang="en-US" sz="1700" b="1" dirty="0">
                 <a:solidFill>
                   <a:srgbClr val="1F3A4D"/>
                 </a:solidFill>
@@ -16078,22 +17564,22 @@
                 <a:ea typeface="Arial" pitchFamily="34" charset="-122"/>
                 <a:cs typeface="Arial" pitchFamily="34" charset="-120"/>
               </a:rPr>
-              <a:t>P1</a:t>
+              <a:t>P1'</a:t>
             </a:r>
-            <a:endParaRPr lang="en-US" sz="1800" dirty="0"/>
+            <a:endParaRPr lang="en-US" sz="1700" dirty="0"/>
           </a:p>
         </p:txBody>
       </p:sp>
       <p:sp>
         <p:nvSpPr>
-          <p:cNvPr id="11" name="Text 9"/>
+          <p:cNvPr id="12" name="Text 10"/>
           <p:cNvSpPr txBox="1"/>
           <p:nvPr/>
         </p:nvSpPr>
         <p:spPr>
           <a:xfrm>
             <a:off x="1874520" y="4114800"/>
-            <a:ext cx="2926080" cy="548640"/>
+            <a:ext cx="3291840" cy="548640"/>
           </a:xfrm>
           <a:prstGeom prst="rect">
             <a:avLst/>
@@ -16109,7 +17595,7 @@
               <a:buNone/>
             </a:pPr>
             <a:r>
-              <a:rPr lang="en-US" sz="1600" b="1" dirty="0">
+              <a:rPr lang="en-US" sz="1400" b="1" dirty="0">
                 <a:solidFill>
                   <a:srgbClr val="2B2B2B"/>
                 </a:solidFill>
@@ -16117,22 +17603,22 @@
                 <a:ea typeface="Meiryo" pitchFamily="34" charset="-122"/>
                 <a:cs typeface="Meiryo" pitchFamily="34" charset="-120"/>
               </a:rPr>
-              <a:t>変動前残工事代金額</a:t>
+              <a:t>残工事（変動前・請負ベース）</a:t>
             </a:r>
-            <a:endParaRPr lang="en-US" sz="1600" dirty="0"/>
+            <a:endParaRPr lang="en-US" sz="1400" dirty="0"/>
           </a:p>
         </p:txBody>
       </p:sp>
       <p:sp>
         <p:nvSpPr>
-          <p:cNvPr id="12" name="Text 10"/>
+          <p:cNvPr id="13" name="Text 11"/>
           <p:cNvSpPr txBox="1"/>
           <p:nvPr/>
         </p:nvSpPr>
         <p:spPr>
           <a:xfrm>
-            <a:off x="4846320" y="4114800"/>
-            <a:ext cx="6766560" cy="548640"/>
+            <a:off x="5303520" y="4114800"/>
+            <a:ext cx="6309360" cy="548640"/>
           </a:xfrm>
           <a:prstGeom prst="rect">
             <a:avLst/>
@@ -16150,13 +17636,13 @@
             <a:r>
               <a:rPr lang="en-US" sz="1400" dirty="0">
                 <a:solidFill>
-                  <a:srgbClr val="8A97A3"/>
+                  <a:srgbClr val="2B2B2B"/>
                 </a:solidFill>
                 <a:latin typeface="Meiryo" pitchFamily="34" charset="0"/>
                 <a:ea typeface="Meiryo" pitchFamily="34" charset="-122"/>
                 <a:cs typeface="Meiryo" pitchFamily="34" charset="-120"/>
               </a:rPr>
-              <a:t>【例：基準日における残工事量を変動前の単価で積算した額 × 落札率】</a:t>
+              <a:t>④請負工事価格 − ⑥出来高（請負率考慮）</a:t>
             </a:r>
             <a:endParaRPr lang="en-US" sz="1400" dirty="0"/>
           </a:p>
@@ -16164,7 +17650,7 @@
       </p:sp>
       <p:sp>
         <p:nvSpPr>
-          <p:cNvPr id="13" name="Shape 11"/>
+          <p:cNvPr id="14" name="Shape 12"/>
           <p:cNvSpPr/>
           <p:nvPr/>
         </p:nvSpPr>
@@ -16191,7 +17677,7 @@
       </p:sp>
       <p:sp>
         <p:nvSpPr>
-          <p:cNvPr id="14" name="Text 12"/>
+          <p:cNvPr id="15" name="Text 13"/>
           <p:cNvSpPr txBox="1"/>
           <p:nvPr/>
         </p:nvSpPr>
@@ -16214,7 +17700,7 @@
               <a:buNone/>
             </a:pPr>
             <a:r>
-              <a:rPr lang="en-US" sz="1800" b="1" dirty="0">
+              <a:rPr lang="en-US" sz="1700" b="1" dirty="0">
                 <a:solidFill>
                   <a:srgbClr val="1F3A4D"/>
                 </a:solidFill>
@@ -16222,22 +17708,22 @@
                 <a:ea typeface="Arial" pitchFamily="34" charset="-122"/>
                 <a:cs typeface="Arial" pitchFamily="34" charset="-120"/>
               </a:rPr>
-              <a:t>P2</a:t>
+              <a:t>P2'</a:t>
             </a:r>
-            <a:endParaRPr lang="en-US" sz="1800" dirty="0"/>
+            <a:endParaRPr lang="en-US" sz="1700" dirty="0"/>
           </a:p>
         </p:txBody>
       </p:sp>
       <p:sp>
         <p:nvSpPr>
-          <p:cNvPr id="15" name="Text 13"/>
+          <p:cNvPr id="16" name="Text 14"/>
           <p:cNvSpPr txBox="1"/>
           <p:nvPr/>
         </p:nvSpPr>
         <p:spPr>
           <a:xfrm>
             <a:off x="1874520" y="4846320"/>
-            <a:ext cx="2926080" cy="548640"/>
+            <a:ext cx="3291840" cy="548640"/>
           </a:xfrm>
           <a:prstGeom prst="rect">
             <a:avLst/>
@@ -16253,7 +17739,7 @@
               <a:buNone/>
             </a:pPr>
             <a:r>
-              <a:rPr lang="en-US" sz="1600" b="1" dirty="0">
+              <a:rPr lang="en-US" sz="1400" b="1" dirty="0">
                 <a:solidFill>
                   <a:srgbClr val="2B2B2B"/>
                 </a:solidFill>
@@ -16261,22 +17747,22 @@
                 <a:ea typeface="Meiryo" pitchFamily="34" charset="-122"/>
                 <a:cs typeface="Meiryo" pitchFamily="34" charset="-120"/>
               </a:rPr>
-              <a:t>変動後残工事代金額</a:t>
+              <a:t>残工事（変動後・請負ベース）</a:t>
             </a:r>
-            <a:endParaRPr lang="en-US" sz="1600" dirty="0"/>
+            <a:endParaRPr lang="en-US" sz="1400" dirty="0"/>
           </a:p>
         </p:txBody>
       </p:sp>
       <p:sp>
         <p:nvSpPr>
-          <p:cNvPr id="16" name="Text 14"/>
+          <p:cNvPr id="17" name="Text 15"/>
           <p:cNvSpPr txBox="1"/>
           <p:nvPr/>
         </p:nvSpPr>
         <p:spPr>
           <a:xfrm>
-            <a:off x="4846320" y="4846320"/>
-            <a:ext cx="6766560" cy="548640"/>
+            <a:off x="5303520" y="4846320"/>
+            <a:ext cx="6309360" cy="548640"/>
           </a:xfrm>
           <a:prstGeom prst="rect">
             <a:avLst/>
@@ -16294,13 +17780,13 @@
             <a:r>
               <a:rPr lang="en-US" sz="1400" dirty="0">
                 <a:solidFill>
-                  <a:srgbClr val="8A97A3"/>
+                  <a:srgbClr val="2B2B2B"/>
                 </a:solidFill>
                 <a:latin typeface="Meiryo" pitchFamily="34" charset="0"/>
                 <a:ea typeface="Meiryo" pitchFamily="34" charset="-122"/>
                 <a:cs typeface="Meiryo" pitchFamily="34" charset="-120"/>
               </a:rPr>
-              <a:t>【例：基準日における残工事量を変動後の単価で積算した額 × 落札率】</a:t>
+              <a:t>⑧変動後残工事 × 請負率（③/①）</a:t>
             </a:r>
             <a:endParaRPr lang="en-US" sz="1400" dirty="0"/>
           </a:p>
@@ -16308,7 +17794,7 @@
       </p:sp>
       <p:sp>
         <p:nvSpPr>
-          <p:cNvPr id="17" name="Shape 15"/>
+          <p:cNvPr id="18" name="Shape 16"/>
           <p:cNvSpPr/>
           <p:nvPr/>
         </p:nvSpPr>
@@ -16335,7 +17821,7 @@
       </p:sp>
       <p:sp>
         <p:nvSpPr>
-          <p:cNvPr id="18" name="Text 16"/>
+          <p:cNvPr id="19" name="Text 17"/>
           <p:cNvSpPr txBox="1"/>
           <p:nvPr/>
         </p:nvSpPr>
@@ -16358,7 +17844,7 @@
               <a:buNone/>
             </a:pPr>
             <a:r>
-              <a:rPr lang="en-US" sz="1800" b="1" dirty="0">
+              <a:rPr lang="en-US" sz="1700" b="1" dirty="0">
                 <a:solidFill>
                   <a:srgbClr val="1F3A4D"/>
                 </a:solidFill>
@@ -16366,22 +17852,22 @@
                 <a:ea typeface="Arial" pitchFamily="34" charset="-122"/>
                 <a:cs typeface="Arial" pitchFamily="34" charset="-120"/>
               </a:rPr>
-              <a:t>1/100</a:t>
+              <a:t>P1''</a:t>
             </a:r>
-            <a:endParaRPr lang="en-US" sz="1800" dirty="0"/>
+            <a:endParaRPr lang="en-US" sz="1700" dirty="0"/>
           </a:p>
         </p:txBody>
       </p:sp>
       <p:sp>
         <p:nvSpPr>
-          <p:cNvPr id="19" name="Text 17"/>
+          <p:cNvPr id="20" name="Text 18"/>
           <p:cNvSpPr txBox="1"/>
           <p:nvPr/>
         </p:nvSpPr>
         <p:spPr>
           <a:xfrm>
             <a:off x="1874520" y="5577840"/>
-            <a:ext cx="2926080" cy="548640"/>
+            <a:ext cx="3291840" cy="548640"/>
           </a:xfrm>
           <a:prstGeom prst="rect">
             <a:avLst/>
@@ -16397,7 +17883,7 @@
               <a:buNone/>
             </a:pPr>
             <a:r>
-              <a:rPr lang="en-US" sz="1600" b="1" dirty="0">
+              <a:rPr lang="en-US" sz="1400" b="1" dirty="0">
                 <a:solidFill>
                   <a:srgbClr val="2B2B2B"/>
                 </a:solidFill>
@@ -16405,22 +17891,22 @@
                 <a:ea typeface="Meiryo" pitchFamily="34" charset="-122"/>
                 <a:cs typeface="Meiryo" pitchFamily="34" charset="-120"/>
               </a:rPr>
-              <a:t>受注者負担分</a:t>
+              <a:t>新工種抜きの残工事（請負ベース）</a:t>
             </a:r>
-            <a:endParaRPr lang="en-US" sz="1600" dirty="0"/>
+            <a:endParaRPr lang="en-US" sz="1400" dirty="0"/>
           </a:p>
         </p:txBody>
       </p:sp>
       <p:sp>
         <p:nvSpPr>
-          <p:cNvPr id="20" name="Text 18"/>
+          <p:cNvPr id="21" name="Text 19"/>
           <p:cNvSpPr txBox="1"/>
           <p:nvPr/>
         </p:nvSpPr>
         <p:spPr>
           <a:xfrm>
-            <a:off x="4846320" y="5577840"/>
-            <a:ext cx="6766560" cy="548640"/>
+            <a:off x="5303520" y="5577840"/>
+            <a:ext cx="6309360" cy="548640"/>
           </a:xfrm>
           <a:prstGeom prst="rect">
             <a:avLst/>
@@ -16438,13 +17924,13 @@
             <a:r>
               <a:rPr lang="en-US" sz="1400" dirty="0">
                 <a:solidFill>
-                  <a:srgbClr val="8A97A3"/>
+                  <a:srgbClr val="2B2B2B"/>
                 </a:solidFill>
                 <a:latin typeface="Meiryo" pitchFamily="34" charset="0"/>
                 <a:ea typeface="Meiryo" pitchFamily="34" charset="-122"/>
                 <a:cs typeface="Meiryo" pitchFamily="34" charset="-120"/>
               </a:rPr>
-              <a:t>【残工事費の1%を受注者が負担】</a:t>
+              <a:t>⑨ − ⑩　※受注者負担1%の母数（新工種は除く）</a:t>
             </a:r>
             <a:endParaRPr lang="en-US" sz="1400" dirty="0"/>
           </a:p>
@@ -16452,7 +17938,7 @@
       </p:sp>
       <p:sp>
         <p:nvSpPr>
-          <p:cNvPr id="21" name="Text 19"/>
+          <p:cNvPr id="22" name="Text 20"/>
           <p:cNvSpPr txBox="1"/>
           <p:nvPr/>
         </p:nvSpPr>
@@ -17106,7 +18592,7 @@
                 <a:ea typeface="Meiryo" pitchFamily="34" charset="-122"/>
                 <a:cs typeface="Meiryo" pitchFamily="34" charset="-120"/>
               </a:rPr>
-              <a:t>P1・P2を積算する</a:t>
+              <a:t>P1'・P2'・P1''を算出する</a:t>
             </a:r>
             <a:endParaRPr lang="en-US" sz="1800" dirty="0"/>
           </a:p>
@@ -17145,7 +18631,7 @@
                 <a:ea typeface="Meiryo" pitchFamily="34" charset="-122"/>
                 <a:cs typeface="Meiryo" pitchFamily="34" charset="-120"/>
               </a:rPr>
-              <a:t>【積算方法・落札率の扱いを記入】</a:t>
+              <a:t>【経費計算・請負率の扱いを記入】</a:t>
             </a:r>
             <a:endParaRPr lang="en-US" sz="1400" dirty="0"/>
           </a:p>
